--- a/shuukatsu-app/AI活用ふりかえり発表_2分版.pptx
+++ b/shuukatsu-app/AI活用ふりかえり発表_2分版.pptx
@@ -823,7 +823,11 @@
           <a:p>
             <a:r>
               <a:rPr lang="en-US" dirty="0"/>
-              <a:t/>
+              <a:t>【約18秒】
+就活生向けの支援サイトを開発しました。AI面接、ES添削、自己分析による企業マッチングを実装し、完成度は5段階中3です。
+（一拍）
+ただ今日お伝えしたいのは成果物そのものではなく、この開発を通じてAIをどう活用し、どう試行錯誤したかというプロセスです。
+★強調：「成果物そのものではなく」で声のトーンを一段落とし、評価軸の転換を印象づける。</a:t>
             </a:r>
             <a:endParaRPr lang="en-US" dirty="0"/>
           </a:p>
@@ -911,7 +915,11 @@
           <a:p>
             <a:r>
               <a:rPr lang="en-US" dirty="0"/>
-              <a:t/>
+              <a:t>【約16秒】
+一人でこの規模のサイトを作るには、通常2日ほどかかります。API通信やNext.jsの状態管理など、初学者にはハードルの高い要素も多くありました。
+（一拍）
+そこで、独力で抱え込むのではなく、AIと協働して開発サイクルを回す方針を選びました。
+★強調：「独力で抱え込むのではなく」で声を落とし、「AIと協働して」で上げる。対比を声で作る。</a:t>
             </a:r>
             <a:endParaRPr lang="en-US" dirty="0"/>
           </a:p>
@@ -999,7 +1007,11 @@
           <a:p>
             <a:r>
               <a:rPr lang="en-US" dirty="0"/>
-              <a:t/>
+              <a:t>【約15秒】
+開発中に直面した壁は主に5つです。API通信、Next.jsの設計、状態管理、CSV読み込み、そして原因が見えにくいデバッグ。
+（一拍）
+特にデバッグは、エラーの再現条件が分からず、何度も同じ場所で詰まりました。
+★強調：「デバッグ」を言うときに一番間を取る。次のスライドへの橋渡しになる言葉なので少し強めに。</a:t>
             </a:r>
             <a:endParaRPr lang="en-US" dirty="0"/>
           </a:p>
@@ -1087,7 +1099,11 @@
           <a:p>
             <a:r>
               <a:rPr lang="en-US" dirty="0"/>
-              <a:t/>
+              <a:t>【約22秒・ここが核心】
+ここが今日の核心です。ChatGPTには仕様決定・アイデア出し・原因予測などの「考える」役割を、Claudeにはコード生成・デバッグ・修正などの「作る」役割を担わせました。
+（一拍）
+設計→実装→確認→エラー→原因分析→修正→再テストというサイクルを何度も回し、コードの8〜9割はAIが生成しています。
+★強調：円環図のノードが出現する順に合わせて「設計→実装→確認→エラー→原因分析→修正→再テスト」を読み上げ、図と言葉を同期させる。「8〜9割はAIが生成」は数字が出た瞬間に言い切る。</a:t>
             </a:r>
             <a:endParaRPr lang="en-US" dirty="0"/>
           </a:p>
@@ -1175,7 +1191,11 @@
           <a:p>
             <a:r>
               <a:rPr lang="en-US" dirty="0"/>
-              <a:t/>
+              <a:t>【約22秒】
+一番効果的だった工夫は、AIに曖昧に質問しないことです。「エラーが出ました」ではなく、いつ・どの画面で・何回目の操作で・ログとエラーメッセージ・関連コードまでまとめて渡す。
+（一拍）
+実際には『6問目でレスポンスが返らない、関連ファイルはこの3つ』というレベルまで具体化しました。これだけで解決率が大きく上がりました。
+★強調：「解決率が大きく上がりました」を言い切りで終える。ここが工夫スライドの結論なので、少しゆっくり話す。</a:t>
             </a:r>
             <a:endParaRPr lang="en-US" dirty="0"/>
           </a:p>
@@ -1263,7 +1283,11 @@
           <a:p>
             <a:r>
               <a:rPr lang="en-US" dirty="0"/>
-              <a:t/>
+              <a:t>【約18秒】
+結果として、想定2日かかる開発を約8時間に短縮できました。コードの8〜9割はAIが生成しています。
+（一拍）
+完成度は5段階中3で、まだ改善の余地はありますが、この短期間でここまで到達できたこと自体が、AI活用プロセスの成果だと考えています。
+★強調：棒グラフが伸びきったタイミングで「8時間に短縮できました」を言う。完成度3/5は謙遜せず淡々と事実として述べる（正直さが評価される）。</a:t>
             </a:r>
             <a:endParaRPr lang="en-US" dirty="0"/>
           </a:p>
@@ -1351,7 +1375,12 @@
           <a:p>
             <a:r>
               <a:rPr lang="en-US" dirty="0"/>
-              <a:t/>
+              <a:t>【約15秒＋締め15秒】
+ChatGPTとClaudeの役割を分け、開発サイクルを繰り返しました。曖昧に質問しないことが、AI活用の質を最も左右しました。開発時間は2日から8時間に短縮。
+この発表で伝えたいのは、成果物の完成度よりも、AIとどう向き合ったかというプロセスそのものです。
+（ここで一呼吸おいて、締めの言葉へ）
+「今回の開発で実感したのは、AIは答えを出す道具ではなく、『問いの質』がそのまま成果の質になる相棒だということです。状況・ログ・意図まで言語化して渡すことで、開発は2日から8時間になりました。これからのAI時代に問われるのは技術力そのものより、正しく問いを立てる力だと思います。」
+★強調：急がず、まとめのスライド文言と重ねながらゆっくり話す。最後の一文は聴衆の目を見て言い切る。</a:t>
             </a:r>
             <a:endParaRPr lang="en-US" dirty="0"/>
           </a:p>
@@ -2352,7 +2381,7 @@
       </p:sp>
       <p:sp>
         <p:nvSpPr>
-          <p:cNvPr id="24" name="Text 14"/>
+          <p:cNvPr id="25" name="Text 14"/>
           <p:cNvSpPr/>
           <p:nvPr/>
         </p:nvSpPr>
@@ -2391,7 +2420,7 @@
       </p:sp>
       <p:sp>
         <p:nvSpPr>
-          <p:cNvPr id="25" name="Text 15"/>
+          <p:cNvPr id="26" name="Text 15"/>
           <p:cNvSpPr/>
           <p:nvPr/>
         </p:nvSpPr>
@@ -3103,7 +3132,7 @@
       </p:sp>
       <p:sp>
         <p:nvSpPr>
-          <p:cNvPr id="21" name="Text 17"/>
+          <p:cNvPr id="22" name="Text 17"/>
           <p:cNvSpPr/>
           <p:nvPr/>
         </p:nvSpPr>
@@ -3142,7 +3171,7 @@
       </p:sp>
       <p:sp>
         <p:nvSpPr>
-          <p:cNvPr id="22" name="Text 18"/>
+          <p:cNvPr id="23" name="Text 18"/>
           <p:cNvSpPr/>
           <p:nvPr/>
         </p:nvSpPr>
@@ -3877,7 +3906,7 @@
       </p:sp>
       <p:sp>
         <p:nvSpPr>
-          <p:cNvPr id="26" name="Text 19"/>
+          <p:cNvPr id="27" name="Text 19"/>
           <p:cNvSpPr/>
           <p:nvPr/>
         </p:nvSpPr>
@@ -3916,7 +3945,7 @@
       </p:sp>
       <p:sp>
         <p:nvSpPr>
-          <p:cNvPr id="27" name="Text 20"/>
+          <p:cNvPr id="28" name="Text 20"/>
           <p:cNvSpPr/>
           <p:nvPr/>
         </p:nvSpPr>
@@ -5207,7 +5236,7 @@
       </p:sp>
       <p:sp>
         <p:nvSpPr>
-          <p:cNvPr id="37" name="Text 35"/>
+          <p:cNvPr id="38" name="Text 35"/>
           <p:cNvSpPr/>
           <p:nvPr/>
         </p:nvSpPr>
@@ -5246,7 +5275,7 @@
       </p:sp>
       <p:sp>
         <p:nvSpPr>
-          <p:cNvPr id="38" name="Text 36"/>
+          <p:cNvPr id="39" name="Text 36"/>
           <p:cNvSpPr/>
           <p:nvPr/>
         </p:nvSpPr>
@@ -6162,7 +6191,7 @@
       </p:sp>
       <p:sp>
         <p:nvSpPr>
-          <p:cNvPr id="30" name="Text 26"/>
+          <p:cNvPr id="31" name="Text 26"/>
           <p:cNvSpPr/>
           <p:nvPr/>
         </p:nvSpPr>
@@ -6201,7 +6230,7 @@
       </p:sp>
       <p:sp>
         <p:nvSpPr>
-          <p:cNvPr id="31" name="Text 27"/>
+          <p:cNvPr id="32" name="Text 27"/>
           <p:cNvSpPr/>
           <p:nvPr/>
         </p:nvSpPr>
@@ -6747,7 +6776,7 @@
       </p:sp>
       <p:sp>
         <p:nvSpPr>
-          <p:cNvPr id="18" name="Text 10"/>
+          <p:cNvPr id="19" name="Text 10"/>
           <p:cNvSpPr/>
           <p:nvPr/>
         </p:nvSpPr>
@@ -6786,7 +6815,7 @@
       </p:sp>
       <p:sp>
         <p:nvSpPr>
-          <p:cNvPr id="19" name="Text 11"/>
+          <p:cNvPr id="20" name="Text 11"/>
           <p:cNvSpPr/>
           <p:nvPr/>
         </p:nvSpPr>
@@ -7258,7 +7287,7 @@
       </p:sp>
       <p:sp>
         <p:nvSpPr>
-          <p:cNvPr id="15" name="Text 10"/>
+          <p:cNvPr id="16" name="Text 10"/>
           <p:cNvSpPr/>
           <p:nvPr/>
         </p:nvSpPr>
@@ -7297,7 +7326,7 @@
       </p:sp>
       <p:sp>
         <p:nvSpPr>
-          <p:cNvPr id="16" name="Text 11"/>
+          <p:cNvPr id="17" name="Text 11"/>
           <p:cNvSpPr/>
           <p:nvPr/>
         </p:nvSpPr>

--- a/shuukatsu-app/AI活用ふりかえり発表_2分版.pptx
+++ b/shuukatsu-app/AI活用ふりかえり発表_2分版.pptx
@@ -4,6 +4,9 @@
   <p:sldMasterIdLst>
     <p:sldMasterId id="2147483648" r:id="rId1"/>
   </p:sldMasterIdLst>
+  <p:notesMasterIdLst>
+    <p:notesMasterId r:id="rId9"/>
+  </p:notesMasterIdLst>
   <p:sldIdLst>
     <p:sldId id="256" r:id="rId2"/>
     <p:sldId id="257" r:id="rId3"/>
@@ -13,9 +16,6 @@
     <p:sldId id="261" r:id="rId7"/>
     <p:sldId id="262" r:id="rId8"/>
   </p:sldIdLst>
-  <p:notesMasterIdLst>
-    <p:notesMasterId r:id="rId9"/>
-  </p:notesMasterIdLst>
   <p:sldSz cx="12192000" cy="6858000"/>
   <p:notesSz cx="6858000" cy="12192000"/>
   <p:defaultTextStyle>
@@ -110,13 +110,20 @@
       </a:defRPr>
     </a:lvl9pPr>
   </p:defaultTextStyle>
+  <p:extLst>
+    <p:ext uri="{EFAFB233-063F-42B5-8137-9DF3F51BA10A}">
+      <p15:sldGuideLst xmlns:p15="http://schemas.microsoft.com/office/powerpoint/2012/main"/>
+    </p:ext>
+  </p:extLst>
 </p:presentation>
 </file>
 
 <file path=ppt/charts/chart1.xml><?xml version="1.0" encoding="utf-8"?>
-<c:chartSpace xmlns:c="http://schemas.openxmlformats.org/drawingml/2006/chart" xmlns:a="http://schemas.openxmlformats.org/drawingml/2006/main" xmlns:r="http://schemas.openxmlformats.org/officeDocument/2006/relationships">
+<c:chartSpace xmlns:c="http://schemas.openxmlformats.org/drawingml/2006/chart" xmlns:a="http://schemas.openxmlformats.org/drawingml/2006/main" xmlns:r="http://schemas.openxmlformats.org/officeDocument/2006/relationships" xmlns:c16r2="http://schemas.microsoft.com/office/drawing/2015/06/chart">
   <c:date1904 val="0"/>
+  <c:lang val="ja-JP"/>
   <c:roundedCorners val="1"/>
+  <c:style val="2"/>
   <c:chart>
     <c:title>
       <c:tx>
@@ -133,18 +140,53 @@
               </a:defRPr>
             </a:pPr>
             <a:r>
-              <a:rPr sz="1300" b="0" i="0" u="none" strike="noStrike">
+              <a:rPr lang="ja-JP" altLang="en-US" sz="1300" b="0" i="0" u="none" strike="noStrike">
                 <a:solidFill>
                   <a:srgbClr val="22303F"/>
                 </a:solidFill>
                 <a:latin typeface="Arial"/>
               </a:rPr>
-              <a:t>開発時間の比較（1日=8時間換算）</a:t>
+              <a:t>開発時間の比較（</a:t>
+            </a:r>
+            <a:r>
+              <a:rPr lang="en-US" altLang="ja-JP" sz="1300" b="0" i="0" u="none" strike="noStrike">
+                <a:solidFill>
+                  <a:srgbClr val="22303F"/>
+                </a:solidFill>
+                <a:latin typeface="Arial"/>
+              </a:rPr>
+              <a:t>1</a:t>
+            </a:r>
+            <a:r>
+              <a:rPr lang="ja-JP" altLang="en-US" sz="1300" b="0" i="0" u="none" strike="noStrike">
+                <a:solidFill>
+                  <a:srgbClr val="22303F"/>
+                </a:solidFill>
+                <a:latin typeface="Arial"/>
+              </a:rPr>
+              <a:t>日</a:t>
+            </a:r>
+            <a:r>
+              <a:rPr lang="en-US" altLang="ja-JP" sz="1300" b="0" i="0" u="none" strike="noStrike">
+                <a:solidFill>
+                  <a:srgbClr val="22303F"/>
+                </a:solidFill>
+                <a:latin typeface="Arial"/>
+              </a:rPr>
+              <a:t>=8</a:t>
+            </a:r>
+            <a:r>
+              <a:rPr lang="ja-JP" altLang="en-US" sz="1300" b="0" i="0" u="none" strike="noStrike">
+                <a:solidFill>
+                  <a:srgbClr val="22303F"/>
+                </a:solidFill>
+                <a:latin typeface="Arial"/>
+              </a:rPr>
+              <a:t>時間換算）</a:t>
             </a:r>
           </a:p>
         </c:rich>
       </c:tx>
-      <c:layout/>
       <c:overlay val="0"/>
     </c:title>
     <c:autoTitleDeleted val="0"/>
@@ -175,30 +217,6 @@
             <a:effectLst/>
           </c:spPr>
           <c:invertIfNegative val="0"/>
-          <c:dLbls>
-            <c:numFmt formatCode="0&quot;h&quot;" sourceLinked="0"/>
-            <c:txPr>
-              <a:bodyPr/>
-              <a:lstStyle/>
-              <a:p>
-                <a:pPr>
-                  <a:defRPr b="0" i="0" strike="noStrike" sz="1200" u="none">
-                    <a:solidFill>
-                      <a:srgbClr val="22303F"/>
-                    </a:solidFill>
-                    <a:latin typeface="Arial"/>
-                  </a:defRPr>
-                </a:pPr>
-              </a:p>
-            </c:txPr>
-            <c:showLegendKey val="0"/>
-            <c:showVal val="1"/>
-            <c:showCatName val="0"/>
-            <c:showSerName val="0"/>
-            <c:showPercent val="0"/>
-            <c:showBubbleSize val="0"/>
-            <c:showLeaderLines val="0"/>
-          </c:dLbls>
           <c:dPt>
             <c:idx val="0"/>
             <c:invertIfNegative val="0"/>
@@ -209,6 +227,11 @@
               </a:solidFill>
               <a:effectLst/>
             </c:spPr>
+            <c:extLst>
+              <c:ext xmlns:c16="http://schemas.microsoft.com/office/drawing/2014/chart" uri="{C3380CC4-5D6E-409C-BE32-E72D297353CC}">
+                <c16:uniqueId val="{00000001-FD43-46F2-8011-78924844498B}"/>
+              </c:ext>
+            </c:extLst>
           </c:dPt>
           <c:dPt>
             <c:idx val="1"/>
@@ -220,22 +243,62 @@
               </a:solidFill>
               <a:effectLst/>
             </c:spPr>
+            <c:extLst>
+              <c:ext xmlns:c16="http://schemas.microsoft.com/office/drawing/2014/chart" uri="{C3380CC4-5D6E-409C-BE32-E72D297353CC}">
+                <c16:uniqueId val="{00000003-FD43-46F2-8011-78924844498B}"/>
+              </c:ext>
+            </c:extLst>
           </c:dPt>
+          <c:dLbls>
+            <c:numFmt formatCode="0&quot;h&quot;" sourceLinked="0"/>
+            <c:spPr>
+              <a:noFill/>
+              <a:ln>
+                <a:noFill/>
+              </a:ln>
+              <a:effectLst/>
+            </c:spPr>
+            <c:txPr>
+              <a:bodyPr/>
+              <a:lstStyle/>
+              <a:p>
+                <a:pPr>
+                  <a:defRPr sz="1200" b="0" i="0" u="none" strike="noStrike">
+                    <a:solidFill>
+                      <a:srgbClr val="22303F"/>
+                    </a:solidFill>
+                    <a:latin typeface="Arial"/>
+                  </a:defRPr>
+                </a:pPr>
+                <a:endParaRPr lang="ja-JP"/>
+              </a:p>
+            </c:txPr>
+            <c:showLegendKey val="0"/>
+            <c:showVal val="1"/>
+            <c:showCatName val="0"/>
+            <c:showSerName val="0"/>
+            <c:showPercent val="0"/>
+            <c:showBubbleSize val="0"/>
+            <c:showLeaderLines val="0"/>
+            <c:extLst>
+              <c:ext xmlns:c15="http://schemas.microsoft.com/office/drawing/2012/chart" uri="{CE6537A1-D6FC-4f65-9D91-7224C49458BB}">
+                <c15:showLeaderLines val="0"/>
+              </c:ext>
+            </c:extLst>
+          </c:dLbls>
           <c:cat>
-            <c:multiLvlStrRef>
+            <c:strRef>
               <c:f>Sheet1!$A$2:$A$3</c:f>
-              <c:multiLvlStrCache>
+              <c:strCache>
                 <c:ptCount val="2"/>
-                <c:lvl>
-                  <c:pt idx="0">
-                    <c:v>AIなし（想定）</c:v>
-                  </c:pt>
-                  <c:pt idx="1">
-                    <c:v>AIあり</c:v>
-                  </c:pt>
-                </c:lvl>
-              </c:multiLvlStrCache>
-            </c:multiLvlStrRef>
+                <c:pt idx="0">
+                  <c:v>AIなし（想定）</c:v>
+                </c:pt>
+                <c:pt idx="1">
+                  <c:v>AIあり</c:v>
+                </c:pt>
+              </c:strCache>
+            </c:strRef>
           </c:cat>
           <c:val>
             <c:numRef>
@@ -252,36 +315,23 @@
               </c:numCache>
             </c:numRef>
           </c:val>
+          <c:extLst>
+            <c:ext xmlns:c16="http://schemas.microsoft.com/office/drawing/2014/chart" uri="{C3380CC4-5D6E-409C-BE32-E72D297353CC}">
+              <c16:uniqueId val="{00000004-FD43-46F2-8011-78924844498B}"/>
+            </c:ext>
+          </c:extLst>
         </c:ser>
         <c:dLbls>
-          <c:numFmt formatCode="0&quot;h&quot;" sourceLinked="0"/>
-          <c:txPr>
-            <a:bodyPr/>
-            <a:lstStyle/>
-            <a:p>
-              <a:pPr>
-                <a:defRPr b="0" i="0" strike="noStrike" sz="1200" u="none">
-                  <a:solidFill>
-                    <a:srgbClr val="22303F"/>
-                  </a:solidFill>
-                  <a:latin typeface="Arial"/>
-                </a:defRPr>
-              </a:pPr>
-            </a:p>
-          </c:txPr>
           <c:showLegendKey val="0"/>
           <c:showVal val="1"/>
           <c:showCatName val="0"/>
           <c:showSerName val="0"/>
           <c:showPercent val="0"/>
           <c:showBubbleSize val="0"/>
-          <c:showLeaderLines val="0"/>
         </c:dLbls>
         <c:gapWidth val="40"/>
-        <c:overlap val="0"/>
         <c:axId val="2094734554"/>
         <c:axId val="2094734552"/>
-        <c:axId val="2094734556"/>
       </c:barChart>
       <c:catAx>
         <c:axId val="2094734554"/>
@@ -322,6 +372,7 @@
         <c:crosses val="autoZero"/>
         <c:auto val="1"/>
         <c:lblAlgn val="ctr"/>
+        <c:lblOffset val="100"/>
         <c:noMultiLvlLbl val="1"/>
       </c:catAx>
       <c:valAx>
@@ -358,18 +409,26 @@
                   </a:defRPr>
                 </a:pPr>
                 <a:r>
-                  <a:rPr b="0" i="0" u="none" strike="noStrike">
+                  <a:rPr lang="ja-JP" altLang="en-US" b="0" i="0" u="none" strike="noStrike">
                     <a:solidFill>
                       <a:srgbClr val="000000"/>
                     </a:solidFill>
                     <a:latin typeface="Arial"/>
                   </a:rPr>
-                  <a:t>時間（h）</a:t>
+                  <a:t>時間（</a:t>
+                </a:r>
+                <a:r>
+                  <a:rPr lang="en-US" b="0" i="0" u="none" strike="noStrike">
+                    <a:solidFill>
+                      <a:srgbClr val="000000"/>
+                    </a:solidFill>
+                    <a:latin typeface="Arial"/>
+                  </a:rPr>
+                  <a:t>h）</a:t>
                 </a:r>
               </a:p>
             </c:rich>
           </c:tx>
-          <c:layout/>
           <c:overlay val="0"/>
         </c:title>
         <c:numFmt formatCode="General" sourceLinked="0"/>
@@ -414,6 +473,7 @@
     </c:plotArea>
     <c:plotVisOnly val="1"/>
     <c:dispBlanksAs val="span"/>
+    <c:showDLblsOverMax val="1"/>
   </c:chart>
   <c:spPr>
     <a:noFill/>
@@ -450,241 +510,17 @@
           <a:chExt cx="0" cy="0"/>
         </a:xfrm>
       </p:grpSpPr>
-      <p:sp>
-        <p:nvSpPr>
-          <p:cNvPr id="2" name="Header Placeholder 1"/>
-          <p:cNvSpPr>
-            <a:spLocks noGrp="1"/>
-          </p:cNvSpPr>
-          <p:nvPr>
-            <p:ph type="hdr" sz="quarter"/>
-          </p:nvPr>
-        </p:nvSpPr>
-        <p:spPr>
-          <a:xfrm>
-            <a:off x="0" y="0"/>
-            <a:ext cx="2971800" cy="458788"/>
-          </a:xfrm>
-          <a:prstGeom prst="rect">
-            <a:avLst/>
-          </a:prstGeom>
-        </p:spPr>
-        <p:txBody>
-          <a:bodyPr vert="horz" lIns="91440" tIns="45720" rIns="91440" bIns="45720" rtlCol="0"/>
-          <a:lstStyle>
-            <a:lvl1pPr algn="l">
-              <a:defRPr sz="1200"/>
-            </a:lvl1pPr>
-          </a:lstStyle>
-          <a:p>
-            <a:endParaRPr lang="en-US"/>
-          </a:p>
-        </p:txBody>
-      </p:sp>
-      <p:sp>
-        <p:nvSpPr>
-          <p:cNvPr id="3" name="Date Placeholder 2"/>
-          <p:cNvSpPr>
-            <a:spLocks noGrp="1"/>
-          </p:cNvSpPr>
-          <p:nvPr>
-            <p:ph type="dt" idx="1"/>
-          </p:nvPr>
-        </p:nvSpPr>
-        <p:spPr>
-          <a:xfrm>
-            <a:off x="3884613" y="0"/>
-            <a:ext cx="2971800" cy="458788"/>
-          </a:xfrm>
-          <a:prstGeom prst="rect">
-            <a:avLst/>
-          </a:prstGeom>
-        </p:spPr>
-        <p:txBody>
-          <a:bodyPr vert="horz" lIns="91440" tIns="45720" rIns="91440" bIns="45720" rtlCol="0"/>
-          <a:lstStyle>
-            <a:lvl1pPr algn="r">
-              <a:defRPr sz="1200"/>
-            </a:lvl1pPr>
-          </a:lstStyle>
-          <a:p>
-            <a:fld id="{5282F153-3F37-0F45-9E97-73ACFA13230C}" type="datetimeFigureOut">
-              <a:rPr lang="en-US"/>
-              <a:t>7/23/19</a:t>
-            </a:fld>
-            <a:endParaRPr lang="en-US"/>
-          </a:p>
-        </p:txBody>
-      </p:sp>
-      <p:sp>
-        <p:nvSpPr>
-          <p:cNvPr id="4" name="Slide Image Placeholder 3"/>
-          <p:cNvSpPr>
-            <a:spLocks noGrp="1" noRot="1" noChangeAspect="1"/>
-          </p:cNvSpPr>
-          <p:nvPr>
-            <p:ph type="sldImg" idx="2"/>
-          </p:nvPr>
-        </p:nvSpPr>
-        <p:spPr>
-          <a:xfrm>
-            <a:off x="685800" y="1143000"/>
-            <a:ext cx="5486400" cy="3086100"/>
-          </a:xfrm>
-          <a:prstGeom prst="rect">
-            <a:avLst/>
-          </a:prstGeom>
-          <a:noFill/>
-          <a:ln w="12700">
-            <a:solidFill>
-              <a:prstClr val="black"/>
-            </a:solidFill>
-          </a:ln>
-        </p:spPr>
-        <p:txBody>
-          <a:bodyPr vert="horz" lIns="91440" tIns="45720" rIns="91440" bIns="45720" rtlCol="0" anchor="ctr"/>
-          <a:lstStyle/>
-          <a:p>
-            <a:endParaRPr lang="en-US"/>
-          </a:p>
-        </p:txBody>
-      </p:sp>
-      <p:sp>
-        <p:nvSpPr>
-          <p:cNvPr id="5" name="Notes Placeholder 4"/>
-          <p:cNvSpPr>
-            <a:spLocks noGrp="1"/>
-          </p:cNvSpPr>
-          <p:nvPr>
-            <p:ph type="body" sz="quarter" idx="3"/>
-          </p:nvPr>
-        </p:nvSpPr>
-        <p:spPr>
-          <a:xfrm>
-            <a:off x="685800" y="4400550"/>
-            <a:ext cx="5486400" cy="3600450"/>
-          </a:xfrm>
-          <a:prstGeom prst="rect">
-            <a:avLst/>
-          </a:prstGeom>
-        </p:spPr>
-        <p:txBody>
-          <a:bodyPr vert="horz" lIns="91440" tIns="45720" rIns="91440" bIns="45720" rtlCol="0"/>
-          <a:lstStyle/>
-          <a:p>
-            <a:pPr lvl="0"/>
-            <a:r>
-              <a:rPr lang="en-US"/>
-              <a:t>Click to edit Master text styles</a:t>
-            </a:r>
-          </a:p>
-          <a:p>
-            <a:pPr lvl="1"/>
-            <a:r>
-              <a:rPr lang="en-US"/>
-              <a:t>Second level</a:t>
-            </a:r>
-          </a:p>
-          <a:p>
-            <a:pPr lvl="2"/>
-            <a:r>
-              <a:rPr lang="en-US"/>
-              <a:t>Third level</a:t>
-            </a:r>
-          </a:p>
-          <a:p>
-            <a:pPr lvl="3"/>
-            <a:r>
-              <a:rPr lang="en-US"/>
-              <a:t>Fourth level</a:t>
-            </a:r>
-          </a:p>
-          <a:p>
-            <a:pPr lvl="4"/>
-            <a:r>
-              <a:rPr lang="en-US"/>
-              <a:t>Fifth level</a:t>
-            </a:r>
-          </a:p>
-        </p:txBody>
-      </p:sp>
-      <p:sp>
-        <p:nvSpPr>
-          <p:cNvPr id="6" name="Footer Placeholder 5"/>
-          <p:cNvSpPr>
-            <a:spLocks noGrp="1"/>
-          </p:cNvSpPr>
-          <p:nvPr>
-            <p:ph type="ftr" sz="quarter" idx="4"/>
-          </p:nvPr>
-        </p:nvSpPr>
-        <p:spPr>
-          <a:xfrm>
-            <a:off x="0" y="8685213"/>
-            <a:ext cx="2971800" cy="458787"/>
-          </a:xfrm>
-          <a:prstGeom prst="rect">
-            <a:avLst/>
-          </a:prstGeom>
-        </p:spPr>
-        <p:txBody>
-          <a:bodyPr vert="horz" lIns="91440" tIns="45720" rIns="91440" bIns="45720" rtlCol="0" anchor="b"/>
-          <a:lstStyle>
-            <a:lvl1pPr algn="l">
-              <a:defRPr sz="1200"/>
-            </a:lvl1pPr>
-          </a:lstStyle>
-          <a:p>
-            <a:endParaRPr lang="en-US"/>
-          </a:p>
-        </p:txBody>
-      </p:sp>
-      <p:sp>
-        <p:nvSpPr>
-          <p:cNvPr id="7" name="Slide Number Placeholder 6"/>
-          <p:cNvSpPr>
-            <a:spLocks noGrp="1"/>
-          </p:cNvSpPr>
-          <p:nvPr>
-            <p:ph type="sldNum" sz="quarter" idx="5"/>
-          </p:nvPr>
-        </p:nvSpPr>
-        <p:spPr>
-          <a:xfrm>
-            <a:off x="3884613" y="8685213"/>
-            <a:ext cx="2971800" cy="458787"/>
-          </a:xfrm>
-          <a:prstGeom prst="rect">
-            <a:avLst/>
-          </a:prstGeom>
-        </p:spPr>
-        <p:txBody>
-          <a:bodyPr vert="horz" lIns="91440" tIns="45720" rIns="91440" bIns="45720" rtlCol="0" anchor="b"/>
-          <a:lstStyle>
-            <a:lvl1pPr algn="r">
-              <a:defRPr sz="1200"/>
-            </a:lvl1pPr>
-          </a:lstStyle>
-          <a:p>
-            <a:fld id="{CE5E9CC1-C706-0F49-92D6-E571CC5EEA8F}" type="slidenum">
-              <a:rPr lang="en-US"/>
-              <a:t>‹#›</a:t>
-            </a:fld>
-            <a:endParaRPr lang="en-US"/>
-          </a:p>
-        </p:txBody>
-      </p:sp>
     </p:spTree>
     <p:extLst>
       <p:ext uri="{BB962C8B-B14F-4D97-AF65-F5344CB8AC3E}">
-        <p14:creationId xmlns:p14="http://schemas.microsoft.com/office/powerpoint/2010/main" val="1024086991"/>
+        <p14:creationId xmlns:p14="http://schemas.microsoft.com/office/powerpoint/2010/main" val="961744008"/>
       </p:ext>
     </p:extLst>
   </p:cSld>
   <p:clrMap bg1="lt1" tx1="dk1" bg2="lt2" tx2="dk2" accent1="accent1" accent2="accent2" accent3="accent3" accent4="accent4" accent5="accent5" accent6="accent6" hlink="hlink" folHlink="folHlink"/>
   <p:notesStyle>
     <a:lvl1pPr marL="0" algn="l" defTabSz="914400" rtl="0" eaLnBrk="1" latinLnBrk="0" hangingPunct="1">
-      <a:defRPr sz="1200" kern="1200">
+      <a:defRPr kumimoji="1" sz="1200" kern="1200">
         <a:solidFill>
           <a:schemeClr val="tx1"/>
         </a:solidFill>
@@ -694,7 +530,7 @@
       </a:defRPr>
     </a:lvl1pPr>
     <a:lvl2pPr marL="457200" algn="l" defTabSz="914400" rtl="0" eaLnBrk="1" latinLnBrk="0" hangingPunct="1">
-      <a:defRPr sz="1200" kern="1200">
+      <a:defRPr kumimoji="1" sz="1200" kern="1200">
         <a:solidFill>
           <a:schemeClr val="tx1"/>
         </a:solidFill>
@@ -704,7 +540,7 @@
       </a:defRPr>
     </a:lvl2pPr>
     <a:lvl3pPr marL="914400" algn="l" defTabSz="914400" rtl="0" eaLnBrk="1" latinLnBrk="0" hangingPunct="1">
-      <a:defRPr sz="1200" kern="1200">
+      <a:defRPr kumimoji="1" sz="1200" kern="1200">
         <a:solidFill>
           <a:schemeClr val="tx1"/>
         </a:solidFill>
@@ -714,7 +550,7 @@
       </a:defRPr>
     </a:lvl3pPr>
     <a:lvl4pPr marL="1371600" algn="l" defTabSz="914400" rtl="0" eaLnBrk="1" latinLnBrk="0" hangingPunct="1">
-      <a:defRPr sz="1200" kern="1200">
+      <a:defRPr kumimoji="1" sz="1200" kern="1200">
         <a:solidFill>
           <a:schemeClr val="tx1"/>
         </a:solidFill>
@@ -724,7 +560,7 @@
       </a:defRPr>
     </a:lvl4pPr>
     <a:lvl5pPr marL="1828800" algn="l" defTabSz="914400" rtl="0" eaLnBrk="1" latinLnBrk="0" hangingPunct="1">
-      <a:defRPr sz="1200" kern="1200">
+      <a:defRPr kumimoji="1" sz="1200" kern="1200">
         <a:solidFill>
           <a:schemeClr val="tx1"/>
         </a:solidFill>
@@ -734,7 +570,7 @@
       </a:defRPr>
     </a:lvl5pPr>
     <a:lvl6pPr marL="2286000" algn="l" defTabSz="914400" rtl="0" eaLnBrk="1" latinLnBrk="0" hangingPunct="1">
-      <a:defRPr sz="1200" kern="1200">
+      <a:defRPr kumimoji="1" sz="1200" kern="1200">
         <a:solidFill>
           <a:schemeClr val="tx1"/>
         </a:solidFill>
@@ -744,7 +580,7 @@
       </a:defRPr>
     </a:lvl6pPr>
     <a:lvl7pPr marL="2743200" algn="l" defTabSz="914400" rtl="0" eaLnBrk="1" latinLnBrk="0" hangingPunct="1">
-      <a:defRPr sz="1200" kern="1200">
+      <a:defRPr kumimoji="1" sz="1200" kern="1200">
         <a:solidFill>
           <a:schemeClr val="tx1"/>
         </a:solidFill>
@@ -754,7 +590,7 @@
       </a:defRPr>
     </a:lvl7pPr>
     <a:lvl8pPr marL="3200400" algn="l" defTabSz="914400" rtl="0" eaLnBrk="1" latinLnBrk="0" hangingPunct="1">
-      <a:defRPr sz="1200" kern="1200">
+      <a:defRPr kumimoji="1" sz="1200" kern="1200">
         <a:solidFill>
           <a:schemeClr val="tx1"/>
         </a:solidFill>
@@ -764,7 +600,7 @@
       </a:defRPr>
     </a:lvl8pPr>
     <a:lvl9pPr marL="3657600" algn="l" defTabSz="914400" rtl="0" eaLnBrk="1" latinLnBrk="0" hangingPunct="1">
-      <a:defRPr sz="1200" kern="1200">
+      <a:defRPr kumimoji="1" sz="1200" kern="1200">
         <a:solidFill>
           <a:schemeClr val="tx1"/>
         </a:solidFill>
@@ -829,7 +665,6 @@
 ただ今日お伝えしたいのは成果物そのものではなく、この開発を通じてAIをどう活用し、どう試行錯誤したかというプロセスです。
 ★強調：「成果物そのものではなく」で声のトーンを一段落とし、評価軸の転換を印象づける。</a:t>
             </a:r>
-            <a:endParaRPr lang="en-US" dirty="0"/>
           </a:p>
         </p:txBody>
       </p:sp>
@@ -921,7 +756,6 @@
 そこで、独力で抱え込むのではなく、AIと協働して開発サイクルを回す方針を選びました。
 ★強調：「独力で抱え込むのではなく」で声を落とし、「AIと協働して」で上げる。対比を声で作る。</a:t>
             </a:r>
-            <a:endParaRPr lang="en-US" dirty="0"/>
           </a:p>
         </p:txBody>
       </p:sp>
@@ -1013,7 +847,6 @@
 特にデバッグは、エラーの再現条件が分からず、何度も同じ場所で詰まりました。
 ★強調：「デバッグ」を言うときに一番間を取る。次のスライドへの橋渡しになる言葉なので少し強めに。</a:t>
             </a:r>
-            <a:endParaRPr lang="en-US" dirty="0"/>
           </a:p>
         </p:txBody>
       </p:sp>
@@ -1105,7 +938,6 @@
 設計→実装→確認→エラー→原因分析→修正→再テストというサイクルを何度も回し、コードの8〜9割はAIが生成しています。
 ★強調：円環図のノードが出現する順に合わせて「設計→実装→確認→エラー→原因分析→修正→再テスト」を読み上げ、図と言葉を同期させる。「8〜9割はAIが生成」は数字が出た瞬間に言い切る。</a:t>
             </a:r>
-            <a:endParaRPr lang="en-US" dirty="0"/>
           </a:p>
         </p:txBody>
       </p:sp>
@@ -1197,7 +1029,6 @@
 実際には『6問目でレスポンスが返らない、関連ファイルはこの3つ』というレベルまで具体化しました。これだけで解決率が大きく上がりました。
 ★強調：「解決率が大きく上がりました」を言い切りで終える。ここが工夫スライドの結論なので、少しゆっくり話す。</a:t>
             </a:r>
-            <a:endParaRPr lang="en-US" dirty="0"/>
           </a:p>
         </p:txBody>
       </p:sp>
@@ -1289,7 +1120,6 @@
 完成度は5段階中3で、まだ改善の余地はありますが、この短期間でここまで到達できたこと自体が、AI活用プロセスの成果だと考えています。
 ★強調：棒グラフが伸びきったタイミングで「8時間に短縮できました」を言う。完成度3/5は謙遜せず淡々と事実として述べる（正直さが評価される）。</a:t>
             </a:r>
-            <a:endParaRPr lang="en-US" dirty="0"/>
           </a:p>
         </p:txBody>
       </p:sp>
@@ -1382,7 +1212,6 @@
 「今回の開発で実感したのは、AIは答えを出す道具ではなく、『問いの質』がそのまま成果の質になる相棒だということです。状況・ログ・意図まで言語化して渡すことで、開発は2日から8時間になりました。これからのAI時代に問われるのは技術力そのものより、正しく問いを立てる力だと思います。」
 ★強調：急がず、まとめのスライド文言と重ねながらゆっくり話す。最後の一文は聴衆の目を見て言い切る。</a:t>
             </a:r>
-            <a:endParaRPr lang="en-US" dirty="0"/>
           </a:p>
         </p:txBody>
       </p:sp>
@@ -1455,6 +1284,11 @@
 <file path=ppt/slideMasters/slideMaster1.xml><?xml version="1.0" encoding="utf-8"?>
 <p:sldMaster xmlns:a="http://schemas.openxmlformats.org/drawingml/2006/main" xmlns:r="http://schemas.openxmlformats.org/officeDocument/2006/relationships" xmlns:p="http://schemas.openxmlformats.org/presentationml/2006/main">
   <p:cSld>
+    <p:bg>
+      <p:bgRef idx="1001">
+        <a:schemeClr val="bg1"/>
+      </p:bgRef>
+    </p:bg>
     <p:spTree>
       <p:nvGrpSpPr>
         <p:cNvPr id="1" name=""/>
@@ -1737,6 +1571,7 @@
         <a:solidFill>
           <a:srgbClr val="14213D"/>
         </a:solidFill>
+        <a:effectLst/>
       </p:bgPr>
     </p:bg>
     <p:spTree>
@@ -1772,6 +1607,13 @@
           </a:solidFill>
           <a:ln/>
         </p:spPr>
+        <p:txBody>
+          <a:bodyPr/>
+          <a:lstStyle/>
+          <a:p>
+            <a:endParaRPr lang="ja-JP" altLang="en-US"/>
+          </a:p>
+        </p:txBody>
       </p:sp>
       <p:sp>
         <p:nvSpPr>
@@ -1792,6 +1634,13 @@
           </a:solidFill>
           <a:ln/>
         </p:spPr>
+        <p:txBody>
+          <a:bodyPr/>
+          <a:lstStyle/>
+          <a:p>
+            <a:endParaRPr lang="ja-JP" altLang="en-US"/>
+          </a:p>
+        </p:txBody>
       </p:sp>
       <p:sp>
         <p:nvSpPr>
@@ -1814,6 +1663,16 @@
           </a:solidFill>
           <a:ln/>
         </p:spPr>
+        <p:txBody>
+          <a:bodyPr/>
+          <a:lstStyle/>
+          <a:p>
+            <a:endParaRPr lang="ja-JP" altLang="en-US">
+              <a:latin typeface="BIZ UDPゴシック" panose="020B0400000000000000" pitchFamily="50" charset="-128"/>
+              <a:ea typeface="BIZ UDPゴシック" panose="020B0400000000000000" pitchFamily="50" charset="-128"/>
+            </a:endParaRPr>
+          </a:p>
+        </p:txBody>
       </p:sp>
       <p:sp>
         <p:nvSpPr>
@@ -1836,21 +1695,24 @@
           <a:bodyPr wrap="square" lIns="0" tIns="0" rIns="0" bIns="0" rtlCol="0" anchor="ctr"/>
           <a:lstStyle/>
           <a:p>
-            <a:pPr algn="ctr" indent="0" marL="0">
-              <a:buNone/>
-            </a:pPr>
-            <a:r>
-              <a:rPr lang="en-US" sz="1200" b="1" dirty="0">
+            <a:pPr marL="0" indent="0" algn="ctr">
+              <a:buNone/>
+            </a:pPr>
+            <a:r>
+              <a:rPr lang="en-US" sz="1200" dirty="0">
                 <a:solidFill>
                   <a:srgbClr val="FFFFFF"/>
                 </a:solidFill>
-                <a:latin typeface="Calibri" pitchFamily="34" charset="0"/>
-                <a:ea typeface="Calibri" pitchFamily="34" charset="-122"/>
+                <a:latin typeface="BIZ UDPゴシック" panose="020B0400000000000000" pitchFamily="50" charset="-128"/>
+                <a:ea typeface="BIZ UDPゴシック" panose="020B0400000000000000" pitchFamily="50" charset="-128"/>
                 <a:cs typeface="Calibri" pitchFamily="34" charset="-120"/>
               </a:rPr>
               <a:t>AI活用授業 最終発表</a:t>
             </a:r>
-            <a:endParaRPr lang="en-US" sz="1200" dirty="0"/>
+            <a:endParaRPr lang="en-US" sz="1200" dirty="0">
+              <a:latin typeface="BIZ UDPゴシック" panose="020B0400000000000000" pitchFamily="50" charset="-128"/>
+              <a:ea typeface="BIZ UDPゴシック" panose="020B0400000000000000" pitchFamily="50" charset="-128"/>
+            </a:endParaRPr>
           </a:p>
         </p:txBody>
       </p:sp>
@@ -1875,7 +1737,7 @@
           <a:bodyPr wrap="square" lIns="0" tIns="0" rIns="0" bIns="0" rtlCol="0" anchor="ctr"/>
           <a:lstStyle/>
           <a:p>
-            <a:pPr indent="0" marL="0">
+            <a:pPr marL="0" indent="0">
               <a:buNone/>
             </a:pPr>
             <a:r>
@@ -1914,7 +1776,7 @@
           <a:bodyPr wrap="square" lIns="0" tIns="0" rIns="0" bIns="0" rtlCol="0" anchor="ctr"/>
           <a:lstStyle/>
           <a:p>
-            <a:pPr indent="0" marL="0">
+            <a:pPr marL="0" indent="0">
               <a:buNone/>
             </a:pPr>
             <a:r>
@@ -1922,13 +1784,16 @@
                 <a:solidFill>
                   <a:srgbClr val="C9D3E8"/>
                 </a:solidFill>
-                <a:latin typeface="Calibri" pitchFamily="34" charset="0"/>
-                <a:ea typeface="Calibri" pitchFamily="34" charset="-122"/>
+                <a:latin typeface="BIZ UDPゴシック" panose="020B0400000000000000" pitchFamily="50" charset="-128"/>
+                <a:ea typeface="BIZ UDPゴシック" panose="020B0400000000000000" pitchFamily="50" charset="-128"/>
                 <a:cs typeface="Calibri" pitchFamily="34" charset="-120"/>
               </a:rPr>
               <a:t>成果物ではなく、「AIをどう使い、どう試行錯誤したか」を伝える発表です。</a:t>
             </a:r>
-            <a:endParaRPr lang="en-US" sz="1500" dirty="0"/>
+            <a:endParaRPr lang="en-US" sz="1500" dirty="0">
+              <a:latin typeface="BIZ UDPゴシック" panose="020B0400000000000000" pitchFamily="50" charset="-128"/>
+              <a:ea typeface="BIZ UDPゴシック" panose="020B0400000000000000" pitchFamily="50" charset="-128"/>
+            </a:endParaRPr>
           </a:p>
         </p:txBody>
       </p:sp>
@@ -1951,176 +1816,20 @@
           </a:solidFill>
           <a:ln/>
         </p:spPr>
+        <p:txBody>
+          <a:bodyPr/>
+          <a:lstStyle/>
+          <a:p>
+            <a:endParaRPr lang="ja-JP" altLang="en-US">
+              <a:latin typeface="BIZ UDPゴシック" panose="020B0400000000000000" pitchFamily="50" charset="-128"/>
+              <a:ea typeface="BIZ UDPゴシック" panose="020B0400000000000000" pitchFamily="50" charset="-128"/>
+            </a:endParaRPr>
+          </a:p>
+        </p:txBody>
       </p:sp>
       <p:pic>
         <p:nvPicPr>
-          <p:cNvPr id="9" name="Image 0" descr="preencoded.png">    </p:cNvPr>
-          <p:cNvPicPr>
-            <a:picLocks noChangeAspect="1"/>
-          </p:cNvPicPr>
-          <p:nvPr/>
-        </p:nvPicPr>
-        <p:blipFill>
-          <a:blip r:embed="rId1"/>
-          <a:stretch>
-            <a:fillRect/>
-          </a:stretch>
-        </p:blipFill>
-        <p:spPr>
-          <a:xfrm>
-            <a:off x="694487" y="3254807"/>
-            <a:ext cx="202082" cy="202082"/>
-          </a:xfrm>
-          <a:prstGeom prst="rect">
-            <a:avLst/>
-          </a:prstGeom>
-        </p:spPr>
-      </p:pic>
-      <p:sp>
-        <p:nvSpPr>
-          <p:cNvPr id="10" name="Text 7"/>
-          <p:cNvSpPr/>
-          <p:nvPr/>
-        </p:nvSpPr>
-        <p:spPr>
-          <a:xfrm>
-            <a:off x="1097280" y="3154680"/>
-            <a:ext cx="7315200" cy="411480"/>
-          </a:xfrm>
-          <a:prstGeom prst="rect">
-            <a:avLst/>
-          </a:prstGeom>
-          <a:noFill/>
-          <a:ln/>
-        </p:spPr>
-        <p:txBody>
-          <a:bodyPr wrap="square" lIns="0" tIns="0" rIns="0" bIns="0" rtlCol="0" anchor="ctr"/>
-          <a:lstStyle/>
-          <a:p>
-            <a:pPr indent="0" marL="0">
-              <a:buNone/>
-            </a:pPr>
-            <a:r>
-              <a:rPr lang="en-US" sz="1350" dirty="0">
-                <a:solidFill>
-                  <a:srgbClr val="FFFFFF"/>
-                </a:solidFill>
-                <a:latin typeface="Calibri" pitchFamily="34" charset="0"/>
-                <a:ea typeface="Calibri" pitchFamily="34" charset="-122"/>
-                <a:cs typeface="Calibri" pitchFamily="34" charset="-120"/>
-              </a:rPr>
-              <a:t>AI面接（API利用）</a:t>
-            </a:r>
-            <a:endParaRPr lang="en-US" sz="1350" dirty="0"/>
-          </a:p>
-        </p:txBody>
-      </p:sp>
-      <p:sp>
-        <p:nvSpPr>
-          <p:cNvPr id="11" name="Shape 8"/>
-          <p:cNvSpPr/>
-          <p:nvPr/>
-        </p:nvSpPr>
-        <p:spPr>
-          <a:xfrm>
-            <a:off x="640080" y="3703320"/>
-            <a:ext cx="310896" cy="310896"/>
-          </a:xfrm>
-          <a:prstGeom prst="ellipse">
-            <a:avLst/>
-          </a:prstGeom>
-          <a:solidFill>
-            <a:srgbClr val="2EC4B6"/>
-          </a:solidFill>
-          <a:ln/>
-        </p:spPr>
-      </p:sp>
-      <p:pic>
-        <p:nvPicPr>
-          <p:cNvPr id="12" name="Image 1" descr="preencoded.png">    </p:cNvPr>
-          <p:cNvPicPr>
-            <a:picLocks noChangeAspect="1"/>
-          </p:cNvPicPr>
-          <p:nvPr/>
-        </p:nvPicPr>
-        <p:blipFill>
-          <a:blip r:embed="rId2"/>
-          <a:stretch>
-            <a:fillRect/>
-          </a:stretch>
-        </p:blipFill>
-        <p:spPr>
-          <a:xfrm>
-            <a:off x="694487" y="3757727"/>
-            <a:ext cx="202082" cy="202082"/>
-          </a:xfrm>
-          <a:prstGeom prst="rect">
-            <a:avLst/>
-          </a:prstGeom>
-        </p:spPr>
-      </p:pic>
-      <p:sp>
-        <p:nvSpPr>
-          <p:cNvPr id="13" name="Text 9"/>
-          <p:cNvSpPr/>
-          <p:nvPr/>
-        </p:nvSpPr>
-        <p:spPr>
-          <a:xfrm>
-            <a:off x="1097280" y="3657600"/>
-            <a:ext cx="7315200" cy="411480"/>
-          </a:xfrm>
-          <a:prstGeom prst="rect">
-            <a:avLst/>
-          </a:prstGeom>
-          <a:noFill/>
-          <a:ln/>
-        </p:spPr>
-        <p:txBody>
-          <a:bodyPr wrap="square" lIns="0" tIns="0" rIns="0" bIns="0" rtlCol="0" anchor="ctr"/>
-          <a:lstStyle/>
-          <a:p>
-            <a:pPr indent="0" marL="0">
-              <a:buNone/>
-            </a:pPr>
-            <a:r>
-              <a:rPr lang="en-US" sz="1350" dirty="0">
-                <a:solidFill>
-                  <a:srgbClr val="FFFFFF"/>
-                </a:solidFill>
-                <a:latin typeface="Calibri" pitchFamily="34" charset="0"/>
-                <a:ea typeface="Calibri" pitchFamily="34" charset="-122"/>
-                <a:cs typeface="Calibri" pitchFamily="34" charset="-120"/>
-              </a:rPr>
-              <a:t>AIによるES添削・模範回答生成</a:t>
-            </a:r>
-            <a:endParaRPr lang="en-US" sz="1350" dirty="0"/>
-          </a:p>
-        </p:txBody>
-      </p:sp>
-      <p:sp>
-        <p:nvSpPr>
-          <p:cNvPr id="14" name="Shape 10"/>
-          <p:cNvSpPr/>
-          <p:nvPr/>
-        </p:nvSpPr>
-        <p:spPr>
-          <a:xfrm>
-            <a:off x="640080" y="4206240"/>
-            <a:ext cx="310896" cy="310896"/>
-          </a:xfrm>
-          <a:prstGeom prst="ellipse">
-            <a:avLst/>
-          </a:prstGeom>
-          <a:solidFill>
-            <a:srgbClr val="2EC4B6"/>
-          </a:solidFill>
-          <a:ln/>
-        </p:spPr>
-      </p:sp>
-      <p:pic>
-        <p:nvPicPr>
-          <p:cNvPr id="15" name="Image 2" descr="preencoded.png">    </p:cNvPr>
+          <p:cNvPr id="9" name="Image 0" descr="preencoded.png"/>
           <p:cNvPicPr>
             <a:picLocks noChangeAspect="1"/>
           </p:cNvPicPr>
@@ -2134,7 +1843,7 @@
         </p:blipFill>
         <p:spPr>
           <a:xfrm>
-            <a:off x="694487" y="4260647"/>
+            <a:off x="694487" y="3254807"/>
             <a:ext cx="202082" cy="202082"/>
           </a:xfrm>
           <a:prstGeom prst="rect">
@@ -2144,13 +1853,13 @@
       </p:pic>
       <p:sp>
         <p:nvSpPr>
-          <p:cNvPr id="16" name="Text 11"/>
-          <p:cNvSpPr/>
-          <p:nvPr/>
-        </p:nvSpPr>
-        <p:spPr>
-          <a:xfrm>
-            <a:off x="1097280" y="4160520"/>
+          <p:cNvPr id="10" name="Text 7"/>
+          <p:cNvSpPr/>
+          <p:nvPr/>
+        </p:nvSpPr>
+        <p:spPr>
+          <a:xfrm>
+            <a:off x="1097280" y="3154680"/>
             <a:ext cx="7315200" cy="411480"/>
           </a:xfrm>
           <a:prstGeom prst="rect">
@@ -2163,7 +1872,7 @@
           <a:bodyPr wrap="square" lIns="0" tIns="0" rIns="0" bIns="0" rtlCol="0" anchor="ctr"/>
           <a:lstStyle/>
           <a:p>
-            <a:pPr indent="0" marL="0">
+            <a:pPr marL="0" indent="0">
               <a:buNone/>
             </a:pPr>
             <a:r>
@@ -2171,185 +1880,179 @@
                 <a:solidFill>
                   <a:srgbClr val="FFFFFF"/>
                 </a:solidFill>
-                <a:latin typeface="Calibri" pitchFamily="34" charset="0"/>
-                <a:ea typeface="Calibri" pitchFamily="34" charset="-122"/>
+                <a:latin typeface="BIZ UDPゴシック" panose="020B0400000000000000" pitchFamily="50" charset="-128"/>
+                <a:ea typeface="BIZ UDPゴシック" panose="020B0400000000000000" pitchFamily="50" charset="-128"/>
                 <a:cs typeface="Calibri" pitchFamily="34" charset="-120"/>
               </a:rPr>
-              <a:t>レーダーチャートで自己分析・企業マッチング</a:t>
-            </a:r>
-            <a:endParaRPr lang="en-US" sz="1350" dirty="0"/>
-          </a:p>
-        </p:txBody>
-      </p:sp>
-      <p:sp>
-        <p:nvSpPr>
-          <p:cNvPr id="17" name="Text 12"/>
-          <p:cNvSpPr/>
-          <p:nvPr/>
-        </p:nvSpPr>
-        <p:spPr>
-          <a:xfrm>
-            <a:off x="640080" y="4846320"/>
-            <a:ext cx="1188720" cy="365760"/>
-          </a:xfrm>
-          <a:prstGeom prst="rect">
-            <a:avLst/>
-          </a:prstGeom>
-          <a:noFill/>
-          <a:ln/>
-        </p:spPr>
-        <p:txBody>
-          <a:bodyPr wrap="square" lIns="0" tIns="0" rIns="0" bIns="0" rtlCol="0" anchor="ctr"/>
-          <a:lstStyle/>
-          <a:p>
-            <a:pPr indent="0" marL="0">
-              <a:buNone/>
-            </a:pPr>
-            <a:r>
-              <a:rPr lang="en-US" sz="1200" dirty="0">
-                <a:solidFill>
-                  <a:srgbClr val="8FA0C4"/>
-                </a:solidFill>
-                <a:latin typeface="Calibri" pitchFamily="34" charset="0"/>
-                <a:ea typeface="Calibri" pitchFamily="34" charset="-122"/>
-                <a:cs typeface="Calibri" pitchFamily="34" charset="-120"/>
-              </a:rPr>
-              <a:t>完成度</a:t>
-            </a:r>
-            <a:endParaRPr lang="en-US" sz="1200" dirty="0"/>
+              <a:t>AI面接（API利用）</a:t>
+            </a:r>
+            <a:endParaRPr lang="en-US" sz="1350" dirty="0">
+              <a:latin typeface="BIZ UDPゴシック" panose="020B0400000000000000" pitchFamily="50" charset="-128"/>
+              <a:ea typeface="BIZ UDPゴシック" panose="020B0400000000000000" pitchFamily="50" charset="-128"/>
+            </a:endParaRPr>
+          </a:p>
+        </p:txBody>
+      </p:sp>
+      <p:sp>
+        <p:nvSpPr>
+          <p:cNvPr id="11" name="Shape 8"/>
+          <p:cNvSpPr/>
+          <p:nvPr/>
+        </p:nvSpPr>
+        <p:spPr>
+          <a:xfrm>
+            <a:off x="640080" y="3703320"/>
+            <a:ext cx="310896" cy="310896"/>
+          </a:xfrm>
+          <a:prstGeom prst="ellipse">
+            <a:avLst/>
+          </a:prstGeom>
+          <a:solidFill>
+            <a:srgbClr val="2EC4B6"/>
+          </a:solidFill>
+          <a:ln/>
+        </p:spPr>
+        <p:txBody>
+          <a:bodyPr/>
+          <a:lstStyle/>
+          <a:p>
+            <a:endParaRPr lang="ja-JP" altLang="en-US">
+              <a:latin typeface="BIZ UDPゴシック" panose="020B0400000000000000" pitchFamily="50" charset="-128"/>
+              <a:ea typeface="BIZ UDPゴシック" panose="020B0400000000000000" pitchFamily="50" charset="-128"/>
+            </a:endParaRPr>
           </a:p>
         </p:txBody>
       </p:sp>
       <p:pic>
         <p:nvPicPr>
-          <p:cNvPr id="18" name="Image 3" descr="preencoded.png">    </p:cNvPr>
+          <p:cNvPr id="12" name="Image 1" descr="preencoded.png"/>
           <p:cNvPicPr>
             <a:picLocks noChangeAspect="1"/>
           </p:cNvPicPr>
           <p:nvPr/>
         </p:nvPicPr>
         <p:blipFill>
-          <a:blip r:embed="rId4"/>
+          <a:blip r:embed="rId3"/>
           <a:stretch>
             <a:fillRect/>
           </a:stretch>
         </p:blipFill>
         <p:spPr>
           <a:xfrm>
-            <a:off x="1828800" y="4800600"/>
-            <a:ext cx="292608" cy="292608"/>
+            <a:off x="694487" y="3757727"/>
+            <a:ext cx="202082" cy="202082"/>
           </a:xfrm>
           <a:prstGeom prst="rect">
             <a:avLst/>
           </a:prstGeom>
         </p:spPr>
       </p:pic>
+      <p:sp>
+        <p:nvSpPr>
+          <p:cNvPr id="13" name="Text 9"/>
+          <p:cNvSpPr/>
+          <p:nvPr/>
+        </p:nvSpPr>
+        <p:spPr>
+          <a:xfrm>
+            <a:off x="1097280" y="3657600"/>
+            <a:ext cx="7315200" cy="411480"/>
+          </a:xfrm>
+          <a:prstGeom prst="rect">
+            <a:avLst/>
+          </a:prstGeom>
+          <a:noFill/>
+          <a:ln/>
+        </p:spPr>
+        <p:txBody>
+          <a:bodyPr wrap="square" lIns="0" tIns="0" rIns="0" bIns="0" rtlCol="0" anchor="ctr"/>
+          <a:lstStyle/>
+          <a:p>
+            <a:pPr marL="0" indent="0">
+              <a:buNone/>
+            </a:pPr>
+            <a:r>
+              <a:rPr lang="en-US" sz="1350" dirty="0">
+                <a:solidFill>
+                  <a:srgbClr val="FFFFFF"/>
+                </a:solidFill>
+                <a:latin typeface="BIZ UDPゴシック" panose="020B0400000000000000" pitchFamily="50" charset="-128"/>
+                <a:ea typeface="BIZ UDPゴシック" panose="020B0400000000000000" pitchFamily="50" charset="-128"/>
+                <a:cs typeface="Calibri" pitchFamily="34" charset="-120"/>
+              </a:rPr>
+              <a:t>AIによるES添削・模範回答生成</a:t>
+            </a:r>
+            <a:endParaRPr lang="en-US" sz="1350" dirty="0">
+              <a:latin typeface="BIZ UDPゴシック" panose="020B0400000000000000" pitchFamily="50" charset="-128"/>
+              <a:ea typeface="BIZ UDPゴシック" panose="020B0400000000000000" pitchFamily="50" charset="-128"/>
+            </a:endParaRPr>
+          </a:p>
+        </p:txBody>
+      </p:sp>
+      <p:sp>
+        <p:nvSpPr>
+          <p:cNvPr id="14" name="Shape 10"/>
+          <p:cNvSpPr/>
+          <p:nvPr/>
+        </p:nvSpPr>
+        <p:spPr>
+          <a:xfrm>
+            <a:off x="640080" y="4206240"/>
+            <a:ext cx="310896" cy="310896"/>
+          </a:xfrm>
+          <a:prstGeom prst="ellipse">
+            <a:avLst/>
+          </a:prstGeom>
+          <a:solidFill>
+            <a:srgbClr val="2EC4B6"/>
+          </a:solidFill>
+          <a:ln/>
+        </p:spPr>
+        <p:txBody>
+          <a:bodyPr/>
+          <a:lstStyle/>
+          <a:p>
+            <a:endParaRPr lang="ja-JP" altLang="en-US">
+              <a:latin typeface="BIZ UDPゴシック" panose="020B0400000000000000" pitchFamily="50" charset="-128"/>
+              <a:ea typeface="BIZ UDPゴシック" panose="020B0400000000000000" pitchFamily="50" charset="-128"/>
+            </a:endParaRPr>
+          </a:p>
+        </p:txBody>
+      </p:sp>
       <p:pic>
         <p:nvPicPr>
-          <p:cNvPr id="19" name="Image 4" descr="preencoded.png">    </p:cNvPr>
+          <p:cNvPr id="15" name="Image 2" descr="preencoded.png"/>
           <p:cNvPicPr>
             <a:picLocks noChangeAspect="1"/>
           </p:cNvPicPr>
           <p:nvPr/>
         </p:nvPicPr>
         <p:blipFill>
-          <a:blip r:embed="rId5"/>
+          <a:blip r:embed="rId3"/>
           <a:stretch>
             <a:fillRect/>
           </a:stretch>
         </p:blipFill>
         <p:spPr>
           <a:xfrm>
-            <a:off x="2176272" y="4800600"/>
-            <a:ext cx="292608" cy="292608"/>
+            <a:off x="694487" y="4260647"/>
+            <a:ext cx="202082" cy="202082"/>
           </a:xfrm>
           <a:prstGeom prst="rect">
             <a:avLst/>
           </a:prstGeom>
         </p:spPr>
       </p:pic>
-      <p:pic>
-        <p:nvPicPr>
-          <p:cNvPr id="20" name="Image 5" descr="preencoded.png">    </p:cNvPr>
-          <p:cNvPicPr>
-            <a:picLocks noChangeAspect="1"/>
-          </p:cNvPicPr>
-          <p:nvPr/>
-        </p:nvPicPr>
-        <p:blipFill>
-          <a:blip r:embed="rId6"/>
-          <a:stretch>
-            <a:fillRect/>
-          </a:stretch>
-        </p:blipFill>
-        <p:spPr>
-          <a:xfrm>
-            <a:off x="2523744" y="4800600"/>
-            <a:ext cx="292608" cy="292608"/>
-          </a:xfrm>
-          <a:prstGeom prst="rect">
-            <a:avLst/>
-          </a:prstGeom>
-        </p:spPr>
-      </p:pic>
-      <p:pic>
-        <p:nvPicPr>
-          <p:cNvPr id="21" name="Image 6" descr="preencoded.png">    </p:cNvPr>
-          <p:cNvPicPr>
-            <a:picLocks noChangeAspect="1"/>
-          </p:cNvPicPr>
-          <p:nvPr/>
-        </p:nvPicPr>
-        <p:blipFill>
-          <a:blip r:embed="rId7"/>
-          <a:stretch>
-            <a:fillRect/>
-          </a:stretch>
-        </p:blipFill>
-        <p:spPr>
-          <a:xfrm>
-            <a:off x="2871216" y="4800600"/>
-            <a:ext cx="292608" cy="292608"/>
-          </a:xfrm>
-          <a:prstGeom prst="rect">
-            <a:avLst/>
-          </a:prstGeom>
-        </p:spPr>
-      </p:pic>
-      <p:pic>
-        <p:nvPicPr>
-          <p:cNvPr id="22" name="Image 7" descr="preencoded.png">    </p:cNvPr>
-          <p:cNvPicPr>
-            <a:picLocks noChangeAspect="1"/>
-          </p:cNvPicPr>
-          <p:nvPr/>
-        </p:nvPicPr>
-        <p:blipFill>
-          <a:blip r:embed="rId8"/>
-          <a:stretch>
-            <a:fillRect/>
-          </a:stretch>
-        </p:blipFill>
-        <p:spPr>
-          <a:xfrm>
-            <a:off x="3218688" y="4800600"/>
-            <a:ext cx="292608" cy="292608"/>
-          </a:xfrm>
-          <a:prstGeom prst="rect">
-            <a:avLst/>
-          </a:prstGeom>
-        </p:spPr>
-      </p:pic>
-      <p:sp>
-        <p:nvSpPr>
-          <p:cNvPr id="23" name="Text 13"/>
-          <p:cNvSpPr/>
-          <p:nvPr/>
-        </p:nvSpPr>
-        <p:spPr>
-          <a:xfrm>
-            <a:off x="3749040" y="4846320"/>
-            <a:ext cx="1828800" cy="365760"/>
+      <p:sp>
+        <p:nvSpPr>
+          <p:cNvPr id="16" name="Text 11"/>
+          <p:cNvSpPr/>
+          <p:nvPr/>
+        </p:nvSpPr>
+        <p:spPr>
+          <a:xfrm>
+            <a:off x="1097280" y="4160520"/>
+            <a:ext cx="7315200" cy="411480"/>
           </a:xfrm>
           <a:prstGeom prst="rect">
             <a:avLst/>
@@ -2361,21 +2064,24 @@
           <a:bodyPr wrap="square" lIns="0" tIns="0" rIns="0" bIns="0" rtlCol="0" anchor="ctr"/>
           <a:lstStyle/>
           <a:p>
-            <a:pPr indent="0" marL="0">
-              <a:buNone/>
-            </a:pPr>
-            <a:r>
-              <a:rPr lang="en-US" sz="1100" dirty="0">
-                <a:solidFill>
-                  <a:srgbClr val="8FA0C4"/>
-                </a:solidFill>
-                <a:latin typeface="Calibri" pitchFamily="34" charset="0"/>
-                <a:ea typeface="Calibri" pitchFamily="34" charset="-122"/>
+            <a:pPr marL="0" indent="0">
+              <a:buNone/>
+            </a:pPr>
+            <a:r>
+              <a:rPr lang="en-US" sz="1350" dirty="0">
+                <a:solidFill>
+                  <a:srgbClr val="FFFFFF"/>
+                </a:solidFill>
+                <a:latin typeface="BIZ UDPゴシック" panose="020B0400000000000000" pitchFamily="50" charset="-128"/>
+                <a:ea typeface="BIZ UDPゴシック" panose="020B0400000000000000" pitchFamily="50" charset="-128"/>
                 <a:cs typeface="Calibri" pitchFamily="34" charset="-120"/>
               </a:rPr>
-              <a:t>（5段階中3）</a:t>
-            </a:r>
-            <a:endParaRPr lang="en-US" sz="1100" dirty="0"/>
+              <a:t>レーダーチャートで自己分析・企業マッチング</a:t>
+            </a:r>
+            <a:endParaRPr lang="en-US" sz="1350" dirty="0">
+              <a:latin typeface="BIZ UDPゴシック" panose="020B0400000000000000" pitchFamily="50" charset="-128"/>
+              <a:ea typeface="BIZ UDPゴシック" panose="020B0400000000000000" pitchFamily="50" charset="-128"/>
+            </a:endParaRPr>
           </a:p>
         </p:txBody>
       </p:sp>
@@ -2400,7 +2106,7 @@
           <a:bodyPr wrap="square" lIns="0" tIns="0" rIns="0" bIns="0" rtlCol="0" anchor="ctr"/>
           <a:lstStyle/>
           <a:p>
-            <a:pPr algn="l" indent="0" marL="0">
+            <a:pPr marL="0" indent="0" algn="l">
               <a:buNone/>
             </a:pPr>
             <a:r>
@@ -2408,13 +2114,16 @@
                 <a:solidFill>
                   <a:srgbClr val="8FA0C4"/>
                 </a:solidFill>
-                <a:latin typeface="Calibri" pitchFamily="34" charset="0"/>
-                <a:ea typeface="Calibri" pitchFamily="34" charset="-122"/>
+                <a:latin typeface="BIZ UDPゴシック" panose="020B0400000000000000" pitchFamily="50" charset="-128"/>
+                <a:ea typeface="BIZ UDPゴシック" panose="020B0400000000000000" pitchFamily="50" charset="-128"/>
                 <a:cs typeface="Calibri" pitchFamily="34" charset="-120"/>
               </a:rPr>
               <a:t>AI活用ふりかえり発表</a:t>
             </a:r>
-            <a:endParaRPr lang="en-US" sz="1000" dirty="0"/>
+            <a:endParaRPr lang="en-US" sz="1000" dirty="0">
+              <a:latin typeface="BIZ UDPゴシック" panose="020B0400000000000000" pitchFamily="50" charset="-128"/>
+              <a:ea typeface="BIZ UDPゴシック" panose="020B0400000000000000" pitchFamily="50" charset="-128"/>
+            </a:endParaRPr>
           </a:p>
         </p:txBody>
       </p:sp>
@@ -2439,7 +2148,7 @@
           <a:bodyPr wrap="square" lIns="0" tIns="0" rIns="0" bIns="0" rtlCol="0" anchor="ctr"/>
           <a:lstStyle/>
           <a:p>
-            <a:pPr algn="r" indent="0" marL="0">
+            <a:pPr marL="0" indent="0" algn="r">
               <a:buNone/>
             </a:pPr>
             <a:r>
@@ -2473,6 +2182,7 @@
         <a:solidFill>
           <a:srgbClr val="FFFFFF"/>
         </a:solidFill>
+        <a:effectLst/>
       </p:bgPr>
     </p:bg>
     <p:spTree>
@@ -2510,6 +2220,16 @@
           </a:solidFill>
           <a:ln/>
         </p:spPr>
+        <p:txBody>
+          <a:bodyPr/>
+          <a:lstStyle/>
+          <a:p>
+            <a:endParaRPr lang="ja-JP" altLang="en-US">
+              <a:latin typeface="BIZ UDPゴシック" panose="020B0400000000000000" pitchFamily="50" charset="-128"/>
+              <a:ea typeface="BIZ UDPゴシック" panose="020B0400000000000000" pitchFamily="50" charset="-128"/>
+            </a:endParaRPr>
+          </a:p>
+        </p:txBody>
       </p:sp>
       <p:sp>
         <p:nvSpPr>
@@ -2532,7 +2252,7 @@
           <a:bodyPr wrap="square" lIns="0" tIns="0" rIns="0" bIns="0" rtlCol="0" anchor="ctr"/>
           <a:lstStyle/>
           <a:p>
-            <a:pPr algn="ctr" indent="0" marL="0">
+            <a:pPr marL="0" indent="0" algn="ctr">
               <a:buNone/>
             </a:pPr>
             <a:r>
@@ -2540,13 +2260,16 @@
                 <a:solidFill>
                   <a:srgbClr val="FFFFFF"/>
                 </a:solidFill>
-                <a:latin typeface="Calibri" pitchFamily="34" charset="0"/>
-                <a:ea typeface="Calibri" pitchFamily="34" charset="-122"/>
+                <a:latin typeface="BIZ UDPゴシック" panose="020B0400000000000000" pitchFamily="50" charset="-128"/>
+                <a:ea typeface="BIZ UDPゴシック" panose="020B0400000000000000" pitchFamily="50" charset="-128"/>
                 <a:cs typeface="Calibri" pitchFamily="34" charset="-120"/>
               </a:rPr>
               <a:t>背景</a:t>
             </a:r>
-            <a:endParaRPr lang="en-US" sz="1200" dirty="0"/>
+            <a:endParaRPr lang="en-US" sz="1200" dirty="0">
+              <a:latin typeface="BIZ UDPゴシック" panose="020B0400000000000000" pitchFamily="50" charset="-128"/>
+              <a:ea typeface="BIZ UDPゴシック" panose="020B0400000000000000" pitchFamily="50" charset="-128"/>
+            </a:endParaRPr>
           </a:p>
         </p:txBody>
       </p:sp>
@@ -2571,7 +2294,7 @@
           <a:bodyPr wrap="square" lIns="0" tIns="0" rIns="0" bIns="0" rtlCol="0" anchor="ctr"/>
           <a:lstStyle/>
           <a:p>
-            <a:pPr indent="0" marL="0">
+            <a:pPr marL="0" indent="0">
               <a:buNone/>
             </a:pPr>
             <a:r>
@@ -2579,13 +2302,16 @@
                 <a:solidFill>
                   <a:srgbClr val="14213D"/>
                 </a:solidFill>
-                <a:latin typeface="Cambria" pitchFamily="34" charset="0"/>
-                <a:ea typeface="Cambria" pitchFamily="34" charset="-122"/>
+                <a:latin typeface="BIZ UDPゴシック" panose="020B0400000000000000" pitchFamily="50" charset="-128"/>
+                <a:ea typeface="BIZ UDPゴシック" panose="020B0400000000000000" pitchFamily="50" charset="-128"/>
                 <a:cs typeface="Cambria" pitchFamily="34" charset="-120"/>
               </a:rPr>
               <a:t>なぜAI活用に踏み切ったのか</a:t>
             </a:r>
-            <a:endParaRPr lang="en-US" sz="2700" dirty="0"/>
+            <a:endParaRPr lang="en-US" sz="2700" dirty="0">
+              <a:latin typeface="BIZ UDPゴシック" panose="020B0400000000000000" pitchFamily="50" charset="-128"/>
+              <a:ea typeface="BIZ UDPゴシック" panose="020B0400000000000000" pitchFamily="50" charset="-128"/>
+            </a:endParaRPr>
           </a:p>
         </p:txBody>
       </p:sp>
@@ -2610,7 +2336,7 @@
           <a:bodyPr wrap="square" lIns="0" tIns="0" rIns="0" bIns="0" rtlCol="0" anchor="ctr"/>
           <a:lstStyle/>
           <a:p>
-            <a:pPr indent="0" marL="0">
+            <a:pPr marL="0" indent="0">
               <a:buNone/>
             </a:pPr>
             <a:r>
@@ -2618,13 +2344,16 @@
                 <a:solidFill>
                   <a:srgbClr val="5B6478"/>
                 </a:solidFill>
-                <a:latin typeface="Calibri" pitchFamily="34" charset="0"/>
-                <a:ea typeface="Calibri" pitchFamily="34" charset="-122"/>
+                <a:latin typeface="BIZ UDPゴシック" panose="020B0400000000000000" pitchFamily="50" charset="-128"/>
+                <a:ea typeface="BIZ UDPゴシック" panose="020B0400000000000000" pitchFamily="50" charset="-128"/>
                 <a:cs typeface="Calibri" pitchFamily="34" charset="-120"/>
               </a:rPr>
               <a:t>一人でこの規模を実装するのは重い。だからAIと協働する道を選んだ</a:t>
             </a:r>
-            <a:endParaRPr lang="en-US" sz="1300" dirty="0"/>
+            <a:endParaRPr lang="en-US" sz="1300" dirty="0">
+              <a:latin typeface="BIZ UDPゴシック" panose="020B0400000000000000" pitchFamily="50" charset="-128"/>
+              <a:ea typeface="BIZ UDPゴシック" panose="020B0400000000000000" pitchFamily="50" charset="-128"/>
+            </a:endParaRPr>
           </a:p>
         </p:txBody>
       </p:sp>
@@ -2649,6 +2378,16 @@
           </a:solidFill>
           <a:ln/>
         </p:spPr>
+        <p:txBody>
+          <a:bodyPr/>
+          <a:lstStyle/>
+          <a:p>
+            <a:endParaRPr lang="ja-JP" altLang="en-US">
+              <a:latin typeface="BIZ UDPゴシック" panose="020B0400000000000000" pitchFamily="50" charset="-128"/>
+              <a:ea typeface="BIZ UDPゴシック" panose="020B0400000000000000" pitchFamily="50" charset="-128"/>
+            </a:endParaRPr>
+          </a:p>
+        </p:txBody>
       </p:sp>
       <p:sp>
         <p:nvSpPr>
@@ -2669,17 +2408,27 @@
           </a:solidFill>
           <a:ln/>
         </p:spPr>
+        <p:txBody>
+          <a:bodyPr/>
+          <a:lstStyle/>
+          <a:p>
+            <a:endParaRPr lang="ja-JP" altLang="en-US">
+              <a:latin typeface="BIZ UDPゴシック" panose="020B0400000000000000" pitchFamily="50" charset="-128"/>
+              <a:ea typeface="BIZ UDPゴシック" panose="020B0400000000000000" pitchFamily="50" charset="-128"/>
+            </a:endParaRPr>
+          </a:p>
+        </p:txBody>
       </p:sp>
       <p:pic>
         <p:nvPicPr>
-          <p:cNvPr id="8" name="Image 0" descr="preencoded.png">    </p:cNvPr>
+          <p:cNvPr id="8" name="Image 0" descr="preencoded.png"/>
           <p:cNvPicPr>
             <a:picLocks noChangeAspect="1"/>
           </p:cNvPicPr>
           <p:nvPr/>
         </p:nvPicPr>
         <p:blipFill>
-          <a:blip r:embed="rId1"/>
+          <a:blip r:embed="rId3"/>
           <a:stretch>
             <a:fillRect/>
           </a:stretch>
@@ -2715,7 +2464,7 @@
           <a:bodyPr wrap="square" lIns="0" tIns="0" rIns="0" bIns="0" rtlCol="0" anchor="ctr"/>
           <a:lstStyle/>
           <a:p>
-            <a:pPr algn="ctr" indent="0" marL="0">
+            <a:pPr marL="0" indent="0" algn="ctr">
               <a:buNone/>
             </a:pPr>
             <a:r>
@@ -2723,13 +2472,16 @@
                 <a:solidFill>
                   <a:srgbClr val="22303F"/>
                 </a:solidFill>
-                <a:latin typeface="Cambria" pitchFamily="34" charset="0"/>
-                <a:ea typeface="Cambria" pitchFamily="34" charset="-122"/>
+                <a:latin typeface="BIZ UDPゴシック" panose="020B0400000000000000" pitchFamily="50" charset="-128"/>
+                <a:ea typeface="BIZ UDPゴシック" panose="020B0400000000000000" pitchFamily="50" charset="-128"/>
                 <a:cs typeface="Cambria" pitchFamily="34" charset="-120"/>
               </a:rPr>
               <a:t>独力での開発</a:t>
             </a:r>
-            <a:endParaRPr lang="en-US" sz="1600" dirty="0"/>
+            <a:endParaRPr lang="en-US" sz="1600" dirty="0">
+              <a:latin typeface="BIZ UDPゴシック" panose="020B0400000000000000" pitchFamily="50" charset="-128"/>
+              <a:ea typeface="BIZ UDPゴシック" panose="020B0400000000000000" pitchFamily="50" charset="-128"/>
+            </a:endParaRPr>
           </a:p>
         </p:txBody>
       </p:sp>
@@ -2754,21 +2506,46 @@
           <a:bodyPr wrap="square" lIns="0" tIns="0" rIns="0" bIns="0" rtlCol="0" anchor="ctr"/>
           <a:lstStyle/>
           <a:p>
-            <a:pPr algn="ctr" indent="0" marL="0">
-              <a:buNone/>
-            </a:pPr>
+            <a:pPr marL="0" indent="0" algn="ctr">
+              <a:buNone/>
+            </a:pPr>
+            <a:r>
+              <a:rPr lang="en-US" sz="2000" b="1" dirty="0" err="1">
+                <a:solidFill>
+                  <a:srgbClr val="8A94A6"/>
+                </a:solidFill>
+                <a:latin typeface="BIZ UDPゴシック" panose="020B0400000000000000" pitchFamily="50" charset="-128"/>
+                <a:ea typeface="BIZ UDPゴシック" panose="020B0400000000000000" pitchFamily="50" charset="-128"/>
+                <a:cs typeface="Cambria" pitchFamily="34" charset="-120"/>
+              </a:rPr>
+              <a:t>想定</a:t>
+            </a:r>
             <a:r>
               <a:rPr lang="en-US" sz="2000" b="1" dirty="0">
                 <a:solidFill>
                   <a:srgbClr val="8A94A6"/>
                 </a:solidFill>
-                <a:latin typeface="Cambria" pitchFamily="34" charset="0"/>
-                <a:ea typeface="Cambria" pitchFamily="34" charset="-122"/>
+                <a:latin typeface="BIZ UDPゴシック" panose="020B0400000000000000" pitchFamily="50" charset="-128"/>
+                <a:ea typeface="BIZ UDPゴシック" panose="020B0400000000000000" pitchFamily="50" charset="-128"/>
                 <a:cs typeface="Cambria" pitchFamily="34" charset="-120"/>
               </a:rPr>
-              <a:t>想定 約2日</a:t>
-            </a:r>
-            <a:endParaRPr lang="en-US" sz="2000" dirty="0"/>
+              <a:t> 約</a:t>
+            </a:r>
+            <a:r>
+              <a:rPr lang="ja-JP" altLang="en-US" sz="2000" b="1" dirty="0">
+                <a:solidFill>
+                  <a:srgbClr val="8A94A6"/>
+                </a:solidFill>
+                <a:latin typeface="BIZ UDPゴシック" panose="020B0400000000000000" pitchFamily="50" charset="-128"/>
+                <a:ea typeface="BIZ UDPゴシック" panose="020B0400000000000000" pitchFamily="50" charset="-128"/>
+                <a:cs typeface="Cambria" pitchFamily="34" charset="-120"/>
+              </a:rPr>
+              <a:t>１ヶ月以上</a:t>
+            </a:r>
+            <a:endParaRPr lang="en-US" sz="2000" dirty="0">
+              <a:latin typeface="BIZ UDPゴシック" panose="020B0400000000000000" pitchFamily="50" charset="-128"/>
+              <a:ea typeface="BIZ UDPゴシック" panose="020B0400000000000000" pitchFamily="50" charset="-128"/>
+            </a:endParaRPr>
           </a:p>
         </p:txBody>
       </p:sp>
@@ -2793,7 +2570,7 @@
           <a:bodyPr wrap="square" lIns="0" tIns="0" rIns="0" bIns="0" rtlCol="0" anchor="ctr"/>
           <a:lstStyle/>
           <a:p>
-            <a:pPr algn="ctr" indent="0" marL="0">
+            <a:pPr marL="0" indent="0" algn="ctr">
               <a:lnSpc>
                 <a:spcPct val="125000"/>
               </a:lnSpc>
@@ -2804,16 +2581,19 @@
                 <a:solidFill>
                   <a:srgbClr val="5B6478"/>
                 </a:solidFill>
-                <a:latin typeface="Calibri" pitchFamily="34" charset="0"/>
-                <a:ea typeface="Calibri" pitchFamily="34" charset="-122"/>
+                <a:latin typeface="BIZ UDPゴシック" panose="020B0400000000000000" pitchFamily="50" charset="-128"/>
+                <a:ea typeface="BIZ UDPゴシック" panose="020B0400000000000000" pitchFamily="50" charset="-128"/>
                 <a:cs typeface="Calibri" pitchFamily="34" charset="-120"/>
               </a:rPr>
               <a:t>API通信・Next.js・状態管理など</a:t>
             </a:r>
-            <a:endParaRPr lang="en-US" sz="1150" dirty="0"/>
-          </a:p>
-          <a:p>
-            <a:pPr algn="ctr" indent="0" marL="0">
+            <a:endParaRPr lang="en-US" sz="1150" dirty="0">
+              <a:latin typeface="BIZ UDPゴシック" panose="020B0400000000000000" pitchFamily="50" charset="-128"/>
+              <a:ea typeface="BIZ UDPゴシック" panose="020B0400000000000000" pitchFamily="50" charset="-128"/>
+            </a:endParaRPr>
+          </a:p>
+          <a:p>
+            <a:pPr marL="0" indent="0" algn="ctr">
               <a:lnSpc>
                 <a:spcPct val="125000"/>
               </a:lnSpc>
@@ -2824,13 +2604,16 @@
                 <a:solidFill>
                   <a:srgbClr val="5B6478"/>
                 </a:solidFill>
-                <a:latin typeface="Calibri" pitchFamily="34" charset="0"/>
-                <a:ea typeface="Calibri" pitchFamily="34" charset="-122"/>
+                <a:latin typeface="BIZ UDPゴシック" panose="020B0400000000000000" pitchFamily="50" charset="-128"/>
+                <a:ea typeface="BIZ UDPゴシック" panose="020B0400000000000000" pitchFamily="50" charset="-128"/>
                 <a:cs typeface="Calibri" pitchFamily="34" charset="-120"/>
               </a:rPr>
               <a:t>初学者には壁の多い技術要素</a:t>
             </a:r>
-            <a:endParaRPr lang="en-US" sz="1150" dirty="0"/>
+            <a:endParaRPr lang="en-US" sz="1150" dirty="0">
+              <a:latin typeface="BIZ UDPゴシック" panose="020B0400000000000000" pitchFamily="50" charset="-128"/>
+              <a:ea typeface="BIZ UDPゴシック" panose="020B0400000000000000" pitchFamily="50" charset="-128"/>
+            </a:endParaRPr>
           </a:p>
         </p:txBody>
       </p:sp>
@@ -2857,6 +2640,16 @@
             <a:tailEnd type="triangle"/>
           </a:ln>
         </p:spPr>
+        <p:txBody>
+          <a:bodyPr/>
+          <a:lstStyle/>
+          <a:p>
+            <a:endParaRPr lang="ja-JP" altLang="en-US">
+              <a:latin typeface="BIZ UDPゴシック" panose="020B0400000000000000" pitchFamily="50" charset="-128"/>
+              <a:ea typeface="BIZ UDPゴシック" panose="020B0400000000000000" pitchFamily="50" charset="-128"/>
+            </a:endParaRPr>
+          </a:p>
+        </p:txBody>
       </p:sp>
       <p:sp>
         <p:nvSpPr>
@@ -2884,6 +2677,16 @@
             <a:prstDash val="solid"/>
           </a:ln>
         </p:spPr>
+        <p:txBody>
+          <a:bodyPr/>
+          <a:lstStyle/>
+          <a:p>
+            <a:endParaRPr lang="ja-JP" altLang="en-US">
+              <a:latin typeface="BIZ UDPゴシック" panose="020B0400000000000000" pitchFamily="50" charset="-128"/>
+              <a:ea typeface="BIZ UDPゴシック" panose="020B0400000000000000" pitchFamily="50" charset="-128"/>
+            </a:endParaRPr>
+          </a:p>
+        </p:txBody>
       </p:sp>
       <p:sp>
         <p:nvSpPr>
@@ -2906,7 +2709,7 @@
           <a:bodyPr wrap="square" lIns="0" tIns="0" rIns="0" bIns="0" rtlCol="0" anchor="ctr"/>
           <a:lstStyle/>
           <a:p>
-            <a:pPr algn="ctr" indent="0" marL="0">
+            <a:pPr marL="0" indent="0" algn="ctr">
               <a:buNone/>
             </a:pPr>
             <a:r>
@@ -2914,13 +2717,16 @@
                 <a:solidFill>
                   <a:srgbClr val="2EC4B6"/>
                 </a:solidFill>
-                <a:latin typeface="Calibri" pitchFamily="34" charset="0"/>
-                <a:ea typeface="Calibri" pitchFamily="34" charset="-122"/>
+                <a:latin typeface="BIZ UDPゴシック" panose="020B0400000000000000" pitchFamily="50" charset="-128"/>
+                <a:ea typeface="BIZ UDPゴシック" panose="020B0400000000000000" pitchFamily="50" charset="-128"/>
                 <a:cs typeface="Calibri" pitchFamily="34" charset="-120"/>
               </a:rPr>
               <a:t>選択</a:t>
             </a:r>
-            <a:endParaRPr lang="en-US" sz="1200" dirty="0"/>
+            <a:endParaRPr lang="en-US" sz="1200" dirty="0">
+              <a:latin typeface="BIZ UDPゴシック" panose="020B0400000000000000" pitchFamily="50" charset="-128"/>
+              <a:ea typeface="BIZ UDPゴシック" panose="020B0400000000000000" pitchFamily="50" charset="-128"/>
+            </a:endParaRPr>
           </a:p>
         </p:txBody>
       </p:sp>
@@ -2945,6 +2751,16 @@
           </a:solidFill>
           <a:ln/>
         </p:spPr>
+        <p:txBody>
+          <a:bodyPr/>
+          <a:lstStyle/>
+          <a:p>
+            <a:endParaRPr lang="ja-JP" altLang="en-US">
+              <a:latin typeface="BIZ UDPゴシック" panose="020B0400000000000000" pitchFamily="50" charset="-128"/>
+              <a:ea typeface="BIZ UDPゴシック" panose="020B0400000000000000" pitchFamily="50" charset="-128"/>
+            </a:endParaRPr>
+          </a:p>
+        </p:txBody>
       </p:sp>
       <p:sp>
         <p:nvSpPr>
@@ -2965,17 +2781,27 @@
           </a:solidFill>
           <a:ln/>
         </p:spPr>
+        <p:txBody>
+          <a:bodyPr/>
+          <a:lstStyle/>
+          <a:p>
+            <a:endParaRPr lang="ja-JP" altLang="en-US">
+              <a:latin typeface="BIZ UDPゴシック" panose="020B0400000000000000" pitchFamily="50" charset="-128"/>
+              <a:ea typeface="BIZ UDPゴシック" panose="020B0400000000000000" pitchFamily="50" charset="-128"/>
+            </a:endParaRPr>
+          </a:p>
+        </p:txBody>
       </p:sp>
       <p:pic>
         <p:nvPicPr>
-          <p:cNvPr id="17" name="Image 1" descr="preencoded.png">    </p:cNvPr>
+          <p:cNvPr id="17" name="Image 1" descr="preencoded.png"/>
           <p:cNvPicPr>
             <a:picLocks noChangeAspect="1"/>
           </p:cNvPicPr>
           <p:nvPr/>
         </p:nvPicPr>
         <p:blipFill>
-          <a:blip r:embed="rId2"/>
+          <a:blip r:embed="rId4"/>
           <a:stretch>
             <a:fillRect/>
           </a:stretch>
@@ -3011,7 +2837,7 @@
           <a:bodyPr wrap="square" lIns="0" tIns="0" rIns="0" bIns="0" rtlCol="0" anchor="ctr"/>
           <a:lstStyle/>
           <a:p>
-            <a:pPr algn="ctr" indent="0" marL="0">
+            <a:pPr marL="0" indent="0" algn="ctr">
               <a:buNone/>
             </a:pPr>
             <a:r>
@@ -3019,13 +2845,16 @@
                 <a:solidFill>
                   <a:srgbClr val="FFFFFF"/>
                 </a:solidFill>
-                <a:latin typeface="Cambria" pitchFamily="34" charset="0"/>
-                <a:ea typeface="Cambria" pitchFamily="34" charset="-122"/>
+                <a:latin typeface="BIZ UDPゴシック" panose="020B0400000000000000" pitchFamily="50" charset="-128"/>
+                <a:ea typeface="BIZ UDPゴシック" panose="020B0400000000000000" pitchFamily="50" charset="-128"/>
                 <a:cs typeface="Cambria" pitchFamily="34" charset="-120"/>
               </a:rPr>
               <a:t>AIとの協働開発</a:t>
             </a:r>
-            <a:endParaRPr lang="en-US" sz="1600" dirty="0"/>
+            <a:endParaRPr lang="en-US" sz="1600" dirty="0">
+              <a:latin typeface="BIZ UDPゴシック" panose="020B0400000000000000" pitchFamily="50" charset="-128"/>
+              <a:ea typeface="BIZ UDPゴシック" panose="020B0400000000000000" pitchFamily="50" charset="-128"/>
+            </a:endParaRPr>
           </a:p>
         </p:txBody>
       </p:sp>
@@ -3050,7 +2879,7 @@
           <a:bodyPr wrap="square" lIns="0" tIns="0" rIns="0" bIns="0" rtlCol="0" anchor="ctr"/>
           <a:lstStyle/>
           <a:p>
-            <a:pPr algn="ctr" indent="0" marL="0">
+            <a:pPr marL="0" indent="0" algn="ctr">
               <a:buNone/>
             </a:pPr>
             <a:r>
@@ -3058,13 +2887,16 @@
                 <a:solidFill>
                   <a:srgbClr val="2EC4B6"/>
                 </a:solidFill>
-                <a:latin typeface="Cambria" pitchFamily="34" charset="0"/>
-                <a:ea typeface="Cambria" pitchFamily="34" charset="-122"/>
+                <a:latin typeface="BIZ UDPゴシック" panose="020B0400000000000000" pitchFamily="50" charset="-128"/>
+                <a:ea typeface="BIZ UDPゴシック" panose="020B0400000000000000" pitchFamily="50" charset="-128"/>
                 <a:cs typeface="Cambria" pitchFamily="34" charset="-120"/>
               </a:rPr>
               <a:t>開発サイクルを高速に</a:t>
             </a:r>
-            <a:endParaRPr lang="en-US" sz="1800" dirty="0"/>
+            <a:endParaRPr lang="en-US" sz="1800" dirty="0">
+              <a:latin typeface="BIZ UDPゴシック" panose="020B0400000000000000" pitchFamily="50" charset="-128"/>
+              <a:ea typeface="BIZ UDPゴシック" panose="020B0400000000000000" pitchFamily="50" charset="-128"/>
+            </a:endParaRPr>
           </a:p>
         </p:txBody>
       </p:sp>
@@ -3089,7 +2921,7 @@
           <a:bodyPr wrap="square" lIns="0" tIns="0" rIns="0" bIns="0" rtlCol="0" anchor="ctr"/>
           <a:lstStyle/>
           <a:p>
-            <a:pPr algn="ctr" indent="0" marL="0">
+            <a:pPr marL="0" indent="0" algn="ctr">
               <a:lnSpc>
                 <a:spcPct val="125000"/>
               </a:lnSpc>
@@ -3100,16 +2932,19 @@
                 <a:solidFill>
                   <a:srgbClr val="C9D3E8"/>
                 </a:solidFill>
-                <a:latin typeface="Calibri" pitchFamily="34" charset="0"/>
-                <a:ea typeface="Calibri" pitchFamily="34" charset="-122"/>
+                <a:latin typeface="BIZ UDPゴシック" panose="020B0400000000000000" pitchFamily="50" charset="-128"/>
+                <a:ea typeface="BIZ UDPゴシック" panose="020B0400000000000000" pitchFamily="50" charset="-128"/>
                 <a:cs typeface="Calibri" pitchFamily="34" charset="-120"/>
               </a:rPr>
               <a:t>設計・実装・検証・修正を</a:t>
             </a:r>
-            <a:endParaRPr lang="en-US" sz="1150" dirty="0"/>
-          </a:p>
-          <a:p>
-            <a:pPr algn="ctr" indent="0" marL="0">
+            <a:endParaRPr lang="en-US" sz="1150" dirty="0">
+              <a:latin typeface="BIZ UDPゴシック" panose="020B0400000000000000" pitchFamily="50" charset="-128"/>
+              <a:ea typeface="BIZ UDPゴシック" panose="020B0400000000000000" pitchFamily="50" charset="-128"/>
+            </a:endParaRPr>
+          </a:p>
+          <a:p>
+            <a:pPr marL="0" indent="0" algn="ctr">
               <a:lnSpc>
                 <a:spcPct val="125000"/>
               </a:lnSpc>
@@ -3120,13 +2955,16 @@
                 <a:solidFill>
                   <a:srgbClr val="C9D3E8"/>
                 </a:solidFill>
-                <a:latin typeface="Calibri" pitchFamily="34" charset="0"/>
-                <a:ea typeface="Calibri" pitchFamily="34" charset="-122"/>
+                <a:latin typeface="BIZ UDPゴシック" panose="020B0400000000000000" pitchFamily="50" charset="-128"/>
+                <a:ea typeface="BIZ UDPゴシック" panose="020B0400000000000000" pitchFamily="50" charset="-128"/>
                 <a:cs typeface="Calibri" pitchFamily="34" charset="-120"/>
               </a:rPr>
               <a:t>AIと繰り返し回す方針に</a:t>
             </a:r>
-            <a:endParaRPr lang="en-US" sz="1150" dirty="0"/>
+            <a:endParaRPr lang="en-US" sz="1150" dirty="0">
+              <a:latin typeface="BIZ UDPゴシック" panose="020B0400000000000000" pitchFamily="50" charset="-128"/>
+              <a:ea typeface="BIZ UDPゴシック" panose="020B0400000000000000" pitchFamily="50" charset="-128"/>
+            </a:endParaRPr>
           </a:p>
         </p:txBody>
       </p:sp>
@@ -3151,7 +2989,7 @@
           <a:bodyPr wrap="square" lIns="0" tIns="0" rIns="0" bIns="0" rtlCol="0" anchor="ctr"/>
           <a:lstStyle/>
           <a:p>
-            <a:pPr algn="l" indent="0" marL="0">
+            <a:pPr marL="0" indent="0" algn="l">
               <a:buNone/>
             </a:pPr>
             <a:r>
@@ -3159,13 +2997,16 @@
                 <a:solidFill>
                   <a:srgbClr val="5B6478"/>
                 </a:solidFill>
-                <a:latin typeface="Calibri" pitchFamily="34" charset="0"/>
-                <a:ea typeface="Calibri" pitchFamily="34" charset="-122"/>
+                <a:latin typeface="BIZ UDPゴシック" panose="020B0400000000000000" pitchFamily="50" charset="-128"/>
+                <a:ea typeface="BIZ UDPゴシック" panose="020B0400000000000000" pitchFamily="50" charset="-128"/>
                 <a:cs typeface="Calibri" pitchFamily="34" charset="-120"/>
               </a:rPr>
               <a:t>AI活用ふりかえり発表</a:t>
             </a:r>
-            <a:endParaRPr lang="en-US" sz="1000" dirty="0"/>
+            <a:endParaRPr lang="en-US" sz="1000" dirty="0">
+              <a:latin typeface="BIZ UDPゴシック" panose="020B0400000000000000" pitchFamily="50" charset="-128"/>
+              <a:ea typeface="BIZ UDPゴシック" panose="020B0400000000000000" pitchFamily="50" charset="-128"/>
+            </a:endParaRPr>
           </a:p>
         </p:txBody>
       </p:sp>
@@ -3190,7 +3031,7 @@
           <a:bodyPr wrap="square" lIns="0" tIns="0" rIns="0" bIns="0" rtlCol="0" anchor="ctr"/>
           <a:lstStyle/>
           <a:p>
-            <a:pPr algn="r" indent="0" marL="0">
+            <a:pPr marL="0" indent="0" algn="r">
               <a:buNone/>
             </a:pPr>
             <a:r>
@@ -3198,13 +3039,16 @@
                 <a:solidFill>
                   <a:srgbClr val="5B6478"/>
                 </a:solidFill>
-                <a:latin typeface="Calibri" pitchFamily="34" charset="0"/>
-                <a:ea typeface="Calibri" pitchFamily="34" charset="-122"/>
+                <a:latin typeface="BIZ UDPゴシック" panose="020B0400000000000000" pitchFamily="50" charset="-128"/>
+                <a:ea typeface="BIZ UDPゴシック" panose="020B0400000000000000" pitchFamily="50" charset="-128"/>
                 <a:cs typeface="Calibri" pitchFamily="34" charset="-120"/>
               </a:rPr>
               <a:t>2</a:t>
             </a:r>
-            <a:endParaRPr lang="en-US" sz="1000" dirty="0"/>
+            <a:endParaRPr lang="en-US" sz="1000" dirty="0">
+              <a:latin typeface="BIZ UDPゴシック" panose="020B0400000000000000" pitchFamily="50" charset="-128"/>
+              <a:ea typeface="BIZ UDPゴシック" panose="020B0400000000000000" pitchFamily="50" charset="-128"/>
+            </a:endParaRPr>
           </a:p>
         </p:txBody>
       </p:sp>
@@ -3224,6 +3068,7 @@
         <a:solidFill>
           <a:srgbClr val="FFFFFF"/>
         </a:solidFill>
+        <a:effectLst/>
       </p:bgPr>
     </p:bg>
     <p:spTree>
@@ -3261,6 +3106,16 @@
           </a:solidFill>
           <a:ln/>
         </p:spPr>
+        <p:txBody>
+          <a:bodyPr/>
+          <a:lstStyle/>
+          <a:p>
+            <a:endParaRPr lang="ja-JP" altLang="en-US">
+              <a:latin typeface="BIZ UDPゴシック" panose="020B0400000000000000" pitchFamily="50" charset="-128"/>
+              <a:ea typeface="BIZ UDPゴシック" panose="020B0400000000000000" pitchFamily="50" charset="-128"/>
+            </a:endParaRPr>
+          </a:p>
+        </p:txBody>
       </p:sp>
       <p:sp>
         <p:nvSpPr>
@@ -3283,7 +3138,7 @@
           <a:bodyPr wrap="square" lIns="0" tIns="0" rIns="0" bIns="0" rtlCol="0" anchor="ctr"/>
           <a:lstStyle/>
           <a:p>
-            <a:pPr algn="ctr" indent="0" marL="0">
+            <a:pPr marL="0" indent="0" algn="ctr">
               <a:buNone/>
             </a:pPr>
             <a:r>
@@ -3291,13 +3146,16 @@
                 <a:solidFill>
                   <a:srgbClr val="FFFFFF"/>
                 </a:solidFill>
-                <a:latin typeface="Calibri" pitchFamily="34" charset="0"/>
-                <a:ea typeface="Calibri" pitchFamily="34" charset="-122"/>
+                <a:latin typeface="BIZ UDPゴシック" panose="020B0400000000000000" pitchFamily="50" charset="-128"/>
+                <a:ea typeface="BIZ UDPゴシック" panose="020B0400000000000000" pitchFamily="50" charset="-128"/>
                 <a:cs typeface="Calibri" pitchFamily="34" charset="-120"/>
               </a:rPr>
               <a:t>課題</a:t>
             </a:r>
-            <a:endParaRPr lang="en-US" sz="1200" dirty="0"/>
+            <a:endParaRPr lang="en-US" sz="1200" dirty="0">
+              <a:latin typeface="BIZ UDPゴシック" panose="020B0400000000000000" pitchFamily="50" charset="-128"/>
+              <a:ea typeface="BIZ UDPゴシック" panose="020B0400000000000000" pitchFamily="50" charset="-128"/>
+            </a:endParaRPr>
           </a:p>
         </p:txBody>
       </p:sp>
@@ -3322,7 +3180,7 @@
           <a:bodyPr wrap="square" lIns="0" tIns="0" rIns="0" bIns="0" rtlCol="0" anchor="ctr"/>
           <a:lstStyle/>
           <a:p>
-            <a:pPr indent="0" marL="0">
+            <a:pPr marL="0" indent="0">
               <a:buNone/>
             </a:pPr>
             <a:r>
@@ -3330,13 +3188,16 @@
                 <a:solidFill>
                   <a:srgbClr val="14213D"/>
                 </a:solidFill>
-                <a:latin typeface="Cambria" pitchFamily="34" charset="0"/>
-                <a:ea typeface="Cambria" pitchFamily="34" charset="-122"/>
+                <a:latin typeface="BIZ UDPゴシック" panose="020B0400000000000000" pitchFamily="50" charset="-128"/>
+                <a:ea typeface="BIZ UDPゴシック" panose="020B0400000000000000" pitchFamily="50" charset="-128"/>
                 <a:cs typeface="Cambria" pitchFamily="34" charset="-120"/>
               </a:rPr>
               <a:t>開発で直面した5つの壁</a:t>
             </a:r>
-            <a:endParaRPr lang="en-US" sz="2700" dirty="0"/>
+            <a:endParaRPr lang="en-US" sz="2700" dirty="0">
+              <a:latin typeface="BIZ UDPゴシック" panose="020B0400000000000000" pitchFamily="50" charset="-128"/>
+              <a:ea typeface="BIZ UDPゴシック" panose="020B0400000000000000" pitchFamily="50" charset="-128"/>
+            </a:endParaRPr>
           </a:p>
         </p:txBody>
       </p:sp>
@@ -3361,7 +3222,7 @@
           <a:bodyPr wrap="square" lIns="0" tIns="0" rIns="0" bIns="0" rtlCol="0" anchor="ctr"/>
           <a:lstStyle/>
           <a:p>
-            <a:pPr indent="0" marL="0">
+            <a:pPr marL="0" indent="0">
               <a:buNone/>
             </a:pPr>
             <a:r>
@@ -3369,13 +3230,16 @@
                 <a:solidFill>
                   <a:srgbClr val="5B6478"/>
                 </a:solidFill>
-                <a:latin typeface="Calibri" pitchFamily="34" charset="0"/>
-                <a:ea typeface="Calibri" pitchFamily="34" charset="-122"/>
+                <a:latin typeface="BIZ UDPゴシック" panose="020B0400000000000000" pitchFamily="50" charset="-128"/>
+                <a:ea typeface="BIZ UDPゴシック" panose="020B0400000000000000" pitchFamily="50" charset="-128"/>
                 <a:cs typeface="Calibri" pitchFamily="34" charset="-120"/>
               </a:rPr>
               <a:t>特に「デバッグ」は原因の再現条件が分からず、何度も同じ場所で詰まった</a:t>
             </a:r>
-            <a:endParaRPr lang="en-US" sz="1300" dirty="0"/>
+            <a:endParaRPr lang="en-US" sz="1300" dirty="0">
+              <a:latin typeface="BIZ UDPゴシック" panose="020B0400000000000000" pitchFamily="50" charset="-128"/>
+              <a:ea typeface="BIZ UDPゴシック" panose="020B0400000000000000" pitchFamily="50" charset="-128"/>
+            </a:endParaRPr>
           </a:p>
         </p:txBody>
       </p:sp>
@@ -3400,6 +3264,16 @@
           </a:solidFill>
           <a:ln/>
         </p:spPr>
+        <p:txBody>
+          <a:bodyPr/>
+          <a:lstStyle/>
+          <a:p>
+            <a:endParaRPr lang="ja-JP" altLang="en-US">
+              <a:latin typeface="BIZ UDPゴシック" panose="020B0400000000000000" pitchFamily="50" charset="-128"/>
+              <a:ea typeface="BIZ UDPゴシック" panose="020B0400000000000000" pitchFamily="50" charset="-128"/>
+            </a:endParaRPr>
+          </a:p>
+        </p:txBody>
       </p:sp>
       <p:sp>
         <p:nvSpPr>
@@ -3420,220 +3294,20 @@
           </a:solidFill>
           <a:ln/>
         </p:spPr>
+        <p:txBody>
+          <a:bodyPr/>
+          <a:lstStyle/>
+          <a:p>
+            <a:endParaRPr lang="ja-JP" altLang="en-US">
+              <a:latin typeface="BIZ UDPゴシック" panose="020B0400000000000000" pitchFamily="50" charset="-128"/>
+              <a:ea typeface="BIZ UDPゴシック" panose="020B0400000000000000" pitchFamily="50" charset="-128"/>
+            </a:endParaRPr>
+          </a:p>
+        </p:txBody>
       </p:sp>
       <p:pic>
         <p:nvPicPr>
-          <p:cNvPr id="8" name="Image 0" descr="preencoded.png">    </p:cNvPr>
-          <p:cNvPicPr>
-            <a:picLocks noChangeAspect="1"/>
-          </p:cNvPicPr>
-          <p:nvPr/>
-        </p:nvPicPr>
-        <p:blipFill>
-          <a:blip r:embed="rId1"/>
-          <a:stretch>
-            <a:fillRect/>
-          </a:stretch>
-        </p:blipFill>
-        <p:spPr>
-          <a:xfrm>
-            <a:off x="1496187" y="2918079"/>
-            <a:ext cx="427482" cy="427482"/>
-          </a:xfrm>
-          <a:prstGeom prst="rect">
-            <a:avLst/>
-          </a:prstGeom>
-        </p:spPr>
-      </p:pic>
-      <p:sp>
-        <p:nvSpPr>
-          <p:cNvPr id="9" name="Text 6"/>
-          <p:cNvSpPr/>
-          <p:nvPr/>
-        </p:nvSpPr>
-        <p:spPr>
-          <a:xfrm>
-            <a:off x="813816" y="4069080"/>
-            <a:ext cx="1783080" cy="548640"/>
-          </a:xfrm>
-          <a:prstGeom prst="rect">
-            <a:avLst/>
-          </a:prstGeom>
-          <a:noFill/>
-          <a:ln/>
-        </p:spPr>
-        <p:txBody>
-          <a:bodyPr wrap="square" lIns="0" tIns="0" rIns="0" bIns="0" rtlCol="0" anchor="ctr"/>
-          <a:lstStyle/>
-          <a:p>
-            <a:pPr algn="ctr" indent="0" marL="0">
-              <a:buNone/>
-            </a:pPr>
-            <a:r>
-              <a:rPr lang="en-US" sz="1300" b="1" dirty="0">
-                <a:solidFill>
-                  <a:srgbClr val="22303F"/>
-                </a:solidFill>
-                <a:latin typeface="Cambria" pitchFamily="34" charset="0"/>
-                <a:ea typeface="Cambria" pitchFamily="34" charset="-122"/>
-                <a:cs typeface="Cambria" pitchFamily="34" charset="-120"/>
-              </a:rPr>
-              <a:t>API通信</a:t>
-            </a:r>
-            <a:endParaRPr lang="en-US" sz="1300" dirty="0"/>
-          </a:p>
-        </p:txBody>
-      </p:sp>
-      <p:sp>
-        <p:nvSpPr>
-          <p:cNvPr id="10" name="Shape 7"/>
-          <p:cNvSpPr/>
-          <p:nvPr/>
-        </p:nvSpPr>
-        <p:spPr>
-          <a:xfrm>
-            <a:off x="2916936" y="2468880"/>
-            <a:ext cx="1965960" cy="2286000"/>
-          </a:xfrm>
-          <a:prstGeom prst="roundRect">
-            <a:avLst>
-              <a:gd name="adj" fmla="val 4651"/>
-            </a:avLst>
-          </a:prstGeom>
-          <a:solidFill>
-            <a:srgbClr val="F4F6FB"/>
-          </a:solidFill>
-          <a:ln/>
-        </p:spPr>
-      </p:sp>
-      <p:sp>
-        <p:nvSpPr>
-          <p:cNvPr id="11" name="Shape 8"/>
-          <p:cNvSpPr/>
-          <p:nvPr/>
-        </p:nvSpPr>
-        <p:spPr>
-          <a:xfrm>
-            <a:off x="3515868" y="2743200"/>
-            <a:ext cx="777240" cy="777240"/>
-          </a:xfrm>
-          <a:prstGeom prst="ellipse">
-            <a:avLst/>
-          </a:prstGeom>
-          <a:solidFill>
-            <a:srgbClr val="D64545"/>
-          </a:solidFill>
-          <a:ln/>
-        </p:spPr>
-      </p:sp>
-      <p:pic>
-        <p:nvPicPr>
-          <p:cNvPr id="12" name="Image 1" descr="preencoded.png">    </p:cNvPr>
-          <p:cNvPicPr>
-            <a:picLocks noChangeAspect="1"/>
-          </p:cNvPicPr>
-          <p:nvPr/>
-        </p:nvPicPr>
-        <p:blipFill>
-          <a:blip r:embed="rId2"/>
-          <a:stretch>
-            <a:fillRect/>
-          </a:stretch>
-        </p:blipFill>
-        <p:spPr>
-          <a:xfrm>
-            <a:off x="3690747" y="2918079"/>
-            <a:ext cx="427482" cy="427482"/>
-          </a:xfrm>
-          <a:prstGeom prst="rect">
-            <a:avLst/>
-          </a:prstGeom>
-        </p:spPr>
-      </p:pic>
-      <p:sp>
-        <p:nvSpPr>
-          <p:cNvPr id="13" name="Text 9"/>
-          <p:cNvSpPr/>
-          <p:nvPr/>
-        </p:nvSpPr>
-        <p:spPr>
-          <a:xfrm>
-            <a:off x="3008376" y="4069080"/>
-            <a:ext cx="1783080" cy="548640"/>
-          </a:xfrm>
-          <a:prstGeom prst="rect">
-            <a:avLst/>
-          </a:prstGeom>
-          <a:noFill/>
-          <a:ln/>
-        </p:spPr>
-        <p:txBody>
-          <a:bodyPr wrap="square" lIns="0" tIns="0" rIns="0" bIns="0" rtlCol="0" anchor="ctr"/>
-          <a:lstStyle/>
-          <a:p>
-            <a:pPr algn="ctr" indent="0" marL="0">
-              <a:buNone/>
-            </a:pPr>
-            <a:r>
-              <a:rPr lang="en-US" sz="1300" b="1" dirty="0">
-                <a:solidFill>
-                  <a:srgbClr val="22303F"/>
-                </a:solidFill>
-                <a:latin typeface="Cambria" pitchFamily="34" charset="0"/>
-                <a:ea typeface="Cambria" pitchFamily="34" charset="-122"/>
-                <a:cs typeface="Cambria" pitchFamily="34" charset="-120"/>
-              </a:rPr>
-              <a:t>Next.jsの設計</a:t>
-            </a:r>
-            <a:endParaRPr lang="en-US" sz="1300" dirty="0"/>
-          </a:p>
-        </p:txBody>
-      </p:sp>
-      <p:sp>
-        <p:nvSpPr>
-          <p:cNvPr id="14" name="Shape 10"/>
-          <p:cNvSpPr/>
-          <p:nvPr/>
-        </p:nvSpPr>
-        <p:spPr>
-          <a:xfrm>
-            <a:off x="5111496" y="2468880"/>
-            <a:ext cx="1965960" cy="2286000"/>
-          </a:xfrm>
-          <a:prstGeom prst="roundRect">
-            <a:avLst>
-              <a:gd name="adj" fmla="val 4651"/>
-            </a:avLst>
-          </a:prstGeom>
-          <a:solidFill>
-            <a:srgbClr val="F4F6FB"/>
-          </a:solidFill>
-          <a:ln/>
-        </p:spPr>
-      </p:sp>
-      <p:sp>
-        <p:nvSpPr>
-          <p:cNvPr id="15" name="Shape 11"/>
-          <p:cNvSpPr/>
-          <p:nvPr/>
-        </p:nvSpPr>
-        <p:spPr>
-          <a:xfrm>
-            <a:off x="5710428" y="2743200"/>
-            <a:ext cx="777240" cy="777240"/>
-          </a:xfrm>
-          <a:prstGeom prst="ellipse">
-            <a:avLst/>
-          </a:prstGeom>
-          <a:solidFill>
-            <a:srgbClr val="D64545"/>
-          </a:solidFill>
-          <a:ln/>
-        </p:spPr>
-      </p:sp>
-      <p:pic>
-        <p:nvPicPr>
-          <p:cNvPr id="16" name="Image 2" descr="preencoded.png">    </p:cNvPr>
+          <p:cNvPr id="8" name="Image 0" descr="preencoded.png"/>
           <p:cNvPicPr>
             <a:picLocks noChangeAspect="1"/>
           </p:cNvPicPr>
@@ -3647,7 +3321,7 @@
         </p:blipFill>
         <p:spPr>
           <a:xfrm>
-            <a:off x="5885307" y="2918079"/>
+            <a:off x="1496187" y="2918079"/>
             <a:ext cx="427482" cy="427482"/>
           </a:xfrm>
           <a:prstGeom prst="rect">
@@ -3657,13 +3331,13 @@
       </p:pic>
       <p:sp>
         <p:nvSpPr>
-          <p:cNvPr id="17" name="Text 12"/>
-          <p:cNvSpPr/>
-          <p:nvPr/>
-        </p:nvSpPr>
-        <p:spPr>
-          <a:xfrm>
-            <a:off x="5202936" y="4069080"/>
+          <p:cNvPr id="9" name="Text 6"/>
+          <p:cNvSpPr/>
+          <p:nvPr/>
+        </p:nvSpPr>
+        <p:spPr>
+          <a:xfrm>
+            <a:off x="813816" y="4069080"/>
             <a:ext cx="1783080" cy="548640"/>
           </a:xfrm>
           <a:prstGeom prst="rect">
@@ -3676,7 +3350,7 @@
           <a:bodyPr wrap="square" lIns="0" tIns="0" rIns="0" bIns="0" rtlCol="0" anchor="ctr"/>
           <a:lstStyle/>
           <a:p>
-            <a:pPr algn="ctr" indent="0" marL="0">
+            <a:pPr marL="0" indent="0" algn="ctr">
               <a:buNone/>
             </a:pPr>
             <a:r>
@@ -3684,25 +3358,28 @@
                 <a:solidFill>
                   <a:srgbClr val="22303F"/>
                 </a:solidFill>
-                <a:latin typeface="Cambria" pitchFamily="34" charset="0"/>
-                <a:ea typeface="Cambria" pitchFamily="34" charset="-122"/>
+                <a:latin typeface="BIZ UDPゴシック" panose="020B0400000000000000" pitchFamily="50" charset="-128"/>
+                <a:ea typeface="BIZ UDPゴシック" panose="020B0400000000000000" pitchFamily="50" charset="-128"/>
                 <a:cs typeface="Cambria" pitchFamily="34" charset="-120"/>
               </a:rPr>
-              <a:t>状態管理</a:t>
-            </a:r>
-            <a:endParaRPr lang="en-US" sz="1300" dirty="0"/>
-          </a:p>
-        </p:txBody>
-      </p:sp>
-      <p:sp>
-        <p:nvSpPr>
-          <p:cNvPr id="18" name="Shape 13"/>
-          <p:cNvSpPr/>
-          <p:nvPr/>
-        </p:nvSpPr>
-        <p:spPr>
-          <a:xfrm>
-            <a:off x="7306056" y="2468880"/>
+              <a:t>API通信</a:t>
+            </a:r>
+            <a:endParaRPr lang="en-US" sz="1300" dirty="0">
+              <a:latin typeface="BIZ UDPゴシック" panose="020B0400000000000000" pitchFamily="50" charset="-128"/>
+              <a:ea typeface="BIZ UDPゴシック" panose="020B0400000000000000" pitchFamily="50" charset="-128"/>
+            </a:endParaRPr>
+          </a:p>
+        </p:txBody>
+      </p:sp>
+      <p:sp>
+        <p:nvSpPr>
+          <p:cNvPr id="10" name="Shape 7"/>
+          <p:cNvSpPr/>
+          <p:nvPr/>
+        </p:nvSpPr>
+        <p:spPr>
+          <a:xfrm>
+            <a:off x="2916936" y="2468880"/>
             <a:ext cx="1965960" cy="2286000"/>
           </a:xfrm>
           <a:prstGeom prst="roundRect">
@@ -3715,16 +3392,26 @@
           </a:solidFill>
           <a:ln/>
         </p:spPr>
-      </p:sp>
-      <p:sp>
-        <p:nvSpPr>
-          <p:cNvPr id="19" name="Shape 14"/>
-          <p:cNvSpPr/>
-          <p:nvPr/>
-        </p:nvSpPr>
-        <p:spPr>
-          <a:xfrm>
-            <a:off x="7904988" y="2743200"/>
+        <p:txBody>
+          <a:bodyPr/>
+          <a:lstStyle/>
+          <a:p>
+            <a:endParaRPr lang="ja-JP" altLang="en-US">
+              <a:latin typeface="BIZ UDPゴシック" panose="020B0400000000000000" pitchFamily="50" charset="-128"/>
+              <a:ea typeface="BIZ UDPゴシック" panose="020B0400000000000000" pitchFamily="50" charset="-128"/>
+            </a:endParaRPr>
+          </a:p>
+        </p:txBody>
+      </p:sp>
+      <p:sp>
+        <p:nvSpPr>
+          <p:cNvPr id="11" name="Shape 8"/>
+          <p:cNvSpPr/>
+          <p:nvPr/>
+        </p:nvSpPr>
+        <p:spPr>
+          <a:xfrm>
+            <a:off x="3515868" y="2743200"/>
             <a:ext cx="777240" cy="777240"/>
           </a:xfrm>
           <a:prstGeom prst="ellipse">
@@ -3735,10 +3422,20 @@
           </a:solidFill>
           <a:ln/>
         </p:spPr>
+        <p:txBody>
+          <a:bodyPr/>
+          <a:lstStyle/>
+          <a:p>
+            <a:endParaRPr lang="ja-JP" altLang="en-US">
+              <a:latin typeface="BIZ UDPゴシック" panose="020B0400000000000000" pitchFamily="50" charset="-128"/>
+              <a:ea typeface="BIZ UDPゴシック" panose="020B0400000000000000" pitchFamily="50" charset="-128"/>
+            </a:endParaRPr>
+          </a:p>
+        </p:txBody>
       </p:sp>
       <p:pic>
         <p:nvPicPr>
-          <p:cNvPr id="20" name="Image 3" descr="preencoded.png">    </p:cNvPr>
+          <p:cNvPr id="12" name="Image 1" descr="preencoded.png"/>
           <p:cNvPicPr>
             <a:picLocks noChangeAspect="1"/>
           </p:cNvPicPr>
@@ -3752,7 +3449,7 @@
         </p:blipFill>
         <p:spPr>
           <a:xfrm>
-            <a:off x="8079867" y="2918079"/>
+            <a:off x="3690747" y="2918079"/>
             <a:ext cx="427482" cy="427482"/>
           </a:xfrm>
           <a:prstGeom prst="rect">
@@ -3762,13 +3459,13 @@
       </p:pic>
       <p:sp>
         <p:nvSpPr>
-          <p:cNvPr id="21" name="Text 15"/>
-          <p:cNvSpPr/>
-          <p:nvPr/>
-        </p:nvSpPr>
-        <p:spPr>
-          <a:xfrm>
-            <a:off x="7397496" y="4069080"/>
+          <p:cNvPr id="13" name="Text 9"/>
+          <p:cNvSpPr/>
+          <p:nvPr/>
+        </p:nvSpPr>
+        <p:spPr>
+          <a:xfrm>
+            <a:off x="3008376" y="4069080"/>
             <a:ext cx="1783080" cy="548640"/>
           </a:xfrm>
           <a:prstGeom prst="rect">
@@ -3781,7 +3478,7 @@
           <a:bodyPr wrap="square" lIns="0" tIns="0" rIns="0" bIns="0" rtlCol="0" anchor="ctr"/>
           <a:lstStyle/>
           <a:p>
-            <a:pPr algn="ctr" indent="0" marL="0">
+            <a:pPr marL="0" indent="0" algn="ctr">
               <a:buNone/>
             </a:pPr>
             <a:r>
@@ -3789,26 +3486,29 @@
                 <a:solidFill>
                   <a:srgbClr val="22303F"/>
                 </a:solidFill>
-                <a:latin typeface="Cambria" pitchFamily="34" charset="0"/>
-                <a:ea typeface="Cambria" pitchFamily="34" charset="-122"/>
+                <a:latin typeface="BIZ UDPゴシック" panose="020B0400000000000000" pitchFamily="50" charset="-128"/>
+                <a:ea typeface="BIZ UDPゴシック" panose="020B0400000000000000" pitchFamily="50" charset="-128"/>
                 <a:cs typeface="Cambria" pitchFamily="34" charset="-120"/>
               </a:rPr>
-              <a:t>CSV読み込み</a:t>
-            </a:r>
-            <a:endParaRPr lang="en-US" sz="1300" dirty="0"/>
-          </a:p>
-        </p:txBody>
-      </p:sp>
-      <p:sp>
-        <p:nvSpPr>
-          <p:cNvPr id="22" name="Shape 16"/>
-          <p:cNvSpPr/>
-          <p:nvPr/>
-        </p:nvSpPr>
-        <p:spPr>
-          <a:xfrm>
-            <a:off x="9500616" y="2308860"/>
-            <a:ext cx="1965960" cy="2606040"/>
+              <a:t>Next.jsの設計</a:t>
+            </a:r>
+            <a:endParaRPr lang="en-US" sz="1300" dirty="0">
+              <a:latin typeface="BIZ UDPゴシック" panose="020B0400000000000000" pitchFamily="50" charset="-128"/>
+              <a:ea typeface="BIZ UDPゴシック" panose="020B0400000000000000" pitchFamily="50" charset="-128"/>
+            </a:endParaRPr>
+          </a:p>
+        </p:txBody>
+      </p:sp>
+      <p:sp>
+        <p:nvSpPr>
+          <p:cNvPr id="14" name="Shape 10"/>
+          <p:cNvSpPr/>
+          <p:nvPr/>
+        </p:nvSpPr>
+        <p:spPr>
+          <a:xfrm>
+            <a:off x="5111496" y="2468880"/>
+            <a:ext cx="1965960" cy="2286000"/>
           </a:xfrm>
           <a:prstGeom prst="roundRect">
             <a:avLst>
@@ -3816,34 +3516,54 @@
             </a:avLst>
           </a:prstGeom>
           <a:solidFill>
+            <a:srgbClr val="F4F6FB"/>
+          </a:solidFill>
+          <a:ln/>
+        </p:spPr>
+        <p:txBody>
+          <a:bodyPr/>
+          <a:lstStyle/>
+          <a:p>
+            <a:endParaRPr lang="ja-JP" altLang="en-US">
+              <a:latin typeface="BIZ UDPゴシック" panose="020B0400000000000000" pitchFamily="50" charset="-128"/>
+              <a:ea typeface="BIZ UDPゴシック" panose="020B0400000000000000" pitchFamily="50" charset="-128"/>
+            </a:endParaRPr>
+          </a:p>
+        </p:txBody>
+      </p:sp>
+      <p:sp>
+        <p:nvSpPr>
+          <p:cNvPr id="15" name="Shape 11"/>
+          <p:cNvSpPr/>
+          <p:nvPr/>
+        </p:nvSpPr>
+        <p:spPr>
+          <a:xfrm>
+            <a:off x="5710428" y="2743200"/>
+            <a:ext cx="777240" cy="777240"/>
+          </a:xfrm>
+          <a:prstGeom prst="ellipse">
+            <a:avLst/>
+          </a:prstGeom>
+          <a:solidFill>
             <a:srgbClr val="D64545"/>
           </a:solidFill>
           <a:ln/>
         </p:spPr>
-      </p:sp>
-      <p:sp>
-        <p:nvSpPr>
-          <p:cNvPr id="23" name="Shape 17"/>
-          <p:cNvSpPr/>
-          <p:nvPr/>
-        </p:nvSpPr>
-        <p:spPr>
-          <a:xfrm>
-            <a:off x="10099548" y="2583180"/>
-            <a:ext cx="777240" cy="777240"/>
-          </a:xfrm>
-          <a:prstGeom prst="ellipse">
-            <a:avLst/>
-          </a:prstGeom>
-          <a:solidFill>
-            <a:srgbClr val="FFFFFF"/>
-          </a:solidFill>
-          <a:ln/>
-        </p:spPr>
+        <p:txBody>
+          <a:bodyPr/>
+          <a:lstStyle/>
+          <a:p>
+            <a:endParaRPr lang="ja-JP" altLang="en-US">
+              <a:latin typeface="BIZ UDPゴシック" panose="020B0400000000000000" pitchFamily="50" charset="-128"/>
+              <a:ea typeface="BIZ UDPゴシック" panose="020B0400000000000000" pitchFamily="50" charset="-128"/>
+            </a:endParaRPr>
+          </a:p>
+        </p:txBody>
       </p:sp>
       <p:pic>
         <p:nvPicPr>
-          <p:cNvPr id="24" name="Image 4" descr="preencoded.png">    </p:cNvPr>
+          <p:cNvPr id="16" name="Image 2" descr="preencoded.png"/>
           <p:cNvPicPr>
             <a:picLocks noChangeAspect="1"/>
           </p:cNvPicPr>
@@ -3857,6 +3577,262 @@
         </p:blipFill>
         <p:spPr>
           <a:xfrm>
+            <a:off x="5885307" y="2918079"/>
+            <a:ext cx="427482" cy="427482"/>
+          </a:xfrm>
+          <a:prstGeom prst="rect">
+            <a:avLst/>
+          </a:prstGeom>
+        </p:spPr>
+      </p:pic>
+      <p:sp>
+        <p:nvSpPr>
+          <p:cNvPr id="17" name="Text 12"/>
+          <p:cNvSpPr/>
+          <p:nvPr/>
+        </p:nvSpPr>
+        <p:spPr>
+          <a:xfrm>
+            <a:off x="5202936" y="4069080"/>
+            <a:ext cx="1783080" cy="548640"/>
+          </a:xfrm>
+          <a:prstGeom prst="rect">
+            <a:avLst/>
+          </a:prstGeom>
+          <a:noFill/>
+          <a:ln/>
+        </p:spPr>
+        <p:txBody>
+          <a:bodyPr wrap="square" lIns="0" tIns="0" rIns="0" bIns="0" rtlCol="0" anchor="ctr"/>
+          <a:lstStyle/>
+          <a:p>
+            <a:pPr marL="0" indent="0" algn="ctr">
+              <a:buNone/>
+            </a:pPr>
+            <a:r>
+              <a:rPr lang="en-US" sz="1300" b="1" dirty="0">
+                <a:solidFill>
+                  <a:srgbClr val="22303F"/>
+                </a:solidFill>
+                <a:latin typeface="BIZ UDPゴシック" panose="020B0400000000000000" pitchFamily="50" charset="-128"/>
+                <a:ea typeface="BIZ UDPゴシック" panose="020B0400000000000000" pitchFamily="50" charset="-128"/>
+                <a:cs typeface="Cambria" pitchFamily="34" charset="-120"/>
+              </a:rPr>
+              <a:t>状態管理</a:t>
+            </a:r>
+            <a:endParaRPr lang="en-US" sz="1300" dirty="0">
+              <a:latin typeface="BIZ UDPゴシック" panose="020B0400000000000000" pitchFamily="50" charset="-128"/>
+              <a:ea typeface="BIZ UDPゴシック" panose="020B0400000000000000" pitchFamily="50" charset="-128"/>
+            </a:endParaRPr>
+          </a:p>
+        </p:txBody>
+      </p:sp>
+      <p:sp>
+        <p:nvSpPr>
+          <p:cNvPr id="18" name="Shape 13"/>
+          <p:cNvSpPr/>
+          <p:nvPr/>
+        </p:nvSpPr>
+        <p:spPr>
+          <a:xfrm>
+            <a:off x="7306056" y="2468880"/>
+            <a:ext cx="1965960" cy="2286000"/>
+          </a:xfrm>
+          <a:prstGeom prst="roundRect">
+            <a:avLst>
+              <a:gd name="adj" fmla="val 4651"/>
+            </a:avLst>
+          </a:prstGeom>
+          <a:solidFill>
+            <a:srgbClr val="F4F6FB"/>
+          </a:solidFill>
+          <a:ln/>
+        </p:spPr>
+        <p:txBody>
+          <a:bodyPr/>
+          <a:lstStyle/>
+          <a:p>
+            <a:endParaRPr lang="ja-JP" altLang="en-US">
+              <a:latin typeface="BIZ UDPゴシック" panose="020B0400000000000000" pitchFamily="50" charset="-128"/>
+              <a:ea typeface="BIZ UDPゴシック" panose="020B0400000000000000" pitchFamily="50" charset="-128"/>
+            </a:endParaRPr>
+          </a:p>
+        </p:txBody>
+      </p:sp>
+      <p:sp>
+        <p:nvSpPr>
+          <p:cNvPr id="19" name="Shape 14"/>
+          <p:cNvSpPr/>
+          <p:nvPr/>
+        </p:nvSpPr>
+        <p:spPr>
+          <a:xfrm>
+            <a:off x="7904988" y="2743200"/>
+            <a:ext cx="777240" cy="777240"/>
+          </a:xfrm>
+          <a:prstGeom prst="ellipse">
+            <a:avLst/>
+          </a:prstGeom>
+          <a:solidFill>
+            <a:srgbClr val="D64545"/>
+          </a:solidFill>
+          <a:ln/>
+        </p:spPr>
+        <p:txBody>
+          <a:bodyPr/>
+          <a:lstStyle/>
+          <a:p>
+            <a:endParaRPr lang="ja-JP" altLang="en-US">
+              <a:latin typeface="BIZ UDPゴシック" panose="020B0400000000000000" pitchFamily="50" charset="-128"/>
+              <a:ea typeface="BIZ UDPゴシック" panose="020B0400000000000000" pitchFamily="50" charset="-128"/>
+            </a:endParaRPr>
+          </a:p>
+        </p:txBody>
+      </p:sp>
+      <p:pic>
+        <p:nvPicPr>
+          <p:cNvPr id="20" name="Image 3" descr="preencoded.png"/>
+          <p:cNvPicPr>
+            <a:picLocks noChangeAspect="1"/>
+          </p:cNvPicPr>
+          <p:nvPr/>
+        </p:nvPicPr>
+        <p:blipFill>
+          <a:blip r:embed="rId6"/>
+          <a:stretch>
+            <a:fillRect/>
+          </a:stretch>
+        </p:blipFill>
+        <p:spPr>
+          <a:xfrm>
+            <a:off x="8079867" y="2918079"/>
+            <a:ext cx="427482" cy="427482"/>
+          </a:xfrm>
+          <a:prstGeom prst="rect">
+            <a:avLst/>
+          </a:prstGeom>
+        </p:spPr>
+      </p:pic>
+      <p:sp>
+        <p:nvSpPr>
+          <p:cNvPr id="21" name="Text 15"/>
+          <p:cNvSpPr/>
+          <p:nvPr/>
+        </p:nvSpPr>
+        <p:spPr>
+          <a:xfrm>
+            <a:off x="7397496" y="4069080"/>
+            <a:ext cx="1783080" cy="548640"/>
+          </a:xfrm>
+          <a:prstGeom prst="rect">
+            <a:avLst/>
+          </a:prstGeom>
+          <a:noFill/>
+          <a:ln/>
+        </p:spPr>
+        <p:txBody>
+          <a:bodyPr wrap="square" lIns="0" tIns="0" rIns="0" bIns="0" rtlCol="0" anchor="ctr"/>
+          <a:lstStyle/>
+          <a:p>
+            <a:pPr marL="0" indent="0" algn="ctr">
+              <a:buNone/>
+            </a:pPr>
+            <a:r>
+              <a:rPr lang="en-US" sz="1300" b="1" dirty="0">
+                <a:solidFill>
+                  <a:srgbClr val="22303F"/>
+                </a:solidFill>
+                <a:latin typeface="BIZ UDPゴシック" panose="020B0400000000000000" pitchFamily="50" charset="-128"/>
+                <a:ea typeface="BIZ UDPゴシック" panose="020B0400000000000000" pitchFamily="50" charset="-128"/>
+                <a:cs typeface="Cambria" pitchFamily="34" charset="-120"/>
+              </a:rPr>
+              <a:t>CSV読み込み</a:t>
+            </a:r>
+            <a:endParaRPr lang="en-US" sz="1300" dirty="0">
+              <a:latin typeface="BIZ UDPゴシック" panose="020B0400000000000000" pitchFamily="50" charset="-128"/>
+              <a:ea typeface="BIZ UDPゴシック" panose="020B0400000000000000" pitchFamily="50" charset="-128"/>
+            </a:endParaRPr>
+          </a:p>
+        </p:txBody>
+      </p:sp>
+      <p:sp>
+        <p:nvSpPr>
+          <p:cNvPr id="22" name="Shape 16"/>
+          <p:cNvSpPr/>
+          <p:nvPr/>
+        </p:nvSpPr>
+        <p:spPr>
+          <a:xfrm>
+            <a:off x="9500616" y="2308860"/>
+            <a:ext cx="1965960" cy="2606040"/>
+          </a:xfrm>
+          <a:prstGeom prst="roundRect">
+            <a:avLst>
+              <a:gd name="adj" fmla="val 4651"/>
+            </a:avLst>
+          </a:prstGeom>
+          <a:solidFill>
+            <a:srgbClr val="D64545"/>
+          </a:solidFill>
+          <a:ln/>
+        </p:spPr>
+        <p:txBody>
+          <a:bodyPr/>
+          <a:lstStyle/>
+          <a:p>
+            <a:endParaRPr lang="ja-JP" altLang="en-US">
+              <a:latin typeface="BIZ UDPゴシック" panose="020B0400000000000000" pitchFamily="50" charset="-128"/>
+              <a:ea typeface="BIZ UDPゴシック" panose="020B0400000000000000" pitchFamily="50" charset="-128"/>
+            </a:endParaRPr>
+          </a:p>
+        </p:txBody>
+      </p:sp>
+      <p:sp>
+        <p:nvSpPr>
+          <p:cNvPr id="23" name="Shape 17"/>
+          <p:cNvSpPr/>
+          <p:nvPr/>
+        </p:nvSpPr>
+        <p:spPr>
+          <a:xfrm>
+            <a:off x="10099548" y="2583180"/>
+            <a:ext cx="777240" cy="777240"/>
+          </a:xfrm>
+          <a:prstGeom prst="ellipse">
+            <a:avLst/>
+          </a:prstGeom>
+          <a:solidFill>
+            <a:srgbClr val="FFFFFF"/>
+          </a:solidFill>
+          <a:ln/>
+        </p:spPr>
+        <p:txBody>
+          <a:bodyPr/>
+          <a:lstStyle/>
+          <a:p>
+            <a:endParaRPr lang="ja-JP" altLang="en-US">
+              <a:latin typeface="BIZ UDPゴシック" panose="020B0400000000000000" pitchFamily="50" charset="-128"/>
+              <a:ea typeface="BIZ UDPゴシック" panose="020B0400000000000000" pitchFamily="50" charset="-128"/>
+            </a:endParaRPr>
+          </a:p>
+        </p:txBody>
+      </p:sp>
+      <p:pic>
+        <p:nvPicPr>
+          <p:cNvPr id="24" name="Image 4" descr="preencoded.png"/>
+          <p:cNvPicPr>
+            <a:picLocks noChangeAspect="1"/>
+          </p:cNvPicPr>
+          <p:nvPr/>
+        </p:nvPicPr>
+        <p:blipFill>
+          <a:blip r:embed="rId7"/>
+          <a:stretch>
+            <a:fillRect/>
+          </a:stretch>
+        </p:blipFill>
+        <p:spPr>
+          <a:xfrm>
             <a:off x="10274427" y="2758059"/>
             <a:ext cx="427482" cy="427482"/>
           </a:xfrm>
@@ -3886,7 +3862,7 @@
           <a:bodyPr wrap="square" lIns="0" tIns="0" rIns="0" bIns="0" rtlCol="0" anchor="ctr"/>
           <a:lstStyle/>
           <a:p>
-            <a:pPr algn="ctr" indent="0" marL="0">
+            <a:pPr marL="0" indent="0" algn="ctr">
               <a:buNone/>
             </a:pPr>
             <a:r>
@@ -3894,13 +3870,16 @@
                 <a:solidFill>
                   <a:srgbClr val="FFFFFF"/>
                 </a:solidFill>
-                <a:latin typeface="Cambria" pitchFamily="34" charset="0"/>
-                <a:ea typeface="Cambria" pitchFamily="34" charset="-122"/>
+                <a:latin typeface="BIZ UDPゴシック" panose="020B0400000000000000" pitchFamily="50" charset="-128"/>
+                <a:ea typeface="BIZ UDPゴシック" panose="020B0400000000000000" pitchFamily="50" charset="-128"/>
                 <a:cs typeface="Cambria" pitchFamily="34" charset="-120"/>
               </a:rPr>
               <a:t>デバッグ</a:t>
             </a:r>
-            <a:endParaRPr lang="en-US" sz="1300" dirty="0"/>
+            <a:endParaRPr lang="en-US" sz="1300" dirty="0">
+              <a:latin typeface="BIZ UDPゴシック" panose="020B0400000000000000" pitchFamily="50" charset="-128"/>
+              <a:ea typeface="BIZ UDPゴシック" panose="020B0400000000000000" pitchFamily="50" charset="-128"/>
+            </a:endParaRPr>
           </a:p>
         </p:txBody>
       </p:sp>
@@ -3925,7 +3904,7 @@
           <a:bodyPr wrap="square" lIns="0" tIns="0" rIns="0" bIns="0" rtlCol="0" anchor="ctr"/>
           <a:lstStyle/>
           <a:p>
-            <a:pPr algn="l" indent="0" marL="0">
+            <a:pPr marL="0" indent="0" algn="l">
               <a:buNone/>
             </a:pPr>
             <a:r>
@@ -3933,13 +3912,16 @@
                 <a:solidFill>
                   <a:srgbClr val="5B6478"/>
                 </a:solidFill>
-                <a:latin typeface="Calibri" pitchFamily="34" charset="0"/>
-                <a:ea typeface="Calibri" pitchFamily="34" charset="-122"/>
+                <a:latin typeface="BIZ UDPゴシック" panose="020B0400000000000000" pitchFamily="50" charset="-128"/>
+                <a:ea typeface="BIZ UDPゴシック" panose="020B0400000000000000" pitchFamily="50" charset="-128"/>
                 <a:cs typeface="Calibri" pitchFamily="34" charset="-120"/>
               </a:rPr>
               <a:t>AI活用ふりかえり発表</a:t>
             </a:r>
-            <a:endParaRPr lang="en-US" sz="1000" dirty="0"/>
+            <a:endParaRPr lang="en-US" sz="1000" dirty="0">
+              <a:latin typeface="BIZ UDPゴシック" panose="020B0400000000000000" pitchFamily="50" charset="-128"/>
+              <a:ea typeface="BIZ UDPゴシック" panose="020B0400000000000000" pitchFamily="50" charset="-128"/>
+            </a:endParaRPr>
           </a:p>
         </p:txBody>
       </p:sp>
@@ -3964,7 +3946,7 @@
           <a:bodyPr wrap="square" lIns="0" tIns="0" rIns="0" bIns="0" rtlCol="0" anchor="ctr"/>
           <a:lstStyle/>
           <a:p>
-            <a:pPr algn="r" indent="0" marL="0">
+            <a:pPr marL="0" indent="0" algn="r">
               <a:buNone/>
             </a:pPr>
             <a:r>
@@ -3972,13 +3954,16 @@
                 <a:solidFill>
                   <a:srgbClr val="5B6478"/>
                 </a:solidFill>
-                <a:latin typeface="Calibri" pitchFamily="34" charset="0"/>
-                <a:ea typeface="Calibri" pitchFamily="34" charset="-122"/>
+                <a:latin typeface="BIZ UDPゴシック" panose="020B0400000000000000" pitchFamily="50" charset="-128"/>
+                <a:ea typeface="BIZ UDPゴシック" panose="020B0400000000000000" pitchFamily="50" charset="-128"/>
                 <a:cs typeface="Calibri" pitchFamily="34" charset="-120"/>
               </a:rPr>
               <a:t>3</a:t>
             </a:r>
-            <a:endParaRPr lang="en-US" sz="1000" dirty="0"/>
+            <a:endParaRPr lang="en-US" sz="1000" dirty="0">
+              <a:latin typeface="BIZ UDPゴシック" panose="020B0400000000000000" pitchFamily="50" charset="-128"/>
+              <a:ea typeface="BIZ UDPゴシック" panose="020B0400000000000000" pitchFamily="50" charset="-128"/>
+            </a:endParaRPr>
           </a:p>
         </p:txBody>
       </p:sp>
@@ -3998,6 +3983,7 @@
         <a:solidFill>
           <a:srgbClr val="14213D"/>
         </a:solidFill>
+        <a:effectLst/>
       </p:bgPr>
     </p:bg>
     <p:spTree>
@@ -4035,6 +4021,16 @@
           </a:solidFill>
           <a:ln/>
         </p:spPr>
+        <p:txBody>
+          <a:bodyPr/>
+          <a:lstStyle/>
+          <a:p>
+            <a:endParaRPr lang="ja-JP" altLang="en-US">
+              <a:latin typeface="BIZ UDPゴシック" panose="020B0400000000000000" pitchFamily="50" charset="-128"/>
+              <a:ea typeface="BIZ UDPゴシック" panose="020B0400000000000000" pitchFamily="50" charset="-128"/>
+            </a:endParaRPr>
+          </a:p>
+        </p:txBody>
       </p:sp>
       <p:sp>
         <p:nvSpPr>
@@ -4057,7 +4053,7 @@
           <a:bodyPr wrap="square" lIns="0" tIns="0" rIns="0" bIns="0" rtlCol="0" anchor="ctr"/>
           <a:lstStyle/>
           <a:p>
-            <a:pPr algn="ctr" indent="0" marL="0">
+            <a:pPr marL="0" indent="0" algn="ctr">
               <a:buNone/>
             </a:pPr>
             <a:r>
@@ -4065,13 +4061,16 @@
                 <a:solidFill>
                   <a:srgbClr val="FFFFFF"/>
                 </a:solidFill>
-                <a:latin typeface="Calibri" pitchFamily="34" charset="0"/>
-                <a:ea typeface="Calibri" pitchFamily="34" charset="-122"/>
+                <a:latin typeface="BIZ UDPゴシック" panose="020B0400000000000000" pitchFamily="50" charset="-128"/>
+                <a:ea typeface="BIZ UDPゴシック" panose="020B0400000000000000" pitchFamily="50" charset="-128"/>
                 <a:cs typeface="Calibri" pitchFamily="34" charset="-120"/>
               </a:rPr>
               <a:t>AI活用プロセス</a:t>
             </a:r>
-            <a:endParaRPr lang="en-US" sz="1200" dirty="0"/>
+            <a:endParaRPr lang="en-US" sz="1200" dirty="0">
+              <a:latin typeface="BIZ UDPゴシック" panose="020B0400000000000000" pitchFamily="50" charset="-128"/>
+              <a:ea typeface="BIZ UDPゴシック" panose="020B0400000000000000" pitchFamily="50" charset="-128"/>
+            </a:endParaRPr>
           </a:p>
         </p:txBody>
       </p:sp>
@@ -4096,7 +4095,7 @@
           <a:bodyPr wrap="square" lIns="0" tIns="0" rIns="0" bIns="0" rtlCol="0" anchor="ctr"/>
           <a:lstStyle/>
           <a:p>
-            <a:pPr indent="0" marL="0">
+            <a:pPr marL="0" indent="0">
               <a:buNone/>
             </a:pPr>
             <a:r>
@@ -4104,13 +4103,16 @@
                 <a:solidFill>
                   <a:srgbClr val="FFFFFF"/>
                 </a:solidFill>
-                <a:latin typeface="Cambria" pitchFamily="34" charset="0"/>
-                <a:ea typeface="Cambria" pitchFamily="34" charset="-122"/>
+                <a:latin typeface="BIZ UDPゴシック" panose="020B0400000000000000" pitchFamily="50" charset="-128"/>
+                <a:ea typeface="BIZ UDPゴシック" panose="020B0400000000000000" pitchFamily="50" charset="-128"/>
                 <a:cs typeface="Cambria" pitchFamily="34" charset="-120"/>
               </a:rPr>
               <a:t>ChatGPTとClaude、役割を分けた開発サイクル</a:t>
             </a:r>
-            <a:endParaRPr lang="en-US" sz="2700" dirty="0"/>
+            <a:endParaRPr lang="en-US" sz="2700" dirty="0">
+              <a:latin typeface="BIZ UDPゴシック" panose="020B0400000000000000" pitchFamily="50" charset="-128"/>
+              <a:ea typeface="BIZ UDPゴシック" panose="020B0400000000000000" pitchFamily="50" charset="-128"/>
+            </a:endParaRPr>
           </a:p>
         </p:txBody>
       </p:sp>
@@ -4135,7 +4137,7 @@
           <a:bodyPr wrap="square" lIns="0" tIns="0" rIns="0" bIns="0" rtlCol="0" anchor="ctr"/>
           <a:lstStyle/>
           <a:p>
-            <a:pPr indent="0" marL="0">
+            <a:pPr marL="0" indent="0">
               <a:buNone/>
             </a:pPr>
             <a:r>
@@ -4143,13 +4145,16 @@
                 <a:solidFill>
                   <a:srgbClr val="C9D3E8"/>
                 </a:solidFill>
-                <a:latin typeface="Calibri" pitchFamily="34" charset="0"/>
-                <a:ea typeface="Calibri" pitchFamily="34" charset="-122"/>
+                <a:latin typeface="BIZ UDPゴシック" panose="020B0400000000000000" pitchFamily="50" charset="-128"/>
+                <a:ea typeface="BIZ UDPゴシック" panose="020B0400000000000000" pitchFamily="50" charset="-128"/>
                 <a:cs typeface="Calibri" pitchFamily="34" charset="-120"/>
               </a:rPr>
               <a:t>設計から再テストまでを繰り返し、コードの80〜90%をAIが生成</a:t>
             </a:r>
-            <a:endParaRPr lang="en-US" sz="1300" dirty="0"/>
+            <a:endParaRPr lang="en-US" sz="1300" dirty="0">
+              <a:latin typeface="BIZ UDPゴシック" panose="020B0400000000000000" pitchFamily="50" charset="-128"/>
+              <a:ea typeface="BIZ UDPゴシック" panose="020B0400000000000000" pitchFamily="50" charset="-128"/>
+            </a:endParaRPr>
           </a:p>
         </p:txBody>
       </p:sp>
@@ -4176,6 +4181,16 @@
             <a:tailEnd type="triangle"/>
           </a:ln>
         </p:spPr>
+        <p:txBody>
+          <a:bodyPr/>
+          <a:lstStyle/>
+          <a:p>
+            <a:endParaRPr lang="ja-JP" altLang="en-US">
+              <a:latin typeface="BIZ UDPゴシック" panose="020B0400000000000000" pitchFamily="50" charset="-128"/>
+              <a:ea typeface="BIZ UDPゴシック" panose="020B0400000000000000" pitchFamily="50" charset="-128"/>
+            </a:endParaRPr>
+          </a:p>
+        </p:txBody>
       </p:sp>
       <p:sp>
         <p:nvSpPr>
@@ -4200,6 +4215,16 @@
             <a:tailEnd type="triangle"/>
           </a:ln>
         </p:spPr>
+        <p:txBody>
+          <a:bodyPr/>
+          <a:lstStyle/>
+          <a:p>
+            <a:endParaRPr lang="ja-JP" altLang="en-US">
+              <a:latin typeface="BIZ UDPゴシック" panose="020B0400000000000000" pitchFamily="50" charset="-128"/>
+              <a:ea typeface="BIZ UDPゴシック" panose="020B0400000000000000" pitchFamily="50" charset="-128"/>
+            </a:endParaRPr>
+          </a:p>
+        </p:txBody>
       </p:sp>
       <p:sp>
         <p:nvSpPr>
@@ -4224,6 +4249,16 @@
             <a:tailEnd type="triangle"/>
           </a:ln>
         </p:spPr>
+        <p:txBody>
+          <a:bodyPr/>
+          <a:lstStyle/>
+          <a:p>
+            <a:endParaRPr lang="ja-JP" altLang="en-US">
+              <a:latin typeface="BIZ UDPゴシック" panose="020B0400000000000000" pitchFamily="50" charset="-128"/>
+              <a:ea typeface="BIZ UDPゴシック" panose="020B0400000000000000" pitchFamily="50" charset="-128"/>
+            </a:endParaRPr>
+          </a:p>
+        </p:txBody>
       </p:sp>
       <p:sp>
         <p:nvSpPr>
@@ -4248,6 +4283,16 @@
             <a:tailEnd type="triangle"/>
           </a:ln>
         </p:spPr>
+        <p:txBody>
+          <a:bodyPr/>
+          <a:lstStyle/>
+          <a:p>
+            <a:endParaRPr lang="ja-JP" altLang="en-US">
+              <a:latin typeface="BIZ UDPゴシック" panose="020B0400000000000000" pitchFamily="50" charset="-128"/>
+              <a:ea typeface="BIZ UDPゴシック" panose="020B0400000000000000" pitchFamily="50" charset="-128"/>
+            </a:endParaRPr>
+          </a:p>
+        </p:txBody>
       </p:sp>
       <p:sp>
         <p:nvSpPr>
@@ -4272,6 +4317,16 @@
             <a:tailEnd type="triangle"/>
           </a:ln>
         </p:spPr>
+        <p:txBody>
+          <a:bodyPr/>
+          <a:lstStyle/>
+          <a:p>
+            <a:endParaRPr lang="ja-JP" altLang="en-US">
+              <a:latin typeface="BIZ UDPゴシック" panose="020B0400000000000000" pitchFamily="50" charset="-128"/>
+              <a:ea typeface="BIZ UDPゴシック" panose="020B0400000000000000" pitchFamily="50" charset="-128"/>
+            </a:endParaRPr>
+          </a:p>
+        </p:txBody>
       </p:sp>
       <p:sp>
         <p:nvSpPr>
@@ -4296,6 +4351,16 @@
             <a:tailEnd type="triangle"/>
           </a:ln>
         </p:spPr>
+        <p:txBody>
+          <a:bodyPr/>
+          <a:lstStyle/>
+          <a:p>
+            <a:endParaRPr lang="ja-JP" altLang="en-US">
+              <a:latin typeface="BIZ UDPゴシック" panose="020B0400000000000000" pitchFamily="50" charset="-128"/>
+              <a:ea typeface="BIZ UDPゴシック" panose="020B0400000000000000" pitchFamily="50" charset="-128"/>
+            </a:endParaRPr>
+          </a:p>
+        </p:txBody>
       </p:sp>
       <p:sp>
         <p:nvSpPr>
@@ -4320,6 +4385,16 @@
             <a:tailEnd type="triangle"/>
           </a:ln>
         </p:spPr>
+        <p:txBody>
+          <a:bodyPr/>
+          <a:lstStyle/>
+          <a:p>
+            <a:endParaRPr lang="ja-JP" altLang="en-US">
+              <a:latin typeface="BIZ UDPゴシック" panose="020B0400000000000000" pitchFamily="50" charset="-128"/>
+              <a:ea typeface="BIZ UDPゴシック" panose="020B0400000000000000" pitchFamily="50" charset="-128"/>
+            </a:endParaRPr>
+          </a:p>
+        </p:txBody>
       </p:sp>
       <p:sp>
         <p:nvSpPr>
@@ -4345,6 +4420,16 @@
             <a:prstDash val="solid"/>
           </a:ln>
         </p:spPr>
+        <p:txBody>
+          <a:bodyPr/>
+          <a:lstStyle/>
+          <a:p>
+            <a:endParaRPr lang="ja-JP" altLang="en-US">
+              <a:latin typeface="BIZ UDPゴシック" panose="020B0400000000000000" pitchFamily="50" charset="-128"/>
+              <a:ea typeface="BIZ UDPゴシック" panose="020B0400000000000000" pitchFamily="50" charset="-128"/>
+            </a:endParaRPr>
+          </a:p>
+        </p:txBody>
       </p:sp>
       <p:sp>
         <p:nvSpPr>
@@ -4367,7 +4452,7 @@
           <a:bodyPr wrap="square" lIns="0" tIns="0" rIns="0" bIns="0" rtlCol="0" anchor="ctr"/>
           <a:lstStyle/>
           <a:p>
-            <a:pPr algn="ctr" indent="0" marL="0">
+            <a:pPr marL="0" indent="0" algn="ctr">
               <a:lnSpc>
                 <a:spcPct val="110000"/>
               </a:lnSpc>
@@ -4378,16 +4463,19 @@
                 <a:solidFill>
                   <a:srgbClr val="FFFFFF"/>
                 </a:solidFill>
-                <a:latin typeface="Calibri" pitchFamily="34" charset="0"/>
-                <a:ea typeface="Calibri" pitchFamily="34" charset="-122"/>
+                <a:latin typeface="BIZ UDPゴシック" panose="020B0400000000000000" pitchFamily="50" charset="-128"/>
+                <a:ea typeface="BIZ UDPゴシック" panose="020B0400000000000000" pitchFamily="50" charset="-128"/>
                 <a:cs typeface="Calibri" pitchFamily="34" charset="-120"/>
               </a:rPr>
               <a:t>①ChatGPTで</a:t>
             </a:r>
-            <a:endParaRPr lang="en-US" sz="1050" dirty="0"/>
-          </a:p>
-          <a:p>
-            <a:pPr algn="ctr" indent="0" marL="0">
+            <a:endParaRPr lang="en-US" sz="1050" dirty="0">
+              <a:latin typeface="BIZ UDPゴシック" panose="020B0400000000000000" pitchFamily="50" charset="-128"/>
+              <a:ea typeface="BIZ UDPゴシック" panose="020B0400000000000000" pitchFamily="50" charset="-128"/>
+            </a:endParaRPr>
+          </a:p>
+          <a:p>
+            <a:pPr marL="0" indent="0" algn="ctr">
               <a:lnSpc>
                 <a:spcPct val="110000"/>
               </a:lnSpc>
@@ -4398,13 +4486,16 @@
                 <a:solidFill>
                   <a:srgbClr val="FFFFFF"/>
                 </a:solidFill>
-                <a:latin typeface="Calibri" pitchFamily="34" charset="0"/>
-                <a:ea typeface="Calibri" pitchFamily="34" charset="-122"/>
+                <a:latin typeface="BIZ UDPゴシック" panose="020B0400000000000000" pitchFamily="50" charset="-128"/>
+                <a:ea typeface="BIZ UDPゴシック" panose="020B0400000000000000" pitchFamily="50" charset="-128"/>
                 <a:cs typeface="Calibri" pitchFamily="34" charset="-120"/>
               </a:rPr>
               <a:t>設計</a:t>
             </a:r>
-            <a:endParaRPr lang="en-US" sz="1050" dirty="0"/>
+            <a:endParaRPr lang="en-US" sz="1050" dirty="0">
+              <a:latin typeface="BIZ UDPゴシック" panose="020B0400000000000000" pitchFamily="50" charset="-128"/>
+              <a:ea typeface="BIZ UDPゴシック" panose="020B0400000000000000" pitchFamily="50" charset="-128"/>
+            </a:endParaRPr>
           </a:p>
         </p:txBody>
       </p:sp>
@@ -4432,6 +4523,16 @@
             <a:prstDash val="solid"/>
           </a:ln>
         </p:spPr>
+        <p:txBody>
+          <a:bodyPr/>
+          <a:lstStyle/>
+          <a:p>
+            <a:endParaRPr lang="ja-JP" altLang="en-US">
+              <a:latin typeface="BIZ UDPゴシック" panose="020B0400000000000000" pitchFamily="50" charset="-128"/>
+              <a:ea typeface="BIZ UDPゴシック" panose="020B0400000000000000" pitchFamily="50" charset="-128"/>
+            </a:endParaRPr>
+          </a:p>
+        </p:txBody>
       </p:sp>
       <p:sp>
         <p:nvSpPr>
@@ -4454,7 +4555,7 @@
           <a:bodyPr wrap="square" lIns="0" tIns="0" rIns="0" bIns="0" rtlCol="0" anchor="ctr"/>
           <a:lstStyle/>
           <a:p>
-            <a:pPr algn="ctr" indent="0" marL="0">
+            <a:pPr marL="0" indent="0" algn="ctr">
               <a:lnSpc>
                 <a:spcPct val="110000"/>
               </a:lnSpc>
@@ -4465,16 +4566,19 @@
                 <a:solidFill>
                   <a:srgbClr val="FFFFFF"/>
                 </a:solidFill>
-                <a:latin typeface="Calibri" pitchFamily="34" charset="0"/>
-                <a:ea typeface="Calibri" pitchFamily="34" charset="-122"/>
+                <a:latin typeface="BIZ UDPゴシック" panose="020B0400000000000000" pitchFamily="50" charset="-128"/>
+                <a:ea typeface="BIZ UDPゴシック" panose="020B0400000000000000" pitchFamily="50" charset="-128"/>
                 <a:cs typeface="Calibri" pitchFamily="34" charset="-120"/>
               </a:rPr>
               <a:t>②Claudeで</a:t>
             </a:r>
-            <a:endParaRPr lang="en-US" sz="1050" dirty="0"/>
-          </a:p>
-          <a:p>
-            <a:pPr algn="ctr" indent="0" marL="0">
+            <a:endParaRPr lang="en-US" sz="1050" dirty="0">
+              <a:latin typeface="BIZ UDPゴシック" panose="020B0400000000000000" pitchFamily="50" charset="-128"/>
+              <a:ea typeface="BIZ UDPゴシック" panose="020B0400000000000000" pitchFamily="50" charset="-128"/>
+            </a:endParaRPr>
+          </a:p>
+          <a:p>
+            <a:pPr marL="0" indent="0" algn="ctr">
               <a:lnSpc>
                 <a:spcPct val="110000"/>
               </a:lnSpc>
@@ -4485,13 +4589,16 @@
                 <a:solidFill>
                   <a:srgbClr val="FFFFFF"/>
                 </a:solidFill>
-                <a:latin typeface="Calibri" pitchFamily="34" charset="0"/>
-                <a:ea typeface="Calibri" pitchFamily="34" charset="-122"/>
+                <a:latin typeface="BIZ UDPゴシック" panose="020B0400000000000000" pitchFamily="50" charset="-128"/>
+                <a:ea typeface="BIZ UDPゴシック" panose="020B0400000000000000" pitchFamily="50" charset="-128"/>
                 <a:cs typeface="Calibri" pitchFamily="34" charset="-120"/>
               </a:rPr>
               <a:t>実装</a:t>
             </a:r>
-            <a:endParaRPr lang="en-US" sz="1050" dirty="0"/>
+            <a:endParaRPr lang="en-US" sz="1050" dirty="0">
+              <a:latin typeface="BIZ UDPゴシック" panose="020B0400000000000000" pitchFamily="50" charset="-128"/>
+              <a:ea typeface="BIZ UDPゴシック" panose="020B0400000000000000" pitchFamily="50" charset="-128"/>
+            </a:endParaRPr>
           </a:p>
         </p:txBody>
       </p:sp>
@@ -4519,6 +4626,16 @@
             <a:prstDash val="solid"/>
           </a:ln>
         </p:spPr>
+        <p:txBody>
+          <a:bodyPr/>
+          <a:lstStyle/>
+          <a:p>
+            <a:endParaRPr lang="ja-JP" altLang="en-US">
+              <a:latin typeface="BIZ UDPゴシック" panose="020B0400000000000000" pitchFamily="50" charset="-128"/>
+              <a:ea typeface="BIZ UDPゴシック" panose="020B0400000000000000" pitchFamily="50" charset="-128"/>
+            </a:endParaRPr>
+          </a:p>
+        </p:txBody>
       </p:sp>
       <p:sp>
         <p:nvSpPr>
@@ -4541,7 +4658,7 @@
           <a:bodyPr wrap="square" lIns="0" tIns="0" rIns="0" bIns="0" rtlCol="0" anchor="ctr"/>
           <a:lstStyle/>
           <a:p>
-            <a:pPr algn="ctr" indent="0" marL="0">
+            <a:pPr marL="0" indent="0" algn="ctr">
               <a:lnSpc>
                 <a:spcPct val="110000"/>
               </a:lnSpc>
@@ -4552,13 +4669,16 @@
                 <a:solidFill>
                   <a:srgbClr val="FFFFFF"/>
                 </a:solidFill>
-                <a:latin typeface="Calibri" pitchFamily="34" charset="0"/>
-                <a:ea typeface="Calibri" pitchFamily="34" charset="-122"/>
+                <a:latin typeface="BIZ UDPゴシック" panose="020B0400000000000000" pitchFamily="50" charset="-128"/>
+                <a:ea typeface="BIZ UDPゴシック" panose="020B0400000000000000" pitchFamily="50" charset="-128"/>
                 <a:cs typeface="Calibri" pitchFamily="34" charset="-120"/>
               </a:rPr>
               <a:t>③動作確認</a:t>
             </a:r>
-            <a:endParaRPr lang="en-US" sz="1050" dirty="0"/>
+            <a:endParaRPr lang="en-US" sz="1050" dirty="0">
+              <a:latin typeface="BIZ UDPゴシック" panose="020B0400000000000000" pitchFamily="50" charset="-128"/>
+              <a:ea typeface="BIZ UDPゴシック" panose="020B0400000000000000" pitchFamily="50" charset="-128"/>
+            </a:endParaRPr>
           </a:p>
         </p:txBody>
       </p:sp>
@@ -4586,6 +4706,16 @@
             <a:prstDash val="solid"/>
           </a:ln>
         </p:spPr>
+        <p:txBody>
+          <a:bodyPr/>
+          <a:lstStyle/>
+          <a:p>
+            <a:endParaRPr lang="ja-JP" altLang="en-US">
+              <a:latin typeface="BIZ UDPゴシック" panose="020B0400000000000000" pitchFamily="50" charset="-128"/>
+              <a:ea typeface="BIZ UDPゴシック" panose="020B0400000000000000" pitchFamily="50" charset="-128"/>
+            </a:endParaRPr>
+          </a:p>
+        </p:txBody>
       </p:sp>
       <p:sp>
         <p:nvSpPr>
@@ -4608,7 +4738,7 @@
           <a:bodyPr wrap="square" lIns="0" tIns="0" rIns="0" bIns="0" rtlCol="0" anchor="ctr"/>
           <a:lstStyle/>
           <a:p>
-            <a:pPr algn="ctr" indent="0" marL="0">
+            <a:pPr marL="0" indent="0" algn="ctr">
               <a:lnSpc>
                 <a:spcPct val="110000"/>
               </a:lnSpc>
@@ -4619,13 +4749,16 @@
                 <a:solidFill>
                   <a:srgbClr val="FFFFFF"/>
                 </a:solidFill>
-                <a:latin typeface="Calibri" pitchFamily="34" charset="0"/>
-                <a:ea typeface="Calibri" pitchFamily="34" charset="-122"/>
+                <a:latin typeface="BIZ UDPゴシック" panose="020B0400000000000000" pitchFamily="50" charset="-128"/>
+                <a:ea typeface="BIZ UDPゴシック" panose="020B0400000000000000" pitchFamily="50" charset="-128"/>
                 <a:cs typeface="Calibri" pitchFamily="34" charset="-120"/>
               </a:rPr>
               <a:t>④エラー発生</a:t>
             </a:r>
-            <a:endParaRPr lang="en-US" sz="1050" dirty="0"/>
+            <a:endParaRPr lang="en-US" sz="1050" dirty="0">
+              <a:latin typeface="BIZ UDPゴシック" panose="020B0400000000000000" pitchFamily="50" charset="-128"/>
+              <a:ea typeface="BIZ UDPゴシック" panose="020B0400000000000000" pitchFamily="50" charset="-128"/>
+            </a:endParaRPr>
           </a:p>
         </p:txBody>
       </p:sp>
@@ -4653,6 +4786,16 @@
             <a:prstDash val="solid"/>
           </a:ln>
         </p:spPr>
+        <p:txBody>
+          <a:bodyPr/>
+          <a:lstStyle/>
+          <a:p>
+            <a:endParaRPr lang="ja-JP" altLang="en-US">
+              <a:latin typeface="BIZ UDPゴシック" panose="020B0400000000000000" pitchFamily="50" charset="-128"/>
+              <a:ea typeface="BIZ UDPゴシック" panose="020B0400000000000000" pitchFamily="50" charset="-128"/>
+            </a:endParaRPr>
+          </a:p>
+        </p:txBody>
       </p:sp>
       <p:sp>
         <p:nvSpPr>
@@ -4675,7 +4818,7 @@
           <a:bodyPr wrap="square" lIns="0" tIns="0" rIns="0" bIns="0" rtlCol="0" anchor="ctr"/>
           <a:lstStyle/>
           <a:p>
-            <a:pPr algn="ctr" indent="0" marL="0">
+            <a:pPr marL="0" indent="0" algn="ctr">
               <a:lnSpc>
                 <a:spcPct val="110000"/>
               </a:lnSpc>
@@ -4686,16 +4829,19 @@
                 <a:solidFill>
                   <a:srgbClr val="FFFFFF"/>
                 </a:solidFill>
-                <a:latin typeface="Calibri" pitchFamily="34" charset="0"/>
-                <a:ea typeface="Calibri" pitchFamily="34" charset="-122"/>
+                <a:latin typeface="BIZ UDPゴシック" panose="020B0400000000000000" pitchFamily="50" charset="-128"/>
+                <a:ea typeface="BIZ UDPゴシック" panose="020B0400000000000000" pitchFamily="50" charset="-128"/>
                 <a:cs typeface="Calibri" pitchFamily="34" charset="-120"/>
               </a:rPr>
               <a:t>⑤ChatGPTで</a:t>
             </a:r>
-            <a:endParaRPr lang="en-US" sz="1050" dirty="0"/>
-          </a:p>
-          <a:p>
-            <a:pPr algn="ctr" indent="0" marL="0">
+            <a:endParaRPr lang="en-US" sz="1050" dirty="0">
+              <a:latin typeface="BIZ UDPゴシック" panose="020B0400000000000000" pitchFamily="50" charset="-128"/>
+              <a:ea typeface="BIZ UDPゴシック" panose="020B0400000000000000" pitchFamily="50" charset="-128"/>
+            </a:endParaRPr>
+          </a:p>
+          <a:p>
+            <a:pPr marL="0" indent="0" algn="ctr">
               <a:lnSpc>
                 <a:spcPct val="110000"/>
               </a:lnSpc>
@@ -4706,13 +4852,16 @@
                 <a:solidFill>
                   <a:srgbClr val="FFFFFF"/>
                 </a:solidFill>
-                <a:latin typeface="Calibri" pitchFamily="34" charset="0"/>
-                <a:ea typeface="Calibri" pitchFamily="34" charset="-122"/>
+                <a:latin typeface="BIZ UDPゴシック" panose="020B0400000000000000" pitchFamily="50" charset="-128"/>
+                <a:ea typeface="BIZ UDPゴシック" panose="020B0400000000000000" pitchFamily="50" charset="-128"/>
                 <a:cs typeface="Calibri" pitchFamily="34" charset="-120"/>
               </a:rPr>
               <a:t>原因分析</a:t>
             </a:r>
-            <a:endParaRPr lang="en-US" sz="1050" dirty="0"/>
+            <a:endParaRPr lang="en-US" sz="1050" dirty="0">
+              <a:latin typeface="BIZ UDPゴシック" panose="020B0400000000000000" pitchFamily="50" charset="-128"/>
+              <a:ea typeface="BIZ UDPゴシック" panose="020B0400000000000000" pitchFamily="50" charset="-128"/>
+            </a:endParaRPr>
           </a:p>
         </p:txBody>
       </p:sp>
@@ -4740,6 +4889,16 @@
             <a:prstDash val="solid"/>
           </a:ln>
         </p:spPr>
+        <p:txBody>
+          <a:bodyPr/>
+          <a:lstStyle/>
+          <a:p>
+            <a:endParaRPr lang="ja-JP" altLang="en-US">
+              <a:latin typeface="BIZ UDPゴシック" panose="020B0400000000000000" pitchFamily="50" charset="-128"/>
+              <a:ea typeface="BIZ UDPゴシック" panose="020B0400000000000000" pitchFamily="50" charset="-128"/>
+            </a:endParaRPr>
+          </a:p>
+        </p:txBody>
       </p:sp>
       <p:sp>
         <p:nvSpPr>
@@ -4762,7 +4921,7 @@
           <a:bodyPr wrap="square" lIns="0" tIns="0" rIns="0" bIns="0" rtlCol="0" anchor="ctr"/>
           <a:lstStyle/>
           <a:p>
-            <a:pPr algn="ctr" indent="0" marL="0">
+            <a:pPr marL="0" indent="0" algn="ctr">
               <a:lnSpc>
                 <a:spcPct val="110000"/>
               </a:lnSpc>
@@ -4773,16 +4932,19 @@
                 <a:solidFill>
                   <a:srgbClr val="FFFFFF"/>
                 </a:solidFill>
-                <a:latin typeface="Calibri" pitchFamily="34" charset="0"/>
-                <a:ea typeface="Calibri" pitchFamily="34" charset="-122"/>
+                <a:latin typeface="BIZ UDPゴシック" panose="020B0400000000000000" pitchFamily="50" charset="-128"/>
+                <a:ea typeface="BIZ UDPゴシック" panose="020B0400000000000000" pitchFamily="50" charset="-128"/>
                 <a:cs typeface="Calibri" pitchFamily="34" charset="-120"/>
               </a:rPr>
               <a:t>⑥Claudeで</a:t>
             </a:r>
-            <a:endParaRPr lang="en-US" sz="1050" dirty="0"/>
-          </a:p>
-          <a:p>
-            <a:pPr algn="ctr" indent="0" marL="0">
+            <a:endParaRPr lang="en-US" sz="1050" dirty="0">
+              <a:latin typeface="BIZ UDPゴシック" panose="020B0400000000000000" pitchFamily="50" charset="-128"/>
+              <a:ea typeface="BIZ UDPゴシック" panose="020B0400000000000000" pitchFamily="50" charset="-128"/>
+            </a:endParaRPr>
+          </a:p>
+          <a:p>
+            <a:pPr marL="0" indent="0" algn="ctr">
               <a:lnSpc>
                 <a:spcPct val="110000"/>
               </a:lnSpc>
@@ -4793,13 +4955,16 @@
                 <a:solidFill>
                   <a:srgbClr val="FFFFFF"/>
                 </a:solidFill>
-                <a:latin typeface="Calibri" pitchFamily="34" charset="0"/>
-                <a:ea typeface="Calibri" pitchFamily="34" charset="-122"/>
+                <a:latin typeface="BIZ UDPゴシック" panose="020B0400000000000000" pitchFamily="50" charset="-128"/>
+                <a:ea typeface="BIZ UDPゴシック" panose="020B0400000000000000" pitchFamily="50" charset="-128"/>
                 <a:cs typeface="Calibri" pitchFamily="34" charset="-120"/>
               </a:rPr>
               <a:t>修正</a:t>
             </a:r>
-            <a:endParaRPr lang="en-US" sz="1050" dirty="0"/>
+            <a:endParaRPr lang="en-US" sz="1050" dirty="0">
+              <a:latin typeface="BIZ UDPゴシック" panose="020B0400000000000000" pitchFamily="50" charset="-128"/>
+              <a:ea typeface="BIZ UDPゴシック" panose="020B0400000000000000" pitchFamily="50" charset="-128"/>
+            </a:endParaRPr>
           </a:p>
         </p:txBody>
       </p:sp>
@@ -4827,6 +4992,16 @@
             <a:prstDash val="solid"/>
           </a:ln>
         </p:spPr>
+        <p:txBody>
+          <a:bodyPr/>
+          <a:lstStyle/>
+          <a:p>
+            <a:endParaRPr lang="ja-JP" altLang="en-US">
+              <a:latin typeface="BIZ UDPゴシック" panose="020B0400000000000000" pitchFamily="50" charset="-128"/>
+              <a:ea typeface="BIZ UDPゴシック" panose="020B0400000000000000" pitchFamily="50" charset="-128"/>
+            </a:endParaRPr>
+          </a:p>
+        </p:txBody>
       </p:sp>
       <p:sp>
         <p:nvSpPr>
@@ -4849,7 +5024,7 @@
           <a:bodyPr wrap="square" lIns="0" tIns="0" rIns="0" bIns="0" rtlCol="0" anchor="ctr"/>
           <a:lstStyle/>
           <a:p>
-            <a:pPr algn="ctr" indent="0" marL="0">
+            <a:pPr marL="0" indent="0" algn="ctr">
               <a:lnSpc>
                 <a:spcPct val="110000"/>
               </a:lnSpc>
@@ -4860,13 +5035,16 @@
                 <a:solidFill>
                   <a:srgbClr val="FFFFFF"/>
                 </a:solidFill>
-                <a:latin typeface="Calibri" pitchFamily="34" charset="0"/>
-                <a:ea typeface="Calibri" pitchFamily="34" charset="-122"/>
+                <a:latin typeface="BIZ UDPゴシック" panose="020B0400000000000000" pitchFamily="50" charset="-128"/>
+                <a:ea typeface="BIZ UDPゴシック" panose="020B0400000000000000" pitchFamily="50" charset="-128"/>
                 <a:cs typeface="Calibri" pitchFamily="34" charset="-120"/>
               </a:rPr>
               <a:t>⑦再テスト</a:t>
             </a:r>
-            <a:endParaRPr lang="en-US" sz="1050" dirty="0"/>
+            <a:endParaRPr lang="en-US" sz="1050" dirty="0">
+              <a:latin typeface="BIZ UDPゴシック" panose="020B0400000000000000" pitchFamily="50" charset="-128"/>
+              <a:ea typeface="BIZ UDPゴシック" panose="020B0400000000000000" pitchFamily="50" charset="-128"/>
+            </a:endParaRPr>
           </a:p>
         </p:txBody>
       </p:sp>
@@ -4891,7 +5069,7 @@
           <a:bodyPr wrap="square" lIns="0" tIns="0" rIns="0" bIns="0" rtlCol="0" anchor="ctr"/>
           <a:lstStyle/>
           <a:p>
-            <a:pPr algn="ctr" indent="0" marL="0">
+            <a:pPr marL="0" indent="0" algn="ctr">
               <a:buNone/>
             </a:pPr>
             <a:r>
@@ -4899,13 +5077,16 @@
                 <a:solidFill>
                   <a:srgbClr val="FFFFFF"/>
                 </a:solidFill>
-                <a:latin typeface="Cambria" pitchFamily="34" charset="0"/>
-                <a:ea typeface="Cambria" pitchFamily="34" charset="-122"/>
+                <a:latin typeface="BIZ UDPゴシック" panose="020B0400000000000000" pitchFamily="50" charset="-128"/>
+                <a:ea typeface="BIZ UDPゴシック" panose="020B0400000000000000" pitchFamily="50" charset="-128"/>
                 <a:cs typeface="Cambria" pitchFamily="34" charset="-120"/>
               </a:rPr>
               <a:t>80〜90%</a:t>
             </a:r>
-            <a:endParaRPr lang="en-US" sz="2600" dirty="0"/>
+            <a:endParaRPr lang="en-US" sz="2600" dirty="0">
+              <a:latin typeface="BIZ UDPゴシック" panose="020B0400000000000000" pitchFamily="50" charset="-128"/>
+              <a:ea typeface="BIZ UDPゴシック" panose="020B0400000000000000" pitchFamily="50" charset="-128"/>
+            </a:endParaRPr>
           </a:p>
         </p:txBody>
       </p:sp>
@@ -4930,7 +5111,7 @@
           <a:bodyPr wrap="square" lIns="0" tIns="0" rIns="0" bIns="0" rtlCol="0" anchor="ctr"/>
           <a:lstStyle/>
           <a:p>
-            <a:pPr algn="ctr" indent="0" marL="0">
+            <a:pPr marL="0" indent="0" algn="ctr">
               <a:buNone/>
             </a:pPr>
             <a:r>
@@ -4938,13 +5119,16 @@
                 <a:solidFill>
                   <a:srgbClr val="C9D3E8"/>
                 </a:solidFill>
-                <a:latin typeface="Calibri" pitchFamily="34" charset="0"/>
-                <a:ea typeface="Calibri" pitchFamily="34" charset="-122"/>
+                <a:latin typeface="BIZ UDPゴシック" panose="020B0400000000000000" pitchFamily="50" charset="-128"/>
+                <a:ea typeface="BIZ UDPゴシック" panose="020B0400000000000000" pitchFamily="50" charset="-128"/>
                 <a:cs typeface="Calibri" pitchFamily="34" charset="-120"/>
               </a:rPr>
               <a:t>コードはAIが生成</a:t>
             </a:r>
-            <a:endParaRPr lang="en-US" sz="1050" dirty="0"/>
+            <a:endParaRPr lang="en-US" sz="1050" dirty="0">
+              <a:latin typeface="BIZ UDPゴシック" panose="020B0400000000000000" pitchFamily="50" charset="-128"/>
+              <a:ea typeface="BIZ UDPゴシック" panose="020B0400000000000000" pitchFamily="50" charset="-128"/>
+            </a:endParaRPr>
           </a:p>
         </p:txBody>
       </p:sp>
@@ -4969,6 +5153,16 @@
           </a:solidFill>
           <a:ln/>
         </p:spPr>
+        <p:txBody>
+          <a:bodyPr/>
+          <a:lstStyle/>
+          <a:p>
+            <a:endParaRPr lang="ja-JP" altLang="en-US">
+              <a:latin typeface="BIZ UDPゴシック" panose="020B0400000000000000" pitchFamily="50" charset="-128"/>
+              <a:ea typeface="BIZ UDPゴシック" panose="020B0400000000000000" pitchFamily="50" charset="-128"/>
+            </a:endParaRPr>
+          </a:p>
+        </p:txBody>
       </p:sp>
       <p:sp>
         <p:nvSpPr>
@@ -4989,6 +5183,16 @@
           </a:solidFill>
           <a:ln/>
         </p:spPr>
+        <p:txBody>
+          <a:bodyPr/>
+          <a:lstStyle/>
+          <a:p>
+            <a:endParaRPr lang="ja-JP" altLang="en-US">
+              <a:latin typeface="BIZ UDPゴシック" panose="020B0400000000000000" pitchFamily="50" charset="-128"/>
+              <a:ea typeface="BIZ UDPゴシック" panose="020B0400000000000000" pitchFamily="50" charset="-128"/>
+            </a:endParaRPr>
+          </a:p>
+        </p:txBody>
       </p:sp>
       <p:sp>
         <p:nvSpPr>
@@ -5011,7 +5215,7 @@
           <a:bodyPr wrap="square" lIns="0" tIns="0" rIns="0" bIns="0" rtlCol="0" anchor="ctr"/>
           <a:lstStyle/>
           <a:p>
-            <a:pPr indent="0" marL="0">
+            <a:pPr marL="0" indent="0">
               <a:buNone/>
             </a:pPr>
             <a:r>
@@ -5019,13 +5223,16 @@
                 <a:solidFill>
                   <a:srgbClr val="FFFFFF"/>
                 </a:solidFill>
-                <a:latin typeface="Calibri" pitchFamily="34" charset="0"/>
-                <a:ea typeface="Calibri" pitchFamily="34" charset="-122"/>
+                <a:latin typeface="BIZ UDPゴシック" panose="020B0400000000000000" pitchFamily="50" charset="-128"/>
+                <a:ea typeface="BIZ UDPゴシック" panose="020B0400000000000000" pitchFamily="50" charset="-128"/>
                 <a:cs typeface="Calibri" pitchFamily="34" charset="-120"/>
               </a:rPr>
               <a:t>ChatGPT</a:t>
             </a:r>
-            <a:endParaRPr lang="en-US" sz="1250" dirty="0"/>
+            <a:endParaRPr lang="en-US" sz="1250" dirty="0">
+              <a:latin typeface="BIZ UDPゴシック" panose="020B0400000000000000" pitchFamily="50" charset="-128"/>
+              <a:ea typeface="BIZ UDPゴシック" panose="020B0400000000000000" pitchFamily="50" charset="-128"/>
+            </a:endParaRPr>
           </a:p>
         </p:txBody>
       </p:sp>
@@ -5050,7 +5257,7 @@
           <a:bodyPr wrap="square" lIns="0" tIns="0" rIns="0" bIns="0" rtlCol="0" anchor="ctr"/>
           <a:lstStyle/>
           <a:p>
-            <a:pPr indent="0" marL="0">
+            <a:pPr marL="0" indent="0">
               <a:lnSpc>
                 <a:spcPct val="125000"/>
               </a:lnSpc>
@@ -5061,16 +5268,19 @@
                 <a:solidFill>
                   <a:srgbClr val="C9D3E8"/>
                 </a:solidFill>
-                <a:latin typeface="Calibri" pitchFamily="34" charset="0"/>
-                <a:ea typeface="Calibri" pitchFamily="34" charset="-122"/>
+                <a:latin typeface="BIZ UDPゴシック" panose="020B0400000000000000" pitchFamily="50" charset="-128"/>
+                <a:ea typeface="BIZ UDPゴシック" panose="020B0400000000000000" pitchFamily="50" charset="-128"/>
                 <a:cs typeface="Calibri" pitchFamily="34" charset="-120"/>
               </a:rPr>
               <a:t>仕様決定・アイデア出し・</a:t>
             </a:r>
-            <a:endParaRPr lang="en-US" sz="1050" dirty="0"/>
-          </a:p>
-          <a:p>
-            <a:pPr indent="0" marL="0">
+            <a:endParaRPr lang="en-US" sz="1050" dirty="0">
+              <a:latin typeface="BIZ UDPゴシック" panose="020B0400000000000000" pitchFamily="50" charset="-128"/>
+              <a:ea typeface="BIZ UDPゴシック" panose="020B0400000000000000" pitchFamily="50" charset="-128"/>
+            </a:endParaRPr>
+          </a:p>
+          <a:p>
+            <a:pPr marL="0" indent="0">
               <a:lnSpc>
                 <a:spcPct val="125000"/>
               </a:lnSpc>
@@ -5081,13 +5291,16 @@
                 <a:solidFill>
                   <a:srgbClr val="C9D3E8"/>
                 </a:solidFill>
-                <a:latin typeface="Calibri" pitchFamily="34" charset="0"/>
-                <a:ea typeface="Calibri" pitchFamily="34" charset="-122"/>
+                <a:latin typeface="BIZ UDPゴシック" panose="020B0400000000000000" pitchFamily="50" charset="-128"/>
+                <a:ea typeface="BIZ UDPゴシック" panose="020B0400000000000000" pitchFamily="50" charset="-128"/>
                 <a:cs typeface="Calibri" pitchFamily="34" charset="-120"/>
               </a:rPr>
               <a:t>設計フロー・原因予測</a:t>
             </a:r>
-            <a:endParaRPr lang="en-US" sz="1050" dirty="0"/>
+            <a:endParaRPr lang="en-US" sz="1050" dirty="0">
+              <a:latin typeface="BIZ UDPゴシック" panose="020B0400000000000000" pitchFamily="50" charset="-128"/>
+              <a:ea typeface="BIZ UDPゴシック" panose="020B0400000000000000" pitchFamily="50" charset="-128"/>
+            </a:endParaRPr>
           </a:p>
         </p:txBody>
       </p:sp>
@@ -5112,6 +5325,16 @@
           </a:solidFill>
           <a:ln/>
         </p:spPr>
+        <p:txBody>
+          <a:bodyPr/>
+          <a:lstStyle/>
+          <a:p>
+            <a:endParaRPr lang="ja-JP" altLang="en-US">
+              <a:latin typeface="BIZ UDPゴシック" panose="020B0400000000000000" pitchFamily="50" charset="-128"/>
+              <a:ea typeface="BIZ UDPゴシック" panose="020B0400000000000000" pitchFamily="50" charset="-128"/>
+            </a:endParaRPr>
+          </a:p>
+        </p:txBody>
       </p:sp>
       <p:sp>
         <p:nvSpPr>
@@ -5132,6 +5355,16 @@
           </a:solidFill>
           <a:ln/>
         </p:spPr>
+        <p:txBody>
+          <a:bodyPr/>
+          <a:lstStyle/>
+          <a:p>
+            <a:endParaRPr lang="ja-JP" altLang="en-US">
+              <a:latin typeface="BIZ UDPゴシック" panose="020B0400000000000000" pitchFamily="50" charset="-128"/>
+              <a:ea typeface="BIZ UDPゴシック" panose="020B0400000000000000" pitchFamily="50" charset="-128"/>
+            </a:endParaRPr>
+          </a:p>
+        </p:txBody>
       </p:sp>
       <p:sp>
         <p:nvSpPr>
@@ -5154,7 +5387,7 @@
           <a:bodyPr wrap="square" lIns="0" tIns="0" rIns="0" bIns="0" rtlCol="0" anchor="ctr"/>
           <a:lstStyle/>
           <a:p>
-            <a:pPr indent="0" marL="0">
+            <a:pPr marL="0" indent="0">
               <a:buNone/>
             </a:pPr>
             <a:r>
@@ -5162,13 +5395,16 @@
                 <a:solidFill>
                   <a:srgbClr val="FFFFFF"/>
                 </a:solidFill>
-                <a:latin typeface="Calibri" pitchFamily="34" charset="0"/>
-                <a:ea typeface="Calibri" pitchFamily="34" charset="-122"/>
+                <a:latin typeface="BIZ UDPゴシック" panose="020B0400000000000000" pitchFamily="50" charset="-128"/>
+                <a:ea typeface="BIZ UDPゴシック" panose="020B0400000000000000" pitchFamily="50" charset="-128"/>
                 <a:cs typeface="Calibri" pitchFamily="34" charset="-120"/>
               </a:rPr>
               <a:t>Claude</a:t>
             </a:r>
-            <a:endParaRPr lang="en-US" sz="1250" dirty="0"/>
+            <a:endParaRPr lang="en-US" sz="1250" dirty="0">
+              <a:latin typeface="BIZ UDPゴシック" panose="020B0400000000000000" pitchFamily="50" charset="-128"/>
+              <a:ea typeface="BIZ UDPゴシック" panose="020B0400000000000000" pitchFamily="50" charset="-128"/>
+            </a:endParaRPr>
           </a:p>
         </p:txBody>
       </p:sp>
@@ -5193,7 +5429,7 @@
           <a:bodyPr wrap="square" lIns="0" tIns="0" rIns="0" bIns="0" rtlCol="0" anchor="ctr"/>
           <a:lstStyle/>
           <a:p>
-            <a:pPr indent="0" marL="0">
+            <a:pPr marL="0" indent="0">
               <a:lnSpc>
                 <a:spcPct val="125000"/>
               </a:lnSpc>
@@ -5204,16 +5440,19 @@
                 <a:solidFill>
                   <a:srgbClr val="C9D3E8"/>
                 </a:solidFill>
-                <a:latin typeface="Calibri" pitchFamily="34" charset="0"/>
-                <a:ea typeface="Calibri" pitchFamily="34" charset="-122"/>
+                <a:latin typeface="BIZ UDPゴシック" panose="020B0400000000000000" pitchFamily="50" charset="-128"/>
+                <a:ea typeface="BIZ UDPゴシック" panose="020B0400000000000000" pitchFamily="50" charset="-128"/>
                 <a:cs typeface="Calibri" pitchFamily="34" charset="-120"/>
               </a:rPr>
               <a:t>コード生成・デバッグ・</a:t>
             </a:r>
-            <a:endParaRPr lang="en-US" sz="1050" dirty="0"/>
-          </a:p>
-          <a:p>
-            <a:pPr indent="0" marL="0">
+            <a:endParaRPr lang="en-US" sz="1050" dirty="0">
+              <a:latin typeface="BIZ UDPゴシック" panose="020B0400000000000000" pitchFamily="50" charset="-128"/>
+              <a:ea typeface="BIZ UDPゴシック" panose="020B0400000000000000" pitchFamily="50" charset="-128"/>
+            </a:endParaRPr>
+          </a:p>
+          <a:p>
+            <a:pPr marL="0" indent="0">
               <a:lnSpc>
                 <a:spcPct val="125000"/>
               </a:lnSpc>
@@ -5224,13 +5463,16 @@
                 <a:solidFill>
                   <a:srgbClr val="C9D3E8"/>
                 </a:solidFill>
-                <a:latin typeface="Calibri" pitchFamily="34" charset="0"/>
-                <a:ea typeface="Calibri" pitchFamily="34" charset="-122"/>
+                <a:latin typeface="BIZ UDPゴシック" panose="020B0400000000000000" pitchFamily="50" charset="-128"/>
+                <a:ea typeface="BIZ UDPゴシック" panose="020B0400000000000000" pitchFamily="50" charset="-128"/>
                 <a:cs typeface="Calibri" pitchFamily="34" charset="-120"/>
               </a:rPr>
               <a:t>修正・次機能の実装</a:t>
             </a:r>
-            <a:endParaRPr lang="en-US" sz="1050" dirty="0"/>
+            <a:endParaRPr lang="en-US" sz="1050" dirty="0">
+              <a:latin typeface="BIZ UDPゴシック" panose="020B0400000000000000" pitchFamily="50" charset="-128"/>
+              <a:ea typeface="BIZ UDPゴシック" panose="020B0400000000000000" pitchFamily="50" charset="-128"/>
+            </a:endParaRPr>
           </a:p>
         </p:txBody>
       </p:sp>
@@ -5255,7 +5497,7 @@
           <a:bodyPr wrap="square" lIns="0" tIns="0" rIns="0" bIns="0" rtlCol="0" anchor="ctr"/>
           <a:lstStyle/>
           <a:p>
-            <a:pPr algn="l" indent="0" marL="0">
+            <a:pPr marL="0" indent="0" algn="l">
               <a:buNone/>
             </a:pPr>
             <a:r>
@@ -5263,13 +5505,16 @@
                 <a:solidFill>
                   <a:srgbClr val="8FA0C4"/>
                 </a:solidFill>
-                <a:latin typeface="Calibri" pitchFamily="34" charset="0"/>
-                <a:ea typeface="Calibri" pitchFamily="34" charset="-122"/>
+                <a:latin typeface="BIZ UDPゴシック" panose="020B0400000000000000" pitchFamily="50" charset="-128"/>
+                <a:ea typeface="BIZ UDPゴシック" panose="020B0400000000000000" pitchFamily="50" charset="-128"/>
                 <a:cs typeface="Calibri" pitchFamily="34" charset="-120"/>
               </a:rPr>
               <a:t>AI活用ふりかえり発表</a:t>
             </a:r>
-            <a:endParaRPr lang="en-US" sz="1000" dirty="0"/>
+            <a:endParaRPr lang="en-US" sz="1000" dirty="0">
+              <a:latin typeface="BIZ UDPゴシック" panose="020B0400000000000000" pitchFamily="50" charset="-128"/>
+              <a:ea typeface="BIZ UDPゴシック" panose="020B0400000000000000" pitchFamily="50" charset="-128"/>
+            </a:endParaRPr>
           </a:p>
         </p:txBody>
       </p:sp>
@@ -5294,7 +5539,7 @@
           <a:bodyPr wrap="square" lIns="0" tIns="0" rIns="0" bIns="0" rtlCol="0" anchor="ctr"/>
           <a:lstStyle/>
           <a:p>
-            <a:pPr algn="r" indent="0" marL="0">
+            <a:pPr marL="0" indent="0" algn="r">
               <a:buNone/>
             </a:pPr>
             <a:r>
@@ -5302,13 +5547,16 @@
                 <a:solidFill>
                   <a:srgbClr val="8FA0C4"/>
                 </a:solidFill>
-                <a:latin typeface="Calibri" pitchFamily="34" charset="0"/>
-                <a:ea typeface="Calibri" pitchFamily="34" charset="-122"/>
+                <a:latin typeface="BIZ UDPゴシック" panose="020B0400000000000000" pitchFamily="50" charset="-128"/>
+                <a:ea typeface="BIZ UDPゴシック" panose="020B0400000000000000" pitchFamily="50" charset="-128"/>
                 <a:cs typeface="Calibri" pitchFamily="34" charset="-120"/>
               </a:rPr>
               <a:t>4</a:t>
             </a:r>
-            <a:endParaRPr lang="en-US" sz="1000" dirty="0"/>
+            <a:endParaRPr lang="en-US" sz="1000" dirty="0">
+              <a:latin typeface="BIZ UDPゴシック" panose="020B0400000000000000" pitchFamily="50" charset="-128"/>
+              <a:ea typeface="BIZ UDPゴシック" panose="020B0400000000000000" pitchFamily="50" charset="-128"/>
+            </a:endParaRPr>
           </a:p>
         </p:txBody>
       </p:sp>
@@ -5328,6 +5576,7 @@
         <a:solidFill>
           <a:srgbClr val="FFFFFF"/>
         </a:solidFill>
+        <a:effectLst/>
       </p:bgPr>
     </p:bg>
     <p:spTree>
@@ -5365,6 +5614,16 @@
           </a:solidFill>
           <a:ln/>
         </p:spPr>
+        <p:txBody>
+          <a:bodyPr/>
+          <a:lstStyle/>
+          <a:p>
+            <a:endParaRPr lang="ja-JP" altLang="en-US">
+              <a:latin typeface="BIZ UDPゴシック" panose="020B0400000000000000" pitchFamily="50" charset="-128"/>
+              <a:ea typeface="BIZ UDPゴシック" panose="020B0400000000000000" pitchFamily="50" charset="-128"/>
+            </a:endParaRPr>
+          </a:p>
+        </p:txBody>
       </p:sp>
       <p:sp>
         <p:nvSpPr>
@@ -5387,7 +5646,7 @@
           <a:bodyPr wrap="square" lIns="0" tIns="0" rIns="0" bIns="0" rtlCol="0" anchor="ctr"/>
           <a:lstStyle/>
           <a:p>
-            <a:pPr algn="ctr" indent="0" marL="0">
+            <a:pPr marL="0" indent="0" algn="ctr">
               <a:buNone/>
             </a:pPr>
             <a:r>
@@ -5395,13 +5654,16 @@
                 <a:solidFill>
                   <a:srgbClr val="FFFFFF"/>
                 </a:solidFill>
-                <a:latin typeface="Calibri" pitchFamily="34" charset="0"/>
-                <a:ea typeface="Calibri" pitchFamily="34" charset="-122"/>
+                <a:latin typeface="BIZ UDPゴシック" panose="020B0400000000000000" pitchFamily="50" charset="-128"/>
+                <a:ea typeface="BIZ UDPゴシック" panose="020B0400000000000000" pitchFamily="50" charset="-128"/>
                 <a:cs typeface="Calibri" pitchFamily="34" charset="-120"/>
               </a:rPr>
               <a:t>工夫</a:t>
             </a:r>
-            <a:endParaRPr lang="en-US" sz="1200" dirty="0"/>
+            <a:endParaRPr lang="en-US" sz="1200" dirty="0">
+              <a:latin typeface="BIZ UDPゴシック" panose="020B0400000000000000" pitchFamily="50" charset="-128"/>
+              <a:ea typeface="BIZ UDPゴシック" panose="020B0400000000000000" pitchFamily="50" charset="-128"/>
+            </a:endParaRPr>
           </a:p>
         </p:txBody>
       </p:sp>
@@ -5426,7 +5688,7 @@
           <a:bodyPr wrap="square" lIns="0" tIns="0" rIns="0" bIns="0" rtlCol="0" anchor="ctr"/>
           <a:lstStyle/>
           <a:p>
-            <a:pPr indent="0" marL="0">
+            <a:pPr marL="0" indent="0">
               <a:buNone/>
             </a:pPr>
             <a:r>
@@ -5434,13 +5696,16 @@
                 <a:solidFill>
                   <a:srgbClr val="14213D"/>
                 </a:solidFill>
-                <a:latin typeface="Cambria" pitchFamily="34" charset="0"/>
-                <a:ea typeface="Cambria" pitchFamily="34" charset="-122"/>
+                <a:latin typeface="BIZ UDPゴシック" panose="020B0400000000000000" pitchFamily="50" charset="-128"/>
+                <a:ea typeface="BIZ UDPゴシック" panose="020B0400000000000000" pitchFamily="50" charset="-128"/>
                 <a:cs typeface="Cambria" pitchFamily="34" charset="-120"/>
               </a:rPr>
               <a:t>AIには「曖昧に質問しない」</a:t>
             </a:r>
-            <a:endParaRPr lang="en-US" sz="2700" dirty="0"/>
+            <a:endParaRPr lang="en-US" sz="2700" dirty="0">
+              <a:latin typeface="BIZ UDPゴシック" panose="020B0400000000000000" pitchFamily="50" charset="-128"/>
+              <a:ea typeface="BIZ UDPゴシック" panose="020B0400000000000000" pitchFamily="50" charset="-128"/>
+            </a:endParaRPr>
           </a:p>
         </p:txBody>
       </p:sp>
@@ -5465,7 +5730,7 @@
           <a:bodyPr wrap="square" lIns="0" tIns="0" rIns="0" bIns="0" rtlCol="0" anchor="ctr"/>
           <a:lstStyle/>
           <a:p>
-            <a:pPr indent="0" marL="0">
+            <a:pPr marL="0" indent="0">
               <a:buNone/>
             </a:pPr>
             <a:r>
@@ -5473,13 +5738,16 @@
                 <a:solidFill>
                   <a:srgbClr val="5B6478"/>
                 </a:solidFill>
-                <a:latin typeface="Calibri" pitchFamily="34" charset="0"/>
-                <a:ea typeface="Calibri" pitchFamily="34" charset="-122"/>
+                <a:latin typeface="BIZ UDPゴシック" panose="020B0400000000000000" pitchFamily="50" charset="-128"/>
+                <a:ea typeface="BIZ UDPゴシック" panose="020B0400000000000000" pitchFamily="50" charset="-128"/>
                 <a:cs typeface="Calibri" pitchFamily="34" charset="-120"/>
               </a:rPr>
               <a:t>状況・ログ・意図まで言語化して渡すことで、解決率が大きく上がった</a:t>
             </a:r>
-            <a:endParaRPr lang="en-US" sz="1300" dirty="0"/>
+            <a:endParaRPr lang="en-US" sz="1300" dirty="0">
+              <a:latin typeface="BIZ UDPゴシック" panose="020B0400000000000000" pitchFamily="50" charset="-128"/>
+              <a:ea typeface="BIZ UDPゴシック" panose="020B0400000000000000" pitchFamily="50" charset="-128"/>
+            </a:endParaRPr>
           </a:p>
         </p:txBody>
       </p:sp>
@@ -5504,6 +5772,16 @@
           </a:solidFill>
           <a:ln/>
         </p:spPr>
+        <p:txBody>
+          <a:bodyPr/>
+          <a:lstStyle/>
+          <a:p>
+            <a:endParaRPr lang="ja-JP" altLang="en-US">
+              <a:latin typeface="BIZ UDPゴシック" panose="020B0400000000000000" pitchFamily="50" charset="-128"/>
+              <a:ea typeface="BIZ UDPゴシック" panose="020B0400000000000000" pitchFamily="50" charset="-128"/>
+            </a:endParaRPr>
+          </a:p>
+        </p:txBody>
       </p:sp>
       <p:sp>
         <p:nvSpPr>
@@ -5524,17 +5802,27 @@
           </a:solidFill>
           <a:ln/>
         </p:spPr>
+        <p:txBody>
+          <a:bodyPr/>
+          <a:lstStyle/>
+          <a:p>
+            <a:endParaRPr lang="ja-JP" altLang="en-US">
+              <a:latin typeface="BIZ UDPゴシック" panose="020B0400000000000000" pitchFamily="50" charset="-128"/>
+              <a:ea typeface="BIZ UDPゴシック" panose="020B0400000000000000" pitchFamily="50" charset="-128"/>
+            </a:endParaRPr>
+          </a:p>
+        </p:txBody>
       </p:sp>
       <p:pic>
         <p:nvPicPr>
-          <p:cNvPr id="8" name="Image 0" descr="preencoded.png">    </p:cNvPr>
+          <p:cNvPr id="8" name="Image 0" descr="preencoded.png"/>
           <p:cNvPicPr>
             <a:picLocks noChangeAspect="1"/>
           </p:cNvPicPr>
           <p:nvPr/>
         </p:nvPicPr>
         <p:blipFill>
-          <a:blip r:embed="rId1"/>
+          <a:blip r:embed="rId3"/>
           <a:stretch>
             <a:fillRect/>
           </a:stretch>
@@ -5570,7 +5858,7 @@
           <a:bodyPr wrap="square" lIns="0" tIns="0" rIns="0" bIns="0" rtlCol="0" anchor="ctr"/>
           <a:lstStyle/>
           <a:p>
-            <a:pPr indent="0" marL="0">
+            <a:pPr marL="0" indent="0">
               <a:buNone/>
             </a:pPr>
             <a:r>
@@ -5578,13 +5866,16 @@
                 <a:solidFill>
                   <a:srgbClr val="D64545"/>
                 </a:solidFill>
-                <a:latin typeface="Cambria" pitchFamily="34" charset="0"/>
-                <a:ea typeface="Cambria" pitchFamily="34" charset="-122"/>
+                <a:latin typeface="BIZ UDPゴシック" panose="020B0400000000000000" pitchFamily="50" charset="-128"/>
+                <a:ea typeface="BIZ UDPゴシック" panose="020B0400000000000000" pitchFamily="50" charset="-128"/>
                 <a:cs typeface="Cambria" pitchFamily="34" charset="-120"/>
               </a:rPr>
               <a:t>悪い例</a:t>
             </a:r>
-            <a:endParaRPr lang="en-US" sz="1600" dirty="0"/>
+            <a:endParaRPr lang="en-US" sz="1600" dirty="0">
+              <a:latin typeface="BIZ UDPゴシック" panose="020B0400000000000000" pitchFamily="50" charset="-128"/>
+              <a:ea typeface="BIZ UDPゴシック" panose="020B0400000000000000" pitchFamily="50" charset="-128"/>
+            </a:endParaRPr>
           </a:p>
         </p:txBody>
       </p:sp>
@@ -5614,6 +5905,16 @@
             <a:prstDash val="solid"/>
           </a:ln>
         </p:spPr>
+        <p:txBody>
+          <a:bodyPr/>
+          <a:lstStyle/>
+          <a:p>
+            <a:endParaRPr lang="ja-JP" altLang="en-US">
+              <a:latin typeface="BIZ UDPゴシック" panose="020B0400000000000000" pitchFamily="50" charset="-128"/>
+              <a:ea typeface="BIZ UDPゴシック" panose="020B0400000000000000" pitchFamily="50" charset="-128"/>
+            </a:endParaRPr>
+          </a:p>
+        </p:txBody>
       </p:sp>
       <p:sp>
         <p:nvSpPr>
@@ -5636,7 +5937,7 @@
           <a:bodyPr wrap="square" lIns="0" tIns="0" rIns="0" bIns="0" rtlCol="0" anchor="ctr"/>
           <a:lstStyle/>
           <a:p>
-            <a:pPr indent="0" marL="0">
+            <a:pPr marL="0" indent="0">
               <a:buNone/>
             </a:pPr>
             <a:r>
@@ -5644,13 +5945,16 @@
                 <a:solidFill>
                   <a:srgbClr val="22303F"/>
                 </a:solidFill>
-                <a:latin typeface="Calibri" pitchFamily="34" charset="0"/>
-                <a:ea typeface="Calibri" pitchFamily="34" charset="-122"/>
+                <a:latin typeface="BIZ UDPゴシック" panose="020B0400000000000000" pitchFamily="50" charset="-128"/>
+                <a:ea typeface="BIZ UDPゴシック" panose="020B0400000000000000" pitchFamily="50" charset="-128"/>
                 <a:cs typeface="Calibri" pitchFamily="34" charset="-120"/>
               </a:rPr>
               <a:t>「エラーが出ました。」</a:t>
             </a:r>
-            <a:endParaRPr lang="en-US" sz="1500" dirty="0"/>
+            <a:endParaRPr lang="en-US" sz="1500" dirty="0">
+              <a:latin typeface="BIZ UDPゴシック" panose="020B0400000000000000" pitchFamily="50" charset="-128"/>
+              <a:ea typeface="BIZ UDPゴシック" panose="020B0400000000000000" pitchFamily="50" charset="-128"/>
+            </a:endParaRPr>
           </a:p>
         </p:txBody>
       </p:sp>
@@ -5675,6 +5979,16 @@
           </a:solidFill>
           <a:ln/>
         </p:spPr>
+        <p:txBody>
+          <a:bodyPr/>
+          <a:lstStyle/>
+          <a:p>
+            <a:endParaRPr lang="ja-JP" altLang="en-US">
+              <a:latin typeface="BIZ UDPゴシック" panose="020B0400000000000000" pitchFamily="50" charset="-128"/>
+              <a:ea typeface="BIZ UDPゴシック" panose="020B0400000000000000" pitchFamily="50" charset="-128"/>
+            </a:endParaRPr>
+          </a:p>
+        </p:txBody>
       </p:sp>
       <p:sp>
         <p:nvSpPr>
@@ -5695,17 +6009,27 @@
           </a:solidFill>
           <a:ln/>
         </p:spPr>
+        <p:txBody>
+          <a:bodyPr/>
+          <a:lstStyle/>
+          <a:p>
+            <a:endParaRPr lang="ja-JP" altLang="en-US">
+              <a:latin typeface="BIZ UDPゴシック" panose="020B0400000000000000" pitchFamily="50" charset="-128"/>
+              <a:ea typeface="BIZ UDPゴシック" panose="020B0400000000000000" pitchFamily="50" charset="-128"/>
+            </a:endParaRPr>
+          </a:p>
+        </p:txBody>
       </p:sp>
       <p:pic>
         <p:nvPicPr>
-          <p:cNvPr id="14" name="Image 1" descr="preencoded.png">    </p:cNvPr>
+          <p:cNvPr id="14" name="Image 1" descr="preencoded.png"/>
           <p:cNvPicPr>
             <a:picLocks noChangeAspect="1"/>
           </p:cNvPicPr>
           <p:nvPr/>
         </p:nvPicPr>
         <p:blipFill>
-          <a:blip r:embed="rId2"/>
+          <a:blip r:embed="rId4"/>
           <a:stretch>
             <a:fillRect/>
           </a:stretch>
@@ -5741,7 +6065,7 @@
           <a:bodyPr wrap="square" lIns="0" tIns="0" rIns="0" bIns="0" rtlCol="0" anchor="ctr"/>
           <a:lstStyle/>
           <a:p>
-            <a:pPr indent="0" marL="0">
+            <a:pPr marL="0" indent="0">
               <a:buNone/>
             </a:pPr>
             <a:r>
@@ -5749,13 +6073,16 @@
                 <a:solidFill>
                   <a:srgbClr val="FFFFFF"/>
                 </a:solidFill>
-                <a:latin typeface="Cambria" pitchFamily="34" charset="0"/>
-                <a:ea typeface="Cambria" pitchFamily="34" charset="-122"/>
+                <a:latin typeface="BIZ UDPゴシック" panose="020B0400000000000000" pitchFamily="50" charset="-128"/>
+                <a:ea typeface="BIZ UDPゴシック" panose="020B0400000000000000" pitchFamily="50" charset="-128"/>
                 <a:cs typeface="Cambria" pitchFamily="34" charset="-120"/>
               </a:rPr>
               <a:t>良い例：まとめて渡す6項目</a:t>
             </a:r>
-            <a:endParaRPr lang="en-US" sz="1500" dirty="0"/>
+            <a:endParaRPr lang="en-US" sz="1500" dirty="0">
+              <a:latin typeface="BIZ UDPゴシック" panose="020B0400000000000000" pitchFamily="50" charset="-128"/>
+              <a:ea typeface="BIZ UDPゴシック" panose="020B0400000000000000" pitchFamily="50" charset="-128"/>
+            </a:endParaRPr>
           </a:p>
         </p:txBody>
       </p:sp>
@@ -5780,6 +6107,16 @@
           </a:solidFill>
           <a:ln/>
         </p:spPr>
+        <p:txBody>
+          <a:bodyPr/>
+          <a:lstStyle/>
+          <a:p>
+            <a:endParaRPr lang="ja-JP" altLang="en-US">
+              <a:latin typeface="BIZ UDPゴシック" panose="020B0400000000000000" pitchFamily="50" charset="-128"/>
+              <a:ea typeface="BIZ UDPゴシック" panose="020B0400000000000000" pitchFamily="50" charset="-128"/>
+            </a:endParaRPr>
+          </a:p>
+        </p:txBody>
       </p:sp>
       <p:sp>
         <p:nvSpPr>
@@ -5802,7 +6139,7 @@
           <a:bodyPr wrap="square" lIns="0" tIns="0" rIns="0" bIns="0" rtlCol="0" anchor="ctr"/>
           <a:lstStyle/>
           <a:p>
-            <a:pPr algn="ctr" indent="0" marL="0">
+            <a:pPr marL="0" indent="0" algn="ctr">
               <a:buNone/>
             </a:pPr>
             <a:r>
@@ -5810,13 +6147,16 @@
                 <a:solidFill>
                   <a:srgbClr val="FFFFFF"/>
                 </a:solidFill>
-                <a:latin typeface="Calibri" pitchFamily="34" charset="0"/>
-                <a:ea typeface="Calibri" pitchFamily="34" charset="-122"/>
+                <a:latin typeface="BIZ UDPゴシック" panose="020B0400000000000000" pitchFamily="50" charset="-128"/>
+                <a:ea typeface="BIZ UDPゴシック" panose="020B0400000000000000" pitchFamily="50" charset="-128"/>
                 <a:cs typeface="Calibri" pitchFamily="34" charset="-120"/>
               </a:rPr>
               <a:t>いつ</a:t>
             </a:r>
-            <a:endParaRPr lang="en-US" sz="1100" dirty="0"/>
+            <a:endParaRPr lang="en-US" sz="1100" dirty="0">
+              <a:latin typeface="BIZ UDPゴシック" panose="020B0400000000000000" pitchFamily="50" charset="-128"/>
+              <a:ea typeface="BIZ UDPゴシック" panose="020B0400000000000000" pitchFamily="50" charset="-128"/>
+            </a:endParaRPr>
           </a:p>
         </p:txBody>
       </p:sp>
@@ -5841,6 +6181,16 @@
           </a:solidFill>
           <a:ln/>
         </p:spPr>
+        <p:txBody>
+          <a:bodyPr/>
+          <a:lstStyle/>
+          <a:p>
+            <a:endParaRPr lang="ja-JP" altLang="en-US">
+              <a:latin typeface="BIZ UDPゴシック" panose="020B0400000000000000" pitchFamily="50" charset="-128"/>
+              <a:ea typeface="BIZ UDPゴシック" panose="020B0400000000000000" pitchFamily="50" charset="-128"/>
+            </a:endParaRPr>
+          </a:p>
+        </p:txBody>
       </p:sp>
       <p:sp>
         <p:nvSpPr>
@@ -5863,7 +6213,7 @@
           <a:bodyPr wrap="square" lIns="0" tIns="0" rIns="0" bIns="0" rtlCol="0" anchor="ctr"/>
           <a:lstStyle/>
           <a:p>
-            <a:pPr algn="ctr" indent="0" marL="0">
+            <a:pPr marL="0" indent="0" algn="ctr">
               <a:buNone/>
             </a:pPr>
             <a:r>
@@ -5871,13 +6221,16 @@
                 <a:solidFill>
                   <a:srgbClr val="FFFFFF"/>
                 </a:solidFill>
-                <a:latin typeface="Calibri" pitchFamily="34" charset="0"/>
-                <a:ea typeface="Calibri" pitchFamily="34" charset="-122"/>
+                <a:latin typeface="BIZ UDPゴシック" panose="020B0400000000000000" pitchFamily="50" charset="-128"/>
+                <a:ea typeface="BIZ UDPゴシック" panose="020B0400000000000000" pitchFamily="50" charset="-128"/>
                 <a:cs typeface="Calibri" pitchFamily="34" charset="-120"/>
               </a:rPr>
               <a:t>どの画面</a:t>
             </a:r>
-            <a:endParaRPr lang="en-US" sz="1100" dirty="0"/>
+            <a:endParaRPr lang="en-US" sz="1100" dirty="0">
+              <a:latin typeface="BIZ UDPゴシック" panose="020B0400000000000000" pitchFamily="50" charset="-128"/>
+              <a:ea typeface="BIZ UDPゴシック" panose="020B0400000000000000" pitchFamily="50" charset="-128"/>
+            </a:endParaRPr>
           </a:p>
         </p:txBody>
       </p:sp>
@@ -5902,6 +6255,16 @@
           </a:solidFill>
           <a:ln/>
         </p:spPr>
+        <p:txBody>
+          <a:bodyPr/>
+          <a:lstStyle/>
+          <a:p>
+            <a:endParaRPr lang="ja-JP" altLang="en-US">
+              <a:latin typeface="BIZ UDPゴシック" panose="020B0400000000000000" pitchFamily="50" charset="-128"/>
+              <a:ea typeface="BIZ UDPゴシック" panose="020B0400000000000000" pitchFamily="50" charset="-128"/>
+            </a:endParaRPr>
+          </a:p>
+        </p:txBody>
       </p:sp>
       <p:sp>
         <p:nvSpPr>
@@ -5924,7 +6287,7 @@
           <a:bodyPr wrap="square" lIns="0" tIns="0" rIns="0" bIns="0" rtlCol="0" anchor="ctr"/>
           <a:lstStyle/>
           <a:p>
-            <a:pPr algn="ctr" indent="0" marL="0">
+            <a:pPr marL="0" indent="0" algn="ctr">
               <a:buNone/>
             </a:pPr>
             <a:r>
@@ -5932,13 +6295,16 @@
                 <a:solidFill>
                   <a:srgbClr val="FFFFFF"/>
                 </a:solidFill>
-                <a:latin typeface="Calibri" pitchFamily="34" charset="0"/>
-                <a:ea typeface="Calibri" pitchFamily="34" charset="-122"/>
+                <a:latin typeface="BIZ UDPゴシック" panose="020B0400000000000000" pitchFamily="50" charset="-128"/>
+                <a:ea typeface="BIZ UDPゴシック" panose="020B0400000000000000" pitchFamily="50" charset="-128"/>
                 <a:cs typeface="Calibri" pitchFamily="34" charset="-120"/>
               </a:rPr>
               <a:t>何回目の操作</a:t>
             </a:r>
-            <a:endParaRPr lang="en-US" sz="1100" dirty="0"/>
+            <a:endParaRPr lang="en-US" sz="1100" dirty="0">
+              <a:latin typeface="BIZ UDPゴシック" panose="020B0400000000000000" pitchFamily="50" charset="-128"/>
+              <a:ea typeface="BIZ UDPゴシック" panose="020B0400000000000000" pitchFamily="50" charset="-128"/>
+            </a:endParaRPr>
           </a:p>
         </p:txBody>
       </p:sp>
@@ -5963,6 +6329,16 @@
           </a:solidFill>
           <a:ln/>
         </p:spPr>
+        <p:txBody>
+          <a:bodyPr/>
+          <a:lstStyle/>
+          <a:p>
+            <a:endParaRPr lang="ja-JP" altLang="en-US">
+              <a:latin typeface="BIZ UDPゴシック" panose="020B0400000000000000" pitchFamily="50" charset="-128"/>
+              <a:ea typeface="BIZ UDPゴシック" panose="020B0400000000000000" pitchFamily="50" charset="-128"/>
+            </a:endParaRPr>
+          </a:p>
+        </p:txBody>
       </p:sp>
       <p:sp>
         <p:nvSpPr>
@@ -5985,7 +6361,7 @@
           <a:bodyPr wrap="square" lIns="0" tIns="0" rIns="0" bIns="0" rtlCol="0" anchor="ctr"/>
           <a:lstStyle/>
           <a:p>
-            <a:pPr algn="ctr" indent="0" marL="0">
+            <a:pPr marL="0" indent="0" algn="ctr">
               <a:buNone/>
             </a:pPr>
             <a:r>
@@ -5993,13 +6369,16 @@
                 <a:solidFill>
                   <a:srgbClr val="FFFFFF"/>
                 </a:solidFill>
-                <a:latin typeface="Calibri" pitchFamily="34" charset="0"/>
-                <a:ea typeface="Calibri" pitchFamily="34" charset="-122"/>
+                <a:latin typeface="BIZ UDPゴシック" panose="020B0400000000000000" pitchFamily="50" charset="-128"/>
+                <a:ea typeface="BIZ UDPゴシック" panose="020B0400000000000000" pitchFamily="50" charset="-128"/>
                 <a:cs typeface="Calibri" pitchFamily="34" charset="-120"/>
               </a:rPr>
               <a:t>ログ</a:t>
             </a:r>
-            <a:endParaRPr lang="en-US" sz="1100" dirty="0"/>
+            <a:endParaRPr lang="en-US" sz="1100" dirty="0">
+              <a:latin typeface="BIZ UDPゴシック" panose="020B0400000000000000" pitchFamily="50" charset="-128"/>
+              <a:ea typeface="BIZ UDPゴシック" panose="020B0400000000000000" pitchFamily="50" charset="-128"/>
+            </a:endParaRPr>
           </a:p>
         </p:txBody>
       </p:sp>
@@ -6024,6 +6403,16 @@
           </a:solidFill>
           <a:ln/>
         </p:spPr>
+        <p:txBody>
+          <a:bodyPr/>
+          <a:lstStyle/>
+          <a:p>
+            <a:endParaRPr lang="ja-JP" altLang="en-US">
+              <a:latin typeface="BIZ UDPゴシック" panose="020B0400000000000000" pitchFamily="50" charset="-128"/>
+              <a:ea typeface="BIZ UDPゴシック" panose="020B0400000000000000" pitchFamily="50" charset="-128"/>
+            </a:endParaRPr>
+          </a:p>
+        </p:txBody>
       </p:sp>
       <p:sp>
         <p:nvSpPr>
@@ -6046,7 +6435,7 @@
           <a:bodyPr wrap="square" lIns="0" tIns="0" rIns="0" bIns="0" rtlCol="0" anchor="ctr"/>
           <a:lstStyle/>
           <a:p>
-            <a:pPr algn="ctr" indent="0" marL="0">
+            <a:pPr marL="0" indent="0" algn="ctr">
               <a:buNone/>
             </a:pPr>
             <a:r>
@@ -6054,13 +6443,16 @@
                 <a:solidFill>
                   <a:srgbClr val="FFFFFF"/>
                 </a:solidFill>
-                <a:latin typeface="Calibri" pitchFamily="34" charset="0"/>
-                <a:ea typeface="Calibri" pitchFamily="34" charset="-122"/>
+                <a:latin typeface="BIZ UDPゴシック" panose="020B0400000000000000" pitchFamily="50" charset="-128"/>
+                <a:ea typeface="BIZ UDPゴシック" panose="020B0400000000000000" pitchFamily="50" charset="-128"/>
                 <a:cs typeface="Calibri" pitchFamily="34" charset="-120"/>
               </a:rPr>
               <a:t>エラー文</a:t>
             </a:r>
-            <a:endParaRPr lang="en-US" sz="1100" dirty="0"/>
+            <a:endParaRPr lang="en-US" sz="1100" dirty="0">
+              <a:latin typeface="BIZ UDPゴシック" panose="020B0400000000000000" pitchFamily="50" charset="-128"/>
+              <a:ea typeface="BIZ UDPゴシック" panose="020B0400000000000000" pitchFamily="50" charset="-128"/>
+            </a:endParaRPr>
           </a:p>
         </p:txBody>
       </p:sp>
@@ -6085,6 +6477,16 @@
           </a:solidFill>
           <a:ln/>
         </p:spPr>
+        <p:txBody>
+          <a:bodyPr/>
+          <a:lstStyle/>
+          <a:p>
+            <a:endParaRPr lang="ja-JP" altLang="en-US">
+              <a:latin typeface="BIZ UDPゴシック" panose="020B0400000000000000" pitchFamily="50" charset="-128"/>
+              <a:ea typeface="BIZ UDPゴシック" panose="020B0400000000000000" pitchFamily="50" charset="-128"/>
+            </a:endParaRPr>
+          </a:p>
+        </p:txBody>
       </p:sp>
       <p:sp>
         <p:nvSpPr>
@@ -6107,7 +6509,7 @@
           <a:bodyPr wrap="square" lIns="0" tIns="0" rIns="0" bIns="0" rtlCol="0" anchor="ctr"/>
           <a:lstStyle/>
           <a:p>
-            <a:pPr algn="ctr" indent="0" marL="0">
+            <a:pPr marL="0" indent="0" algn="ctr">
               <a:buNone/>
             </a:pPr>
             <a:r>
@@ -6115,13 +6517,16 @@
                 <a:solidFill>
                   <a:srgbClr val="FFFFFF"/>
                 </a:solidFill>
-                <a:latin typeface="Calibri" pitchFamily="34" charset="0"/>
-                <a:ea typeface="Calibri" pitchFamily="34" charset="-122"/>
+                <a:latin typeface="BIZ UDPゴシック" panose="020B0400000000000000" pitchFamily="50" charset="-128"/>
+                <a:ea typeface="BIZ UDPゴシック" panose="020B0400000000000000" pitchFamily="50" charset="-128"/>
                 <a:cs typeface="Calibri" pitchFamily="34" charset="-120"/>
               </a:rPr>
               <a:t>関連コード</a:t>
             </a:r>
-            <a:endParaRPr lang="en-US" sz="1100" dirty="0"/>
+            <a:endParaRPr lang="en-US" sz="1100" dirty="0">
+              <a:latin typeface="BIZ UDPゴシック" panose="020B0400000000000000" pitchFamily="50" charset="-128"/>
+              <a:ea typeface="BIZ UDPゴシック" panose="020B0400000000000000" pitchFamily="50" charset="-128"/>
+            </a:endParaRPr>
           </a:p>
         </p:txBody>
       </p:sp>
@@ -6146,6 +6551,16 @@
           </a:solidFill>
           <a:ln/>
         </p:spPr>
+        <p:txBody>
+          <a:bodyPr/>
+          <a:lstStyle/>
+          <a:p>
+            <a:endParaRPr lang="ja-JP" altLang="en-US">
+              <a:latin typeface="BIZ UDPゴシック" panose="020B0400000000000000" pitchFamily="50" charset="-128"/>
+              <a:ea typeface="BIZ UDPゴシック" panose="020B0400000000000000" pitchFamily="50" charset="-128"/>
+            </a:endParaRPr>
+          </a:p>
+        </p:txBody>
       </p:sp>
       <p:sp>
         <p:nvSpPr>
@@ -6155,8 +6570,8 @@
         </p:nvSpPr>
         <p:spPr>
           <a:xfrm>
-            <a:off x="882396" y="4846320"/>
-            <a:ext cx="10424160" cy="960120"/>
+            <a:off x="882396" y="4663440"/>
+            <a:ext cx="10424160" cy="1783080"/>
           </a:xfrm>
           <a:prstGeom prst="rect">
             <a:avLst/>
@@ -6168,24 +6583,273 @@
           <a:bodyPr wrap="square" lIns="0" tIns="0" rIns="0" bIns="0" rtlCol="0" anchor="ctr"/>
           <a:lstStyle/>
           <a:p>
-            <a:pPr indent="0" marL="0">
+            <a:pPr marL="0" indent="0">
               <a:lnSpc>
                 <a:spcPct val="130000"/>
               </a:lnSpc>
               <a:buNone/>
             </a:pPr>
             <a:r>
+              <a:rPr lang="en-US" sz="1250" dirty="0" err="1">
+                <a:solidFill>
+                  <a:srgbClr val="22303F"/>
+                </a:solidFill>
+                <a:latin typeface="BIZ UDPゴシック" panose="020B0400000000000000" pitchFamily="50" charset="-128"/>
+                <a:ea typeface="BIZ UDPゴシック" panose="020B0400000000000000" pitchFamily="50" charset="-128"/>
+                <a:cs typeface="Calibri" pitchFamily="34" charset="-120"/>
+              </a:rPr>
+              <a:t>実例</a:t>
+            </a:r>
+            <a:r>
               <a:rPr lang="en-US" sz="1250" dirty="0">
                 <a:solidFill>
                   <a:srgbClr val="22303F"/>
                 </a:solidFill>
-                <a:latin typeface="Calibri" pitchFamily="34" charset="0"/>
-                <a:ea typeface="Calibri" pitchFamily="34" charset="-122"/>
+                <a:latin typeface="BIZ UDPゴシック" panose="020B0400000000000000" pitchFamily="50" charset="-128"/>
+                <a:ea typeface="BIZ UDPゴシック" panose="020B0400000000000000" pitchFamily="50" charset="-128"/>
                 <a:cs typeface="Calibri" pitchFamily="34" charset="-120"/>
               </a:rPr>
-              <a:t>実例：「AI面接で6問目のみレスポンスが返らない。エラーコードなし。関連ファイルは interview.ts / api.ts / page.tsx。原因になりそうな箇所だけ抽出してほしい」</a:t>
-            </a:r>
-            <a:endParaRPr lang="en-US" sz="1250" dirty="0"/>
+              <a:t>：「AI面接で6問目のみレスポンスが返らない。エラーコード</a:t>
+            </a:r>
+            <a:r>
+              <a:rPr lang="ja-JP" altLang="en-US" sz="1250" dirty="0">
+                <a:solidFill>
+                  <a:srgbClr val="22303F"/>
+                </a:solidFill>
+                <a:latin typeface="BIZ UDPゴシック" panose="020B0400000000000000" pitchFamily="50" charset="-128"/>
+                <a:ea typeface="BIZ UDPゴシック" panose="020B0400000000000000" pitchFamily="50" charset="-128"/>
+                <a:cs typeface="Calibri" pitchFamily="34" charset="-120"/>
+              </a:rPr>
+              <a:t>なし</a:t>
+            </a:r>
+            <a:r>
+              <a:rPr lang="en-US" sz="1250" dirty="0">
+                <a:solidFill>
+                  <a:srgbClr val="22303F"/>
+                </a:solidFill>
+                <a:latin typeface="BIZ UDPゴシック" panose="020B0400000000000000" pitchFamily="50" charset="-128"/>
+                <a:ea typeface="BIZ UDPゴシック" panose="020B0400000000000000" pitchFamily="50" charset="-128"/>
+                <a:cs typeface="Calibri" pitchFamily="34" charset="-120"/>
+              </a:rPr>
+              <a:t>。</a:t>
+            </a:r>
+            <a:r>
+              <a:rPr lang="en-US" sz="1250" dirty="0" err="1">
+                <a:solidFill>
+                  <a:srgbClr val="22303F"/>
+                </a:solidFill>
+                <a:latin typeface="BIZ UDPゴシック" panose="020B0400000000000000" pitchFamily="50" charset="-128"/>
+                <a:ea typeface="BIZ UDPゴシック" panose="020B0400000000000000" pitchFamily="50" charset="-128"/>
+                <a:cs typeface="Calibri" pitchFamily="34" charset="-120"/>
+              </a:rPr>
+              <a:t>関連ファイルは</a:t>
+            </a:r>
+            <a:r>
+              <a:rPr lang="en-US" sz="1250" dirty="0">
+                <a:solidFill>
+                  <a:srgbClr val="22303F"/>
+                </a:solidFill>
+                <a:latin typeface="BIZ UDPゴシック" panose="020B0400000000000000" pitchFamily="50" charset="-128"/>
+                <a:ea typeface="BIZ UDPゴシック" panose="020B0400000000000000" pitchFamily="50" charset="-128"/>
+                <a:cs typeface="Calibri" pitchFamily="34" charset="-120"/>
+              </a:rPr>
+              <a:t> </a:t>
+            </a:r>
+            <a:r>
+              <a:rPr lang="en-US" sz="1250" dirty="0" err="1">
+                <a:solidFill>
+                  <a:srgbClr val="22303F"/>
+                </a:solidFill>
+                <a:latin typeface="BIZ UDPゴシック" panose="020B0400000000000000" pitchFamily="50" charset="-128"/>
+                <a:ea typeface="BIZ UDPゴシック" panose="020B0400000000000000" pitchFamily="50" charset="-128"/>
+                <a:cs typeface="Calibri" pitchFamily="34" charset="-120"/>
+              </a:rPr>
+              <a:t>interview.ts</a:t>
+            </a:r>
+            <a:r>
+              <a:rPr lang="en-US" sz="1250" dirty="0">
+                <a:solidFill>
+                  <a:srgbClr val="22303F"/>
+                </a:solidFill>
+                <a:latin typeface="BIZ UDPゴシック" panose="020B0400000000000000" pitchFamily="50" charset="-128"/>
+                <a:ea typeface="BIZ UDPゴシック" panose="020B0400000000000000" pitchFamily="50" charset="-128"/>
+                <a:cs typeface="Calibri" pitchFamily="34" charset="-120"/>
+              </a:rPr>
+              <a:t> / </a:t>
+            </a:r>
+            <a:r>
+              <a:rPr lang="en-US" sz="1250" dirty="0" err="1">
+                <a:solidFill>
+                  <a:srgbClr val="22303F"/>
+                </a:solidFill>
+                <a:latin typeface="BIZ UDPゴシック" panose="020B0400000000000000" pitchFamily="50" charset="-128"/>
+                <a:ea typeface="BIZ UDPゴシック" panose="020B0400000000000000" pitchFamily="50" charset="-128"/>
+                <a:cs typeface="Calibri" pitchFamily="34" charset="-120"/>
+              </a:rPr>
+              <a:t>api.ts</a:t>
+            </a:r>
+            <a:r>
+              <a:rPr lang="en-US" sz="1250" dirty="0">
+                <a:solidFill>
+                  <a:srgbClr val="22303F"/>
+                </a:solidFill>
+                <a:latin typeface="BIZ UDPゴシック" panose="020B0400000000000000" pitchFamily="50" charset="-128"/>
+                <a:ea typeface="BIZ UDPゴシック" panose="020B0400000000000000" pitchFamily="50" charset="-128"/>
+                <a:cs typeface="Calibri" pitchFamily="34" charset="-120"/>
+              </a:rPr>
+              <a:t> / </a:t>
+            </a:r>
+            <a:r>
+              <a:rPr lang="en-US" sz="1250" dirty="0" err="1">
+                <a:solidFill>
+                  <a:srgbClr val="22303F"/>
+                </a:solidFill>
+                <a:latin typeface="BIZ UDPゴシック" panose="020B0400000000000000" pitchFamily="50" charset="-128"/>
+                <a:ea typeface="BIZ UDPゴシック" panose="020B0400000000000000" pitchFamily="50" charset="-128"/>
+                <a:cs typeface="Calibri" pitchFamily="34" charset="-120"/>
+              </a:rPr>
+              <a:t>page.tsx。原因になりそうな箇所だけ抽出してほしい</a:t>
+            </a:r>
+            <a:r>
+              <a:rPr lang="en-US" sz="1250" dirty="0">
+                <a:solidFill>
+                  <a:srgbClr val="22303F"/>
+                </a:solidFill>
+                <a:latin typeface="BIZ UDPゴシック" panose="020B0400000000000000" pitchFamily="50" charset="-128"/>
+                <a:ea typeface="BIZ UDPゴシック" panose="020B0400000000000000" pitchFamily="50" charset="-128"/>
+                <a:cs typeface="Calibri" pitchFamily="34" charset="-120"/>
+              </a:rPr>
+              <a:t>」</a:t>
+            </a:r>
+          </a:p>
+          <a:p>
+            <a:pPr marL="0" indent="0">
+              <a:lnSpc>
+                <a:spcPct val="130000"/>
+              </a:lnSpc>
+              <a:buNone/>
+            </a:pPr>
+            <a:endParaRPr lang="en-US" sz="1250" dirty="0">
+              <a:solidFill>
+                <a:srgbClr val="22303F"/>
+              </a:solidFill>
+              <a:latin typeface="BIZ UDPゴシック" panose="020B0400000000000000" pitchFamily="50" charset="-128"/>
+              <a:ea typeface="BIZ UDPゴシック" panose="020B0400000000000000" pitchFamily="50" charset="-128"/>
+              <a:cs typeface="Calibri" pitchFamily="34" charset="-120"/>
+            </a:endParaRPr>
+          </a:p>
+          <a:p>
+            <a:pPr>
+              <a:lnSpc>
+                <a:spcPct val="130000"/>
+              </a:lnSpc>
+            </a:pPr>
+            <a:r>
+              <a:rPr lang="ja-JP" altLang="en-US" sz="1250" dirty="0">
+                <a:solidFill>
+                  <a:srgbClr val="22303F"/>
+                </a:solidFill>
+                <a:latin typeface="BIZ UDPゴシック" panose="020B0400000000000000" pitchFamily="50" charset="-128"/>
+                <a:ea typeface="BIZ UDPゴシック" panose="020B0400000000000000" pitchFamily="50" charset="-128"/>
+                <a:cs typeface="Calibri" pitchFamily="34" charset="-120"/>
+              </a:rPr>
+              <a:t>実例</a:t>
+            </a:r>
+            <a:r>
+              <a:rPr lang="en-US" altLang="ja-JP" sz="1250" dirty="0">
+                <a:solidFill>
+                  <a:srgbClr val="22303F"/>
+                </a:solidFill>
+                <a:latin typeface="BIZ UDPゴシック" panose="020B0400000000000000" pitchFamily="50" charset="-128"/>
+                <a:ea typeface="BIZ UDPゴシック" panose="020B0400000000000000" pitchFamily="50" charset="-128"/>
+                <a:cs typeface="Calibri" pitchFamily="34" charset="-120"/>
+              </a:rPr>
+              <a:t>2: </a:t>
+            </a:r>
+            <a:r>
+              <a:rPr lang="ja-JP" altLang="en-US" sz="1250" dirty="0">
+                <a:solidFill>
+                  <a:srgbClr val="22303F"/>
+                </a:solidFill>
+                <a:latin typeface="BIZ UDPゴシック" panose="020B0400000000000000" pitchFamily="50" charset="-128"/>
+                <a:ea typeface="BIZ UDPゴシック" panose="020B0400000000000000" pitchFamily="50" charset="-128"/>
+                <a:cs typeface="Calibri" pitchFamily="34" charset="-120"/>
+              </a:rPr>
+              <a:t>「作成したサイトの</a:t>
+            </a:r>
+            <a:r>
+              <a:rPr lang="en-US" altLang="ja-JP" sz="1250" dirty="0">
+                <a:solidFill>
+                  <a:srgbClr val="22303F"/>
+                </a:solidFill>
+                <a:latin typeface="BIZ UDPゴシック" panose="020B0400000000000000" pitchFamily="50" charset="-128"/>
+                <a:ea typeface="BIZ UDPゴシック" panose="020B0400000000000000" pitchFamily="50" charset="-128"/>
+                <a:cs typeface="Calibri" pitchFamily="34" charset="-120"/>
+              </a:rPr>
+              <a:t>GUI</a:t>
+            </a:r>
+            <a:r>
+              <a:rPr lang="ja-JP" altLang="en-US" sz="1250" dirty="0">
+                <a:solidFill>
+                  <a:srgbClr val="22303F"/>
+                </a:solidFill>
+                <a:latin typeface="BIZ UDPゴシック" panose="020B0400000000000000" pitchFamily="50" charset="-128"/>
+                <a:ea typeface="BIZ UDPゴシック" panose="020B0400000000000000" pitchFamily="50" charset="-128"/>
+                <a:cs typeface="Calibri" pitchFamily="34" charset="-120"/>
+              </a:rPr>
+              <a:t>が表示されていません。</a:t>
+            </a:r>
+            <a:r>
+              <a:rPr lang="ja-JP" altLang="ja-JP" sz="1250" dirty="0">
+                <a:latin typeface="BIZ UDPゴシック" panose="020B0400000000000000" pitchFamily="50" charset="-128"/>
+                <a:ea typeface="BIZ UDPゴシック" panose="020B0400000000000000" pitchFamily="50" charset="-128"/>
+              </a:rPr>
+              <a:t>トップページ（/app/page.tsx）にアクセスすると、 ブラウザには白い画面が表示され、GUIが表示されません。 開発サーバーは正常に起動しています。 コンソールには以下のエラーが表示されています</a:t>
+            </a:r>
+            <a:r>
+              <a:rPr lang="ja-JP" altLang="ja-JP" sz="1250" dirty="0"/>
+              <a:t>。 </a:t>
+            </a:r>
+            <a:endParaRPr lang="en-US" altLang="ja-JP" sz="1250" dirty="0">
+              <a:latin typeface="BIZ UDPゴシック" panose="020B0400000000000000" pitchFamily="50" charset="-128"/>
+              <a:ea typeface="BIZ UDPゴシック" panose="020B0400000000000000" pitchFamily="50" charset="-128"/>
+            </a:endParaRPr>
+          </a:p>
+          <a:p>
+            <a:pPr>
+              <a:lnSpc>
+                <a:spcPct val="130000"/>
+              </a:lnSpc>
+            </a:pPr>
+            <a:r>
+              <a:rPr lang="ja-JP" altLang="en-US" sz="1250" dirty="0">
+                <a:latin typeface="BIZ UDPゴシック" panose="020B0400000000000000" pitchFamily="50" charset="-128"/>
+                <a:ea typeface="BIZ UDPゴシック" panose="020B0400000000000000" pitchFamily="50" charset="-128"/>
+              </a:rPr>
+              <a:t>現在のフォルダ構成は～～になっています。こちらがコードになります（コード貼り付け）。原因になっている箇所を特定し、なぜ</a:t>
+            </a:r>
+            <a:r>
+              <a:rPr lang="en-US" altLang="ja-JP" sz="1250" dirty="0">
+                <a:latin typeface="BIZ UDPゴシック" panose="020B0400000000000000" pitchFamily="50" charset="-128"/>
+                <a:ea typeface="BIZ UDPゴシック" panose="020B0400000000000000" pitchFamily="50" charset="-128"/>
+              </a:rPr>
+              <a:t>GUI</a:t>
+            </a:r>
+            <a:r>
+              <a:rPr lang="ja-JP" altLang="en-US" sz="1250" dirty="0">
+                <a:latin typeface="BIZ UDPゴシック" panose="020B0400000000000000" pitchFamily="50" charset="-128"/>
+                <a:ea typeface="BIZ UDPゴシック" panose="020B0400000000000000" pitchFamily="50" charset="-128"/>
+              </a:rPr>
+              <a:t>が表示されないのか説明して</a:t>
+            </a:r>
+            <a:r>
+              <a:rPr lang="ja-JP" altLang="en-US" sz="1250">
+                <a:latin typeface="BIZ UDPゴシック" panose="020B0400000000000000" pitchFamily="50" charset="-128"/>
+                <a:ea typeface="BIZ UDPゴシック" panose="020B0400000000000000" pitchFamily="50" charset="-128"/>
+              </a:rPr>
+              <a:t>ください。修正後のコードも提示してください。</a:t>
+            </a:r>
+            <a:endParaRPr lang="en-US" altLang="ja-JP" sz="1250" dirty="0"/>
           </a:p>
         </p:txBody>
       </p:sp>
@@ -6210,7 +6874,7 @@
           <a:bodyPr wrap="square" lIns="0" tIns="0" rIns="0" bIns="0" rtlCol="0" anchor="ctr"/>
           <a:lstStyle/>
           <a:p>
-            <a:pPr algn="l" indent="0" marL="0">
+            <a:pPr marL="0" indent="0" algn="l">
               <a:buNone/>
             </a:pPr>
             <a:r>
@@ -6218,13 +6882,16 @@
                 <a:solidFill>
                   <a:srgbClr val="5B6478"/>
                 </a:solidFill>
-                <a:latin typeface="Calibri" pitchFamily="34" charset="0"/>
-                <a:ea typeface="Calibri" pitchFamily="34" charset="-122"/>
+                <a:latin typeface="BIZ UDPゴシック" panose="020B0400000000000000" pitchFamily="50" charset="-128"/>
+                <a:ea typeface="BIZ UDPゴシック" panose="020B0400000000000000" pitchFamily="50" charset="-128"/>
                 <a:cs typeface="Calibri" pitchFamily="34" charset="-120"/>
               </a:rPr>
               <a:t>AI活用ふりかえり発表</a:t>
             </a:r>
-            <a:endParaRPr lang="en-US" sz="1000" dirty="0"/>
+            <a:endParaRPr lang="en-US" sz="1000" dirty="0">
+              <a:latin typeface="BIZ UDPゴシック" panose="020B0400000000000000" pitchFamily="50" charset="-128"/>
+              <a:ea typeface="BIZ UDPゴシック" panose="020B0400000000000000" pitchFamily="50" charset="-128"/>
+            </a:endParaRPr>
           </a:p>
         </p:txBody>
       </p:sp>
@@ -6249,7 +6916,7 @@
           <a:bodyPr wrap="square" lIns="0" tIns="0" rIns="0" bIns="0" rtlCol="0" anchor="ctr"/>
           <a:lstStyle/>
           <a:p>
-            <a:pPr algn="r" indent="0" marL="0">
+            <a:pPr marL="0" indent="0" algn="r">
               <a:buNone/>
             </a:pPr>
             <a:r>
@@ -6257,13 +6924,16 @@
                 <a:solidFill>
                   <a:srgbClr val="5B6478"/>
                 </a:solidFill>
-                <a:latin typeface="Calibri" pitchFamily="34" charset="0"/>
-                <a:ea typeface="Calibri" pitchFamily="34" charset="-122"/>
+                <a:latin typeface="BIZ UDPゴシック" panose="020B0400000000000000" pitchFamily="50" charset="-128"/>
+                <a:ea typeface="BIZ UDPゴシック" panose="020B0400000000000000" pitchFamily="50" charset="-128"/>
                 <a:cs typeface="Calibri" pitchFamily="34" charset="-120"/>
               </a:rPr>
               <a:t>5</a:t>
             </a:r>
-            <a:endParaRPr lang="en-US" sz="1000" dirty="0"/>
+            <a:endParaRPr lang="en-US" sz="1000" dirty="0">
+              <a:latin typeface="BIZ UDPゴシック" panose="020B0400000000000000" pitchFamily="50" charset="-128"/>
+              <a:ea typeface="BIZ UDPゴシック" panose="020B0400000000000000" pitchFamily="50" charset="-128"/>
+            </a:endParaRPr>
           </a:p>
         </p:txBody>
       </p:sp>
@@ -6283,6 +6953,7 @@
         <a:solidFill>
           <a:srgbClr val="FFFFFF"/>
         </a:solidFill>
+        <a:effectLst/>
       </p:bgPr>
     </p:bg>
     <p:spTree>
@@ -6320,6 +6991,16 @@
           </a:solidFill>
           <a:ln/>
         </p:spPr>
+        <p:txBody>
+          <a:bodyPr/>
+          <a:lstStyle/>
+          <a:p>
+            <a:endParaRPr lang="ja-JP" altLang="en-US">
+              <a:latin typeface="BIZ UDPゴシック" panose="020B0400000000000000" pitchFamily="50" charset="-128"/>
+              <a:ea typeface="BIZ UDPゴシック" panose="020B0400000000000000" pitchFamily="50" charset="-128"/>
+            </a:endParaRPr>
+          </a:p>
+        </p:txBody>
       </p:sp>
       <p:sp>
         <p:nvSpPr>
@@ -6342,7 +7023,7 @@
           <a:bodyPr wrap="square" lIns="0" tIns="0" rIns="0" bIns="0" rtlCol="0" anchor="ctr"/>
           <a:lstStyle/>
           <a:p>
-            <a:pPr algn="ctr" indent="0" marL="0">
+            <a:pPr marL="0" indent="0" algn="ctr">
               <a:buNone/>
             </a:pPr>
             <a:r>
@@ -6350,13 +7031,16 @@
                 <a:solidFill>
                   <a:srgbClr val="FFFFFF"/>
                 </a:solidFill>
-                <a:latin typeface="Calibri" pitchFamily="34" charset="0"/>
-                <a:ea typeface="Calibri" pitchFamily="34" charset="-122"/>
+                <a:latin typeface="BIZ UDPゴシック" panose="020B0400000000000000" pitchFamily="50" charset="-128"/>
+                <a:ea typeface="BIZ UDPゴシック" panose="020B0400000000000000" pitchFamily="50" charset="-128"/>
                 <a:cs typeface="Calibri" pitchFamily="34" charset="-120"/>
               </a:rPr>
               <a:t>結果</a:t>
             </a:r>
-            <a:endParaRPr lang="en-US" sz="1200" dirty="0"/>
+            <a:endParaRPr lang="en-US" sz="1200" dirty="0">
+              <a:latin typeface="BIZ UDPゴシック" panose="020B0400000000000000" pitchFamily="50" charset="-128"/>
+              <a:ea typeface="BIZ UDPゴシック" panose="020B0400000000000000" pitchFamily="50" charset="-128"/>
+            </a:endParaRPr>
           </a:p>
         </p:txBody>
       </p:sp>
@@ -6381,7 +7065,7 @@
           <a:bodyPr wrap="square" lIns="0" tIns="0" rIns="0" bIns="0" rtlCol="0" anchor="ctr"/>
           <a:lstStyle/>
           <a:p>
-            <a:pPr indent="0" marL="0">
+            <a:pPr marL="0" indent="0">
               <a:buNone/>
             </a:pPr>
             <a:r>
@@ -6389,13 +7073,16 @@
                 <a:solidFill>
                   <a:srgbClr val="14213D"/>
                 </a:solidFill>
-                <a:latin typeface="Cambria" pitchFamily="34" charset="0"/>
-                <a:ea typeface="Cambria" pitchFamily="34" charset="-122"/>
+                <a:latin typeface="BIZ UDPゴシック" panose="020B0400000000000000" pitchFamily="50" charset="-128"/>
+                <a:ea typeface="BIZ UDPゴシック" panose="020B0400000000000000" pitchFamily="50" charset="-128"/>
                 <a:cs typeface="Cambria" pitchFamily="34" charset="-120"/>
               </a:rPr>
               <a:t>試行錯誤の成果</a:t>
             </a:r>
-            <a:endParaRPr lang="en-US" sz="2700" dirty="0"/>
+            <a:endParaRPr lang="en-US" sz="2700" dirty="0">
+              <a:latin typeface="BIZ UDPゴシック" panose="020B0400000000000000" pitchFamily="50" charset="-128"/>
+              <a:ea typeface="BIZ UDPゴシック" panose="020B0400000000000000" pitchFamily="50" charset="-128"/>
+            </a:endParaRPr>
           </a:p>
         </p:txBody>
       </p:sp>
@@ -6420,7 +7107,7 @@
           <a:bodyPr wrap="square" lIns="0" tIns="0" rIns="0" bIns="0" rtlCol="0" anchor="ctr"/>
           <a:lstStyle/>
           <a:p>
-            <a:pPr indent="0" marL="0">
+            <a:pPr marL="0" indent="0">
               <a:buNone/>
             </a:pPr>
             <a:r>
@@ -6428,29 +7115,38 @@
                 <a:solidFill>
                   <a:srgbClr val="5B6478"/>
                 </a:solidFill>
-                <a:latin typeface="Calibri" pitchFamily="34" charset="0"/>
-                <a:ea typeface="Calibri" pitchFamily="34" charset="-122"/>
+                <a:latin typeface="BIZ UDPゴシック" panose="020B0400000000000000" pitchFamily="50" charset="-128"/>
+                <a:ea typeface="BIZ UDPゴシック" panose="020B0400000000000000" pitchFamily="50" charset="-128"/>
                 <a:cs typeface="Calibri" pitchFamily="34" charset="-120"/>
               </a:rPr>
               <a:t>想定2日（16時間相当）の開発を、約8時間まで短縮できた</a:t>
             </a:r>
-            <a:endParaRPr lang="en-US" sz="1300" dirty="0"/>
+            <a:endParaRPr lang="en-US" sz="1300" dirty="0">
+              <a:latin typeface="BIZ UDPゴシック" panose="020B0400000000000000" pitchFamily="50" charset="-128"/>
+              <a:ea typeface="BIZ UDPゴシック" panose="020B0400000000000000" pitchFamily="50" charset="-128"/>
+            </a:endParaRPr>
           </a:p>
         </p:txBody>
       </p:sp>
       <p:graphicFrame>
         <p:nvGraphicFramePr>
-          <p:cNvPr id="6" name="Chart 0" descr=""/>
+          <p:cNvPr id="6" name="Chart 0"/>
           <p:cNvGraphicFramePr/>
-          <p:nvPr/>
+          <p:nvPr>
+            <p:extLst>
+              <p:ext uri="{D42A27DB-BD31-4B8C-83A1-F6EECF244321}">
+                <p14:modId xmlns:p14="http://schemas.microsoft.com/office/powerpoint/2010/main" val="858572623"/>
+              </p:ext>
+            </p:extLst>
+          </p:nvPr>
         </p:nvGraphicFramePr>
         <p:xfrm>
           <a:off x="640080" y="2286000"/>
           <a:ext cx="6583680" cy="3017520"/>
         </p:xfrm>
-        <a:graphic xmlns:a="http://schemas.openxmlformats.org/drawingml/2006/main">
+        <a:graphic>
           <a:graphicData uri="http://schemas.openxmlformats.org/drawingml/2006/chart">
-            <c:chart xmlns:c="http://schemas.openxmlformats.org/drawingml/2006/chart" r:id="rId1"/>
+            <c:chart xmlns:c="http://schemas.openxmlformats.org/drawingml/2006/chart" xmlns:r="http://schemas.openxmlformats.org/officeDocument/2006/relationships" r:id="rId3"/>
           </a:graphicData>
         </a:graphic>
       </p:graphicFrame>
@@ -6475,6 +7171,16 @@
           </a:solidFill>
           <a:ln/>
         </p:spPr>
+        <p:txBody>
+          <a:bodyPr/>
+          <a:lstStyle/>
+          <a:p>
+            <a:endParaRPr lang="ja-JP" altLang="en-US">
+              <a:latin typeface="BIZ UDPゴシック" panose="020B0400000000000000" pitchFamily="50" charset="-128"/>
+              <a:ea typeface="BIZ UDPゴシック" panose="020B0400000000000000" pitchFamily="50" charset="-128"/>
+            </a:endParaRPr>
+          </a:p>
+        </p:txBody>
       </p:sp>
       <p:sp>
         <p:nvSpPr>
@@ -6497,7 +7203,7 @@
           <a:bodyPr wrap="square" lIns="0" tIns="0" rIns="0" bIns="0" rtlCol="0" anchor="ctr"/>
           <a:lstStyle/>
           <a:p>
-            <a:pPr indent="0" marL="0">
+            <a:pPr marL="0" indent="0">
               <a:buNone/>
             </a:pPr>
             <a:r>
@@ -6505,67 +7211,22 @@
                 <a:solidFill>
                   <a:srgbClr val="5B6478"/>
                 </a:solidFill>
-                <a:latin typeface="Calibri" pitchFamily="34" charset="0"/>
-                <a:ea typeface="Calibri" pitchFamily="34" charset="-122"/>
+                <a:latin typeface="BIZ UDPゴシック" panose="020B0400000000000000" pitchFamily="50" charset="-128"/>
+                <a:ea typeface="BIZ UDPゴシック" panose="020B0400000000000000" pitchFamily="50" charset="-128"/>
                 <a:cs typeface="Calibri" pitchFamily="34" charset="-120"/>
               </a:rPr>
               <a:t>完成度</a:t>
             </a:r>
-            <a:endParaRPr lang="en-US" sz="1200" dirty="0"/>
+            <a:endParaRPr lang="en-US" sz="1200" dirty="0">
+              <a:latin typeface="BIZ UDPゴシック" panose="020B0400000000000000" pitchFamily="50" charset="-128"/>
+              <a:ea typeface="BIZ UDPゴシック" panose="020B0400000000000000" pitchFamily="50" charset="-128"/>
+            </a:endParaRPr>
           </a:p>
         </p:txBody>
       </p:sp>
       <p:pic>
         <p:nvPicPr>
-          <p:cNvPr id="9" name="Image 0" descr="preencoded.png">    </p:cNvPr>
-          <p:cNvPicPr>
-            <a:picLocks noChangeAspect="1"/>
-          </p:cNvPicPr>
-          <p:nvPr/>
-        </p:nvPicPr>
-        <p:blipFill>
-          <a:blip r:embed="rId2"/>
-          <a:stretch>
-            <a:fillRect/>
-          </a:stretch>
-        </p:blipFill>
-        <p:spPr>
-          <a:xfrm>
-            <a:off x="7818120" y="2743200"/>
-            <a:ext cx="310896" cy="310896"/>
-          </a:xfrm>
-          <a:prstGeom prst="rect">
-            <a:avLst/>
-          </a:prstGeom>
-        </p:spPr>
-      </p:pic>
-      <p:pic>
-        <p:nvPicPr>
-          <p:cNvPr id="10" name="Image 1" descr="preencoded.png">    </p:cNvPr>
-          <p:cNvPicPr>
-            <a:picLocks noChangeAspect="1"/>
-          </p:cNvPicPr>
-          <p:nvPr/>
-        </p:nvPicPr>
-        <p:blipFill>
-          <a:blip r:embed="rId3"/>
-          <a:stretch>
-            <a:fillRect/>
-          </a:stretch>
-        </p:blipFill>
-        <p:spPr>
-          <a:xfrm>
-            <a:off x="8183880" y="2743200"/>
-            <a:ext cx="310896" cy="310896"/>
-          </a:xfrm>
-          <a:prstGeom prst="rect">
-            <a:avLst/>
-          </a:prstGeom>
-        </p:spPr>
-      </p:pic>
-      <p:pic>
-        <p:nvPicPr>
-          <p:cNvPr id="11" name="Image 2" descr="preencoded.png">    </p:cNvPr>
+          <p:cNvPr id="9" name="Image 0" descr="preencoded.png"/>
           <p:cNvPicPr>
             <a:picLocks noChangeAspect="1"/>
           </p:cNvPicPr>
@@ -6579,7 +7240,7 @@
         </p:blipFill>
         <p:spPr>
           <a:xfrm>
-            <a:off x="8549640" y="2743200"/>
+            <a:off x="7818120" y="2743200"/>
             <a:ext cx="310896" cy="310896"/>
           </a:xfrm>
           <a:prstGeom prst="rect">
@@ -6589,7 +7250,55 @@
       </p:pic>
       <p:pic>
         <p:nvPicPr>
-          <p:cNvPr id="12" name="Image 3" descr="preencoded.png">    </p:cNvPr>
+          <p:cNvPr id="10" name="Image 1" descr="preencoded.png"/>
+          <p:cNvPicPr>
+            <a:picLocks noChangeAspect="1"/>
+          </p:cNvPicPr>
+          <p:nvPr/>
+        </p:nvPicPr>
+        <p:blipFill>
+          <a:blip r:embed="rId4"/>
+          <a:stretch>
+            <a:fillRect/>
+          </a:stretch>
+        </p:blipFill>
+        <p:spPr>
+          <a:xfrm>
+            <a:off x="8183880" y="2743200"/>
+            <a:ext cx="310896" cy="310896"/>
+          </a:xfrm>
+          <a:prstGeom prst="rect">
+            <a:avLst/>
+          </a:prstGeom>
+        </p:spPr>
+      </p:pic>
+      <p:pic>
+        <p:nvPicPr>
+          <p:cNvPr id="11" name="Image 2" descr="preencoded.png"/>
+          <p:cNvPicPr>
+            <a:picLocks noChangeAspect="1"/>
+          </p:cNvPicPr>
+          <p:nvPr/>
+        </p:nvPicPr>
+        <p:blipFill>
+          <a:blip r:embed="rId4"/>
+          <a:stretch>
+            <a:fillRect/>
+          </a:stretch>
+        </p:blipFill>
+        <p:spPr>
+          <a:xfrm>
+            <a:off x="8549640" y="2743200"/>
+            <a:ext cx="310896" cy="310896"/>
+          </a:xfrm>
+          <a:prstGeom prst="rect">
+            <a:avLst/>
+          </a:prstGeom>
+        </p:spPr>
+      </p:pic>
+      <p:pic>
+        <p:nvPicPr>
+          <p:cNvPr id="12" name="Image 3" descr="preencoded.png"/>
           <p:cNvPicPr>
             <a:picLocks noChangeAspect="1"/>
           </p:cNvPicPr>
@@ -6613,14 +7322,14 @@
       </p:pic>
       <p:pic>
         <p:nvPicPr>
-          <p:cNvPr id="13" name="Image 4" descr="preencoded.png">    </p:cNvPr>
+          <p:cNvPr id="13" name="Image 4" descr="preencoded.png"/>
           <p:cNvPicPr>
             <a:picLocks noChangeAspect="1"/>
           </p:cNvPicPr>
           <p:nvPr/>
         </p:nvPicPr>
         <p:blipFill>
-          <a:blip r:embed="rId6"/>
+          <a:blip r:embed="rId5"/>
           <a:stretch>
             <a:fillRect/>
           </a:stretch>
@@ -6656,7 +7365,7 @@
           <a:bodyPr wrap="square" lIns="0" tIns="0" rIns="0" bIns="0" rtlCol="0" anchor="ctr"/>
           <a:lstStyle/>
           <a:p>
-            <a:pPr indent="0" marL="0">
+            <a:pPr marL="0" indent="0">
               <a:buNone/>
             </a:pPr>
             <a:r>
@@ -6664,13 +7373,16 @@
                 <a:solidFill>
                   <a:srgbClr val="5B6478"/>
                 </a:solidFill>
-                <a:latin typeface="Calibri" pitchFamily="34" charset="0"/>
-                <a:ea typeface="Calibri" pitchFamily="34" charset="-122"/>
+                <a:latin typeface="BIZ UDPゴシック" panose="020B0400000000000000" pitchFamily="50" charset="-128"/>
+                <a:ea typeface="BIZ UDPゴシック" panose="020B0400000000000000" pitchFamily="50" charset="-128"/>
                 <a:cs typeface="Calibri" pitchFamily="34" charset="-120"/>
               </a:rPr>
               <a:t>5段階中 3（改善の余地あり）</a:t>
             </a:r>
-            <a:endParaRPr lang="en-US" sz="1100" dirty="0"/>
+            <a:endParaRPr lang="en-US" sz="1100" dirty="0">
+              <a:latin typeface="BIZ UDPゴシック" panose="020B0400000000000000" pitchFamily="50" charset="-128"/>
+              <a:ea typeface="BIZ UDPゴシック" panose="020B0400000000000000" pitchFamily="50" charset="-128"/>
+            </a:endParaRPr>
           </a:p>
         </p:txBody>
       </p:sp>
@@ -6695,6 +7407,16 @@
           </a:solidFill>
           <a:ln/>
         </p:spPr>
+        <p:txBody>
+          <a:bodyPr/>
+          <a:lstStyle/>
+          <a:p>
+            <a:endParaRPr lang="ja-JP" altLang="en-US">
+              <a:latin typeface="BIZ UDPゴシック" panose="020B0400000000000000" pitchFamily="50" charset="-128"/>
+              <a:ea typeface="BIZ UDPゴシック" panose="020B0400000000000000" pitchFamily="50" charset="-128"/>
+            </a:endParaRPr>
+          </a:p>
+        </p:txBody>
       </p:sp>
       <p:sp>
         <p:nvSpPr>
@@ -6717,7 +7439,7 @@
           <a:bodyPr wrap="square" lIns="0" tIns="0" rIns="0" bIns="0" rtlCol="0" anchor="ctr"/>
           <a:lstStyle/>
           <a:p>
-            <a:pPr indent="0" marL="0">
+            <a:pPr marL="0" indent="0">
               <a:buNone/>
             </a:pPr>
             <a:r>
@@ -6725,13 +7447,16 @@
                 <a:solidFill>
                   <a:srgbClr val="2EC4B6"/>
                 </a:solidFill>
-                <a:latin typeface="Cambria" pitchFamily="34" charset="0"/>
-                <a:ea typeface="Cambria" pitchFamily="34" charset="-122"/>
+                <a:latin typeface="BIZ UDPゴシック" panose="020B0400000000000000" pitchFamily="50" charset="-128"/>
+                <a:ea typeface="BIZ UDPゴシック" panose="020B0400000000000000" pitchFamily="50" charset="-128"/>
                 <a:cs typeface="Cambria" pitchFamily="34" charset="-120"/>
               </a:rPr>
               <a:t>80〜90%</a:t>
             </a:r>
-            <a:endParaRPr lang="en-US" sz="2600" dirty="0"/>
+            <a:endParaRPr lang="en-US" sz="2600" dirty="0">
+              <a:latin typeface="BIZ UDPゴシック" panose="020B0400000000000000" pitchFamily="50" charset="-128"/>
+              <a:ea typeface="BIZ UDPゴシック" panose="020B0400000000000000" pitchFamily="50" charset="-128"/>
+            </a:endParaRPr>
           </a:p>
         </p:txBody>
       </p:sp>
@@ -6756,7 +7481,7 @@
           <a:bodyPr wrap="square" lIns="0" tIns="0" rIns="0" bIns="0" rtlCol="0" anchor="ctr"/>
           <a:lstStyle/>
           <a:p>
-            <a:pPr indent="0" marL="0">
+            <a:pPr marL="0" indent="0">
               <a:buNone/>
             </a:pPr>
             <a:r>
@@ -6764,13 +7489,16 @@
                 <a:solidFill>
                   <a:srgbClr val="C9D3E8"/>
                 </a:solidFill>
-                <a:latin typeface="Calibri" pitchFamily="34" charset="0"/>
-                <a:ea typeface="Calibri" pitchFamily="34" charset="-122"/>
+                <a:latin typeface="BIZ UDPゴシック" panose="020B0400000000000000" pitchFamily="50" charset="-128"/>
+                <a:ea typeface="BIZ UDPゴシック" panose="020B0400000000000000" pitchFamily="50" charset="-128"/>
                 <a:cs typeface="Calibri" pitchFamily="34" charset="-120"/>
               </a:rPr>
               <a:t>コードはAIが生成</a:t>
             </a:r>
-            <a:endParaRPr lang="en-US" sz="1200" dirty="0"/>
+            <a:endParaRPr lang="en-US" sz="1200" dirty="0">
+              <a:latin typeface="BIZ UDPゴシック" panose="020B0400000000000000" pitchFamily="50" charset="-128"/>
+              <a:ea typeface="BIZ UDPゴシック" panose="020B0400000000000000" pitchFamily="50" charset="-128"/>
+            </a:endParaRPr>
           </a:p>
         </p:txBody>
       </p:sp>
@@ -6795,7 +7523,7 @@
           <a:bodyPr wrap="square" lIns="0" tIns="0" rIns="0" bIns="0" rtlCol="0" anchor="ctr"/>
           <a:lstStyle/>
           <a:p>
-            <a:pPr algn="l" indent="0" marL="0">
+            <a:pPr marL="0" indent="0" algn="l">
               <a:buNone/>
             </a:pPr>
             <a:r>
@@ -6803,13 +7531,16 @@
                 <a:solidFill>
                   <a:srgbClr val="5B6478"/>
                 </a:solidFill>
-                <a:latin typeface="Calibri" pitchFamily="34" charset="0"/>
-                <a:ea typeface="Calibri" pitchFamily="34" charset="-122"/>
+                <a:latin typeface="BIZ UDPゴシック" panose="020B0400000000000000" pitchFamily="50" charset="-128"/>
+                <a:ea typeface="BIZ UDPゴシック" panose="020B0400000000000000" pitchFamily="50" charset="-128"/>
                 <a:cs typeface="Calibri" pitchFamily="34" charset="-120"/>
               </a:rPr>
               <a:t>AI活用ふりかえり発表</a:t>
             </a:r>
-            <a:endParaRPr lang="en-US" sz="1000" dirty="0"/>
+            <a:endParaRPr lang="en-US" sz="1000" dirty="0">
+              <a:latin typeface="BIZ UDPゴシック" panose="020B0400000000000000" pitchFamily="50" charset="-128"/>
+              <a:ea typeface="BIZ UDPゴシック" panose="020B0400000000000000" pitchFamily="50" charset="-128"/>
+            </a:endParaRPr>
           </a:p>
         </p:txBody>
       </p:sp>
@@ -6834,7 +7565,7 @@
           <a:bodyPr wrap="square" lIns="0" tIns="0" rIns="0" bIns="0" rtlCol="0" anchor="ctr"/>
           <a:lstStyle/>
           <a:p>
-            <a:pPr algn="r" indent="0" marL="0">
+            <a:pPr marL="0" indent="0" algn="r">
               <a:buNone/>
             </a:pPr>
             <a:r>
@@ -6842,13 +7573,16 @@
                 <a:solidFill>
                   <a:srgbClr val="5B6478"/>
                 </a:solidFill>
-                <a:latin typeface="Calibri" pitchFamily="34" charset="0"/>
-                <a:ea typeface="Calibri" pitchFamily="34" charset="-122"/>
+                <a:latin typeface="BIZ UDPゴシック" panose="020B0400000000000000" pitchFamily="50" charset="-128"/>
+                <a:ea typeface="BIZ UDPゴシック" panose="020B0400000000000000" pitchFamily="50" charset="-128"/>
                 <a:cs typeface="Calibri" pitchFamily="34" charset="-120"/>
               </a:rPr>
               <a:t>6</a:t>
             </a:r>
-            <a:endParaRPr lang="en-US" sz="1000" dirty="0"/>
+            <a:endParaRPr lang="en-US" sz="1000" dirty="0">
+              <a:latin typeface="BIZ UDPゴシック" panose="020B0400000000000000" pitchFamily="50" charset="-128"/>
+              <a:ea typeface="BIZ UDPゴシック" panose="020B0400000000000000" pitchFamily="50" charset="-128"/>
+            </a:endParaRPr>
           </a:p>
         </p:txBody>
       </p:sp>
@@ -6868,6 +7602,7 @@
         <a:solidFill>
           <a:srgbClr val="14213D"/>
         </a:solidFill>
+        <a:effectLst/>
       </p:bgPr>
     </p:bg>
     <p:spTree>
@@ -6903,6 +7638,13 @@
           </a:solidFill>
           <a:ln/>
         </p:spPr>
+        <p:txBody>
+          <a:bodyPr/>
+          <a:lstStyle/>
+          <a:p>
+            <a:endParaRPr lang="ja-JP" altLang="en-US"/>
+          </a:p>
+        </p:txBody>
       </p:sp>
       <p:sp>
         <p:nvSpPr>
@@ -6925,7 +7667,7 @@
           <a:bodyPr wrap="square" lIns="0" tIns="0" rIns="0" bIns="0" rtlCol="0" anchor="ctr"/>
           <a:lstStyle/>
           <a:p>
-            <a:pPr indent="0" marL="0">
+            <a:pPr marL="0" indent="0">
               <a:buNone/>
             </a:pPr>
             <a:r>
@@ -6933,13 +7675,16 @@
                 <a:solidFill>
                   <a:srgbClr val="FFFFFF"/>
                 </a:solidFill>
-                <a:latin typeface="Cambria" pitchFamily="34" charset="0"/>
-                <a:ea typeface="Cambria" pitchFamily="34" charset="-122"/>
+                <a:latin typeface="BIZ UDPゴシック" panose="020B0400000000000000" pitchFamily="50" charset="-128"/>
+                <a:ea typeface="BIZ UDPゴシック" panose="020B0400000000000000" pitchFamily="50" charset="-128"/>
                 <a:cs typeface="Cambria" pitchFamily="34" charset="-120"/>
               </a:rPr>
               <a:t>まとめ</a:t>
             </a:r>
-            <a:endParaRPr lang="en-US" sz="3200" dirty="0"/>
+            <a:endParaRPr lang="en-US" sz="3200" dirty="0">
+              <a:latin typeface="BIZ UDPゴシック" panose="020B0400000000000000" pitchFamily="50" charset="-128"/>
+              <a:ea typeface="BIZ UDPゴシック" panose="020B0400000000000000" pitchFamily="50" charset="-128"/>
+            </a:endParaRPr>
           </a:p>
         </p:txBody>
       </p:sp>
@@ -6962,182 +7707,20 @@
           </a:solidFill>
           <a:ln/>
         </p:spPr>
+        <p:txBody>
+          <a:bodyPr/>
+          <a:lstStyle/>
+          <a:p>
+            <a:endParaRPr lang="ja-JP" altLang="en-US">
+              <a:latin typeface="BIZ UDPゴシック" panose="020B0400000000000000" pitchFamily="50" charset="-128"/>
+              <a:ea typeface="BIZ UDPゴシック" panose="020B0400000000000000" pitchFamily="50" charset="-128"/>
+            </a:endParaRPr>
+          </a:p>
+        </p:txBody>
       </p:sp>
       <p:pic>
         <p:nvPicPr>
-          <p:cNvPr id="5" name="Image 0" descr="preencoded.png">    </p:cNvPr>
-          <p:cNvPicPr>
-            <a:picLocks noChangeAspect="1"/>
-          </p:cNvPicPr>
-          <p:nvPr/>
-        </p:nvPicPr>
-        <p:blipFill>
-          <a:blip r:embed="rId1"/>
-          <a:stretch>
-            <a:fillRect/>
-          </a:stretch>
-        </p:blipFill>
-        <p:spPr>
-          <a:xfrm>
-            <a:off x="742950" y="1977390"/>
-            <a:ext cx="251460" cy="251460"/>
-          </a:xfrm>
-          <a:prstGeom prst="rect">
-            <a:avLst/>
-          </a:prstGeom>
-        </p:spPr>
-      </p:pic>
-      <p:sp>
-        <p:nvSpPr>
-          <p:cNvPr id="6" name="Text 3"/>
-          <p:cNvSpPr/>
-          <p:nvPr/>
-        </p:nvSpPr>
-        <p:spPr>
-          <a:xfrm>
-            <a:off x="1280160" y="1874520"/>
-            <a:ext cx="7955280" cy="640080"/>
-          </a:xfrm>
-          <a:prstGeom prst="rect">
-            <a:avLst/>
-          </a:prstGeom>
-          <a:noFill/>
-          <a:ln/>
-        </p:spPr>
-        <p:txBody>
-          <a:bodyPr wrap="square" lIns="0" tIns="0" rIns="0" bIns="0" rtlCol="0" anchor="ctr"/>
-          <a:lstStyle/>
-          <a:p>
-            <a:pPr indent="0" marL="0">
-              <a:lnSpc>
-                <a:spcPct val="130000"/>
-              </a:lnSpc>
-              <a:buNone/>
-            </a:pPr>
-            <a:r>
-              <a:rPr lang="en-US" sz="1450" dirty="0">
-                <a:solidFill>
-                  <a:srgbClr val="FFFFFF"/>
-                </a:solidFill>
-                <a:latin typeface="Calibri" pitchFamily="34" charset="0"/>
-                <a:ea typeface="Calibri" pitchFamily="34" charset="-122"/>
-                <a:cs typeface="Calibri" pitchFamily="34" charset="-120"/>
-              </a:rPr>
-              <a:t>ChatGPTとClaude、役割を分けて開発サイクルを高速に回した</a:t>
-            </a:r>
-            <a:endParaRPr lang="en-US" sz="1450" dirty="0"/>
-          </a:p>
-        </p:txBody>
-      </p:sp>
-      <p:sp>
-        <p:nvSpPr>
-          <p:cNvPr id="7" name="Shape 4"/>
-          <p:cNvSpPr/>
-          <p:nvPr/>
-        </p:nvSpPr>
-        <p:spPr>
-          <a:xfrm>
-            <a:off x="640080" y="2743200"/>
-            <a:ext cx="457200" cy="457200"/>
-          </a:xfrm>
-          <a:prstGeom prst="ellipse">
-            <a:avLst/>
-          </a:prstGeom>
-          <a:solidFill>
-            <a:srgbClr val="2EC4B6"/>
-          </a:solidFill>
-          <a:ln/>
-        </p:spPr>
-      </p:sp>
-      <p:pic>
-        <p:nvPicPr>
-          <p:cNvPr id="8" name="Image 1" descr="preencoded.png">    </p:cNvPr>
-          <p:cNvPicPr>
-            <a:picLocks noChangeAspect="1"/>
-          </p:cNvPicPr>
-          <p:nvPr/>
-        </p:nvPicPr>
-        <p:blipFill>
-          <a:blip r:embed="rId2"/>
-          <a:stretch>
-            <a:fillRect/>
-          </a:stretch>
-        </p:blipFill>
-        <p:spPr>
-          <a:xfrm>
-            <a:off x="742950" y="2846070"/>
-            <a:ext cx="251460" cy="251460"/>
-          </a:xfrm>
-          <a:prstGeom prst="rect">
-            <a:avLst/>
-          </a:prstGeom>
-        </p:spPr>
-      </p:pic>
-      <p:sp>
-        <p:nvSpPr>
-          <p:cNvPr id="9" name="Text 5"/>
-          <p:cNvSpPr/>
-          <p:nvPr/>
-        </p:nvSpPr>
-        <p:spPr>
-          <a:xfrm>
-            <a:off x="1280160" y="2743200"/>
-            <a:ext cx="7955280" cy="640080"/>
-          </a:xfrm>
-          <a:prstGeom prst="rect">
-            <a:avLst/>
-          </a:prstGeom>
-          <a:noFill/>
-          <a:ln/>
-        </p:spPr>
-        <p:txBody>
-          <a:bodyPr wrap="square" lIns="0" tIns="0" rIns="0" bIns="0" rtlCol="0" anchor="ctr"/>
-          <a:lstStyle/>
-          <a:p>
-            <a:pPr indent="0" marL="0">
-              <a:lnSpc>
-                <a:spcPct val="130000"/>
-              </a:lnSpc>
-              <a:buNone/>
-            </a:pPr>
-            <a:r>
-              <a:rPr lang="en-US" sz="1450" dirty="0">
-                <a:solidFill>
-                  <a:srgbClr val="FFFFFF"/>
-                </a:solidFill>
-                <a:latin typeface="Calibri" pitchFamily="34" charset="0"/>
-                <a:ea typeface="Calibri" pitchFamily="34" charset="-122"/>
-                <a:cs typeface="Calibri" pitchFamily="34" charset="-120"/>
-              </a:rPr>
-              <a:t>曖昧に質問しないことが、AI活用の解決率を大きく左右した</a:t>
-            </a:r>
-            <a:endParaRPr lang="en-US" sz="1450" dirty="0"/>
-          </a:p>
-        </p:txBody>
-      </p:sp>
-      <p:sp>
-        <p:nvSpPr>
-          <p:cNvPr id="10" name="Shape 6"/>
-          <p:cNvSpPr/>
-          <p:nvPr/>
-        </p:nvSpPr>
-        <p:spPr>
-          <a:xfrm>
-            <a:off x="640080" y="3611880"/>
-            <a:ext cx="457200" cy="457200"/>
-          </a:xfrm>
-          <a:prstGeom prst="ellipse">
-            <a:avLst/>
-          </a:prstGeom>
-          <a:solidFill>
-            <a:srgbClr val="2EC4B6"/>
-          </a:solidFill>
-          <a:ln/>
-        </p:spPr>
-      </p:sp>
-      <p:pic>
-        <p:nvPicPr>
-          <p:cNvPr id="11" name="Image 2" descr="preencoded.png">    </p:cNvPr>
+          <p:cNvPr id="5" name="Image 0" descr="preencoded.png"/>
           <p:cNvPicPr>
             <a:picLocks noChangeAspect="1"/>
           </p:cNvPicPr>
@@ -7151,7 +7734,7 @@
         </p:blipFill>
         <p:spPr>
           <a:xfrm>
-            <a:off x="742950" y="3714750"/>
+            <a:off x="742950" y="1977390"/>
             <a:ext cx="251460" cy="251460"/>
           </a:xfrm>
           <a:prstGeom prst="rect">
@@ -7161,13 +7744,13 @@
       </p:pic>
       <p:sp>
         <p:nvSpPr>
-          <p:cNvPr id="12" name="Text 7"/>
-          <p:cNvSpPr/>
-          <p:nvPr/>
-        </p:nvSpPr>
-        <p:spPr>
-          <a:xfrm>
-            <a:off x="1280160" y="3611880"/>
+          <p:cNvPr id="6" name="Text 3"/>
+          <p:cNvSpPr/>
+          <p:nvPr/>
+        </p:nvSpPr>
+        <p:spPr>
+          <a:xfrm>
+            <a:off x="1280160" y="1874520"/>
             <a:ext cx="7955280" cy="640080"/>
           </a:xfrm>
           <a:prstGeom prst="rect">
@@ -7180,7 +7763,7 @@
           <a:bodyPr wrap="square" lIns="0" tIns="0" rIns="0" bIns="0" rtlCol="0" anchor="ctr"/>
           <a:lstStyle/>
           <a:p>
-            <a:pPr indent="0" marL="0">
+            <a:pPr marL="0" indent="0">
               <a:lnSpc>
                 <a:spcPct val="130000"/>
               </a:lnSpc>
@@ -7191,13 +7774,214 @@
                 <a:solidFill>
                   <a:srgbClr val="FFFFFF"/>
                 </a:solidFill>
-                <a:latin typeface="Calibri" pitchFamily="34" charset="0"/>
-                <a:ea typeface="Calibri" pitchFamily="34" charset="-122"/>
+                <a:latin typeface="BIZ UDPゴシック" panose="020B0400000000000000" pitchFamily="50" charset="-128"/>
+                <a:ea typeface="BIZ UDPゴシック" panose="020B0400000000000000" pitchFamily="50" charset="-128"/>
                 <a:cs typeface="Calibri" pitchFamily="34" charset="-120"/>
               </a:rPr>
+              <a:t>ChatGPTとClaude、役割を分けて開発サイクルを高速に回した</a:t>
+            </a:r>
+            <a:endParaRPr lang="en-US" sz="1450" dirty="0">
+              <a:latin typeface="BIZ UDPゴシック" panose="020B0400000000000000" pitchFamily="50" charset="-128"/>
+              <a:ea typeface="BIZ UDPゴシック" panose="020B0400000000000000" pitchFamily="50" charset="-128"/>
+            </a:endParaRPr>
+          </a:p>
+        </p:txBody>
+      </p:sp>
+      <p:sp>
+        <p:nvSpPr>
+          <p:cNvPr id="7" name="Shape 4"/>
+          <p:cNvSpPr/>
+          <p:nvPr/>
+        </p:nvSpPr>
+        <p:spPr>
+          <a:xfrm>
+            <a:off x="640080" y="2743200"/>
+            <a:ext cx="457200" cy="457200"/>
+          </a:xfrm>
+          <a:prstGeom prst="ellipse">
+            <a:avLst/>
+          </a:prstGeom>
+          <a:solidFill>
+            <a:srgbClr val="2EC4B6"/>
+          </a:solidFill>
+          <a:ln/>
+        </p:spPr>
+        <p:txBody>
+          <a:bodyPr/>
+          <a:lstStyle/>
+          <a:p>
+            <a:endParaRPr lang="ja-JP" altLang="en-US">
+              <a:latin typeface="BIZ UDPゴシック" panose="020B0400000000000000" pitchFamily="50" charset="-128"/>
+              <a:ea typeface="BIZ UDPゴシック" panose="020B0400000000000000" pitchFamily="50" charset="-128"/>
+            </a:endParaRPr>
+          </a:p>
+        </p:txBody>
+      </p:sp>
+      <p:pic>
+        <p:nvPicPr>
+          <p:cNvPr id="8" name="Image 1" descr="preencoded.png"/>
+          <p:cNvPicPr>
+            <a:picLocks noChangeAspect="1"/>
+          </p:cNvPicPr>
+          <p:nvPr/>
+        </p:nvPicPr>
+        <p:blipFill>
+          <a:blip r:embed="rId4"/>
+          <a:stretch>
+            <a:fillRect/>
+          </a:stretch>
+        </p:blipFill>
+        <p:spPr>
+          <a:xfrm>
+            <a:off x="742950" y="2846070"/>
+            <a:ext cx="251460" cy="251460"/>
+          </a:xfrm>
+          <a:prstGeom prst="rect">
+            <a:avLst/>
+          </a:prstGeom>
+        </p:spPr>
+      </p:pic>
+      <p:sp>
+        <p:nvSpPr>
+          <p:cNvPr id="9" name="Text 5"/>
+          <p:cNvSpPr/>
+          <p:nvPr/>
+        </p:nvSpPr>
+        <p:spPr>
+          <a:xfrm>
+            <a:off x="1280160" y="2743200"/>
+            <a:ext cx="7955280" cy="640080"/>
+          </a:xfrm>
+          <a:prstGeom prst="rect">
+            <a:avLst/>
+          </a:prstGeom>
+          <a:noFill/>
+          <a:ln/>
+        </p:spPr>
+        <p:txBody>
+          <a:bodyPr wrap="square" lIns="0" tIns="0" rIns="0" bIns="0" rtlCol="0" anchor="ctr"/>
+          <a:lstStyle/>
+          <a:p>
+            <a:pPr marL="0" indent="0">
+              <a:lnSpc>
+                <a:spcPct val="130000"/>
+              </a:lnSpc>
+              <a:buNone/>
+            </a:pPr>
+            <a:r>
+              <a:rPr lang="en-US" sz="1450" dirty="0">
+                <a:solidFill>
+                  <a:srgbClr val="FFFFFF"/>
+                </a:solidFill>
+                <a:latin typeface="BIZ UDPゴシック" panose="020B0400000000000000" pitchFamily="50" charset="-128"/>
+                <a:ea typeface="BIZ UDPゴシック" panose="020B0400000000000000" pitchFamily="50" charset="-128"/>
+                <a:cs typeface="Calibri" pitchFamily="34" charset="-120"/>
+              </a:rPr>
+              <a:t>曖昧に質問しないことが、AI活用の解決率を大きく左右した</a:t>
+            </a:r>
+            <a:endParaRPr lang="en-US" sz="1450" dirty="0">
+              <a:latin typeface="BIZ UDPゴシック" panose="020B0400000000000000" pitchFamily="50" charset="-128"/>
+              <a:ea typeface="BIZ UDPゴシック" panose="020B0400000000000000" pitchFamily="50" charset="-128"/>
+            </a:endParaRPr>
+          </a:p>
+        </p:txBody>
+      </p:sp>
+      <p:sp>
+        <p:nvSpPr>
+          <p:cNvPr id="10" name="Shape 6"/>
+          <p:cNvSpPr/>
+          <p:nvPr/>
+        </p:nvSpPr>
+        <p:spPr>
+          <a:xfrm>
+            <a:off x="640080" y="3611880"/>
+            <a:ext cx="457200" cy="457200"/>
+          </a:xfrm>
+          <a:prstGeom prst="ellipse">
+            <a:avLst/>
+          </a:prstGeom>
+          <a:solidFill>
+            <a:srgbClr val="2EC4B6"/>
+          </a:solidFill>
+          <a:ln/>
+        </p:spPr>
+        <p:txBody>
+          <a:bodyPr/>
+          <a:lstStyle/>
+          <a:p>
+            <a:endParaRPr lang="ja-JP" altLang="en-US">
+              <a:latin typeface="BIZ UDPゴシック" panose="020B0400000000000000" pitchFamily="50" charset="-128"/>
+              <a:ea typeface="BIZ UDPゴシック" panose="020B0400000000000000" pitchFamily="50" charset="-128"/>
+            </a:endParaRPr>
+          </a:p>
+        </p:txBody>
+      </p:sp>
+      <p:pic>
+        <p:nvPicPr>
+          <p:cNvPr id="11" name="Image 2" descr="preencoded.png"/>
+          <p:cNvPicPr>
+            <a:picLocks noChangeAspect="1"/>
+          </p:cNvPicPr>
+          <p:nvPr/>
+        </p:nvPicPr>
+        <p:blipFill>
+          <a:blip r:embed="rId5"/>
+          <a:stretch>
+            <a:fillRect/>
+          </a:stretch>
+        </p:blipFill>
+        <p:spPr>
+          <a:xfrm>
+            <a:off x="742950" y="3714750"/>
+            <a:ext cx="251460" cy="251460"/>
+          </a:xfrm>
+          <a:prstGeom prst="rect">
+            <a:avLst/>
+          </a:prstGeom>
+        </p:spPr>
+      </p:pic>
+      <p:sp>
+        <p:nvSpPr>
+          <p:cNvPr id="12" name="Text 7"/>
+          <p:cNvSpPr/>
+          <p:nvPr/>
+        </p:nvSpPr>
+        <p:spPr>
+          <a:xfrm>
+            <a:off x="1280160" y="3611880"/>
+            <a:ext cx="7955280" cy="640080"/>
+          </a:xfrm>
+          <a:prstGeom prst="rect">
+            <a:avLst/>
+          </a:prstGeom>
+          <a:noFill/>
+          <a:ln/>
+        </p:spPr>
+        <p:txBody>
+          <a:bodyPr wrap="square" lIns="0" tIns="0" rIns="0" bIns="0" rtlCol="0" anchor="ctr"/>
+          <a:lstStyle/>
+          <a:p>
+            <a:pPr marL="0" indent="0">
+              <a:lnSpc>
+                <a:spcPct val="130000"/>
+              </a:lnSpc>
+              <a:buNone/>
+            </a:pPr>
+            <a:r>
+              <a:rPr lang="en-US" sz="1450" dirty="0">
+                <a:solidFill>
+                  <a:srgbClr val="FFFFFF"/>
+                </a:solidFill>
+                <a:latin typeface="BIZ UDPゴシック" panose="020B0400000000000000" pitchFamily="50" charset="-128"/>
+                <a:ea typeface="BIZ UDPゴシック" panose="020B0400000000000000" pitchFamily="50" charset="-128"/>
+                <a:cs typeface="Calibri" pitchFamily="34" charset="-120"/>
+              </a:rPr>
               <a:t>開発時間は2日→8時間、コードの80〜90%をAIが生成</a:t>
             </a:r>
-            <a:endParaRPr lang="en-US" sz="1450" dirty="0"/>
+            <a:endParaRPr lang="en-US" sz="1450" dirty="0">
+              <a:latin typeface="BIZ UDPゴシック" panose="020B0400000000000000" pitchFamily="50" charset="-128"/>
+              <a:ea typeface="BIZ UDPゴシック" panose="020B0400000000000000" pitchFamily="50" charset="-128"/>
+            </a:endParaRPr>
           </a:p>
         </p:txBody>
       </p:sp>
@@ -7222,6 +8006,16 @@
           </a:solidFill>
           <a:ln/>
         </p:spPr>
+        <p:txBody>
+          <a:bodyPr/>
+          <a:lstStyle/>
+          <a:p>
+            <a:endParaRPr lang="ja-JP" altLang="en-US">
+              <a:latin typeface="BIZ UDPゴシック" panose="020B0400000000000000" pitchFamily="50" charset="-128"/>
+              <a:ea typeface="BIZ UDPゴシック" panose="020B0400000000000000" pitchFamily="50" charset="-128"/>
+            </a:endParaRPr>
+          </a:p>
+        </p:txBody>
       </p:sp>
       <p:sp>
         <p:nvSpPr>
@@ -7244,7 +8038,7 @@
           <a:bodyPr wrap="square" lIns="0" tIns="0" rIns="0" bIns="0" rtlCol="0" anchor="ctr"/>
           <a:lstStyle/>
           <a:p>
-            <a:pPr indent="0" marL="0">
+            <a:pPr marL="0" indent="0">
               <a:lnSpc>
                 <a:spcPct val="130000"/>
               </a:lnSpc>
@@ -7255,16 +8049,19 @@
                 <a:solidFill>
                   <a:srgbClr val="14213D"/>
                 </a:solidFill>
-                <a:latin typeface="Cambria" pitchFamily="34" charset="0"/>
-                <a:ea typeface="Cambria" pitchFamily="34" charset="-122"/>
+                <a:latin typeface="BIZ UDPゴシック" panose="020B0400000000000000" pitchFamily="50" charset="-128"/>
+                <a:ea typeface="BIZ UDPゴシック" panose="020B0400000000000000" pitchFamily="50" charset="-128"/>
                 <a:cs typeface="Cambria" pitchFamily="34" charset="-120"/>
               </a:rPr>
               <a:t>成果物の完成度より、AIとどう向き合ったか。</a:t>
             </a:r>
-            <a:endParaRPr lang="en-US" sz="1700" dirty="0"/>
-          </a:p>
-          <a:p>
-            <a:pPr indent="0" marL="0">
+            <a:endParaRPr lang="en-US" sz="1700" dirty="0">
+              <a:latin typeface="BIZ UDPゴシック" panose="020B0400000000000000" pitchFamily="50" charset="-128"/>
+              <a:ea typeface="BIZ UDPゴシック" panose="020B0400000000000000" pitchFamily="50" charset="-128"/>
+            </a:endParaRPr>
+          </a:p>
+          <a:p>
+            <a:pPr marL="0" indent="0">
               <a:lnSpc>
                 <a:spcPct val="130000"/>
               </a:lnSpc>
@@ -7275,13 +8072,16 @@
                 <a:solidFill>
                   <a:srgbClr val="14213D"/>
                 </a:solidFill>
-                <a:latin typeface="Cambria" pitchFamily="34" charset="0"/>
-                <a:ea typeface="Cambria" pitchFamily="34" charset="-122"/>
+                <a:latin typeface="BIZ UDPゴシック" panose="020B0400000000000000" pitchFamily="50" charset="-128"/>
+                <a:ea typeface="BIZ UDPゴシック" panose="020B0400000000000000" pitchFamily="50" charset="-128"/>
                 <a:cs typeface="Cambria" pitchFamily="34" charset="-120"/>
               </a:rPr>
               <a:t>そのプロセスこそ、今日一番伝えたいことです。</a:t>
             </a:r>
-            <a:endParaRPr lang="en-US" sz="1700" dirty="0"/>
+            <a:endParaRPr lang="en-US" sz="1700" dirty="0">
+              <a:latin typeface="BIZ UDPゴシック" panose="020B0400000000000000" pitchFamily="50" charset="-128"/>
+              <a:ea typeface="BIZ UDPゴシック" panose="020B0400000000000000" pitchFamily="50" charset="-128"/>
+            </a:endParaRPr>
           </a:p>
         </p:txBody>
       </p:sp>
@@ -7306,7 +8106,7 @@
           <a:bodyPr wrap="square" lIns="0" tIns="0" rIns="0" bIns="0" rtlCol="0" anchor="ctr"/>
           <a:lstStyle/>
           <a:p>
-            <a:pPr algn="l" indent="0" marL="0">
+            <a:pPr marL="0" indent="0" algn="l">
               <a:buNone/>
             </a:pPr>
             <a:r>
@@ -7314,13 +8114,16 @@
                 <a:solidFill>
                   <a:srgbClr val="8FA0C4"/>
                 </a:solidFill>
-                <a:latin typeface="Calibri" pitchFamily="34" charset="0"/>
-                <a:ea typeface="Calibri" pitchFamily="34" charset="-122"/>
+                <a:latin typeface="BIZ UDPゴシック" panose="020B0400000000000000" pitchFamily="50" charset="-128"/>
+                <a:ea typeface="BIZ UDPゴシック" panose="020B0400000000000000" pitchFamily="50" charset="-128"/>
                 <a:cs typeface="Calibri" pitchFamily="34" charset="-120"/>
               </a:rPr>
               <a:t>AI活用ふりかえり発表</a:t>
             </a:r>
-            <a:endParaRPr lang="en-US" sz="1000" dirty="0"/>
+            <a:endParaRPr lang="en-US" sz="1000" dirty="0">
+              <a:latin typeface="BIZ UDPゴシック" panose="020B0400000000000000" pitchFamily="50" charset="-128"/>
+              <a:ea typeface="BIZ UDPゴシック" panose="020B0400000000000000" pitchFamily="50" charset="-128"/>
+            </a:endParaRPr>
           </a:p>
         </p:txBody>
       </p:sp>
@@ -7345,7 +8148,7 @@
           <a:bodyPr wrap="square" lIns="0" tIns="0" rIns="0" bIns="0" rtlCol="0" anchor="ctr"/>
           <a:lstStyle/>
           <a:p>
-            <a:pPr algn="r" indent="0" marL="0">
+            <a:pPr marL="0" indent="0" algn="r">
               <a:buNone/>
             </a:pPr>
             <a:r>
@@ -7353,13 +8156,16 @@
                 <a:solidFill>
                   <a:srgbClr val="8FA0C4"/>
                 </a:solidFill>
-                <a:latin typeface="Calibri" pitchFamily="34" charset="0"/>
-                <a:ea typeface="Calibri" pitchFamily="34" charset="-122"/>
+                <a:latin typeface="BIZ UDPゴシック" panose="020B0400000000000000" pitchFamily="50" charset="-128"/>
+                <a:ea typeface="BIZ UDPゴシック" panose="020B0400000000000000" pitchFamily="50" charset="-128"/>
                 <a:cs typeface="Calibri" pitchFamily="34" charset="-120"/>
               </a:rPr>
               <a:t>7</a:t>
             </a:r>
-            <a:endParaRPr lang="en-US" sz="1000" dirty="0"/>
+            <a:endParaRPr lang="en-US" sz="1000" dirty="0">
+              <a:latin typeface="BIZ UDPゴシック" panose="020B0400000000000000" pitchFamily="50" charset="-128"/>
+              <a:ea typeface="BIZ UDPゴシック" panose="020B0400000000000000" pitchFamily="50" charset="-128"/>
+            </a:endParaRPr>
           </a:p>
         </p:txBody>
       </p:sp>
@@ -7664,4 +8470,319 @@
     </a:ext>
   </a:extLst>
 </a:theme>
+</file>
+
+<file path=ppt/theme/theme2.xml><?xml version="1.0" encoding="utf-8"?>
+<a:theme xmlns:a="http://schemas.openxmlformats.org/drawingml/2006/main" name="Office テーマ">
+  <a:themeElements>
+    <a:clrScheme name="Office">
+      <a:dk1>
+        <a:sysClr val="windowText" lastClr="000000"/>
+      </a:dk1>
+      <a:lt1>
+        <a:sysClr val="window" lastClr="FFFFFF"/>
+      </a:lt1>
+      <a:dk2>
+        <a:srgbClr val="0E2841"/>
+      </a:dk2>
+      <a:lt2>
+        <a:srgbClr val="E8E8E8"/>
+      </a:lt2>
+      <a:accent1>
+        <a:srgbClr val="156082"/>
+      </a:accent1>
+      <a:accent2>
+        <a:srgbClr val="E97132"/>
+      </a:accent2>
+      <a:accent3>
+        <a:srgbClr val="196B24"/>
+      </a:accent3>
+      <a:accent4>
+        <a:srgbClr val="0F9ED5"/>
+      </a:accent4>
+      <a:accent5>
+        <a:srgbClr val="A02B93"/>
+      </a:accent5>
+      <a:accent6>
+        <a:srgbClr val="4EA72E"/>
+      </a:accent6>
+      <a:hlink>
+        <a:srgbClr val="467886"/>
+      </a:hlink>
+      <a:folHlink>
+        <a:srgbClr val="96607D"/>
+      </a:folHlink>
+    </a:clrScheme>
+    <a:fontScheme name="Office">
+      <a:majorFont>
+        <a:latin typeface="游ゴシック Light" panose="02110004020202020204"/>
+        <a:ea typeface=""/>
+        <a:cs typeface=""/>
+        <a:font script="Jpan" typeface="游ゴシック Light"/>
+        <a:font script="Hang" typeface="맑은 고딕"/>
+        <a:font script="Hans" typeface="等线 Light"/>
+        <a:font script="Hant" typeface="新細明體"/>
+        <a:font script="Arab" typeface="Times New Roman"/>
+        <a:font script="Hebr" typeface="Times New Roman"/>
+        <a:font script="Thai" typeface="Angsana New"/>
+        <a:font script="Ethi" typeface="Nyala"/>
+        <a:font script="Beng" typeface="Vrinda"/>
+        <a:font script="Gujr" typeface="Shruti"/>
+        <a:font script="Khmr" typeface="MoolBoran"/>
+        <a:font script="Knda" typeface="Tunga"/>
+        <a:font script="Guru" typeface="Raavi"/>
+        <a:font script="Cans" typeface="Euphemia"/>
+        <a:font script="Cher" typeface="Plantagenet Cherokee"/>
+        <a:font script="Yiii" typeface="Microsoft Yi Baiti"/>
+        <a:font script="Tibt" typeface="Microsoft Himalaya"/>
+        <a:font script="Thaa" typeface="MV Boli"/>
+        <a:font script="Deva" typeface="Mangal"/>
+        <a:font script="Telu" typeface="Gautami"/>
+        <a:font script="Taml" typeface="Latha"/>
+        <a:font script="Syrc" typeface="Estrangelo Edessa"/>
+        <a:font script="Orya" typeface="Kalinga"/>
+        <a:font script="Mlym" typeface="Kartika"/>
+        <a:font script="Laoo" typeface="DokChampa"/>
+        <a:font script="Sinh" typeface="Iskoola Pota"/>
+        <a:font script="Mong" typeface="Mongolian Baiti"/>
+        <a:font script="Viet" typeface="Times New Roman"/>
+        <a:font script="Uigh" typeface="Microsoft Uighur"/>
+        <a:font script="Geor" typeface="Sylfaen"/>
+        <a:font script="Armn" typeface="Arial"/>
+        <a:font script="Bugi" typeface="Leelawadee UI"/>
+        <a:font script="Bopo" typeface="Microsoft JhengHei"/>
+        <a:font script="Java" typeface="Javanese Text"/>
+        <a:font script="Lisu" typeface="Segoe UI"/>
+        <a:font script="Mymr" typeface="Myanmar Text"/>
+        <a:font script="Nkoo" typeface="Ebrima"/>
+        <a:font script="Olck" typeface="Nirmala UI"/>
+        <a:font script="Osma" typeface="Ebrima"/>
+        <a:font script="Phag" typeface="Phagspa"/>
+        <a:font script="Syrn" typeface="Estrangelo Edessa"/>
+        <a:font script="Syrj" typeface="Estrangelo Edessa"/>
+        <a:font script="Syre" typeface="Estrangelo Edessa"/>
+        <a:font script="Sora" typeface="Nirmala UI"/>
+        <a:font script="Tale" typeface="Microsoft Tai Le"/>
+        <a:font script="Talu" typeface="Microsoft New Tai Lue"/>
+        <a:font script="Tfng" typeface="Ebrima"/>
+      </a:majorFont>
+      <a:minorFont>
+        <a:latin typeface="游ゴシック" panose="02110004020202020204"/>
+        <a:ea typeface=""/>
+        <a:cs typeface=""/>
+        <a:font script="Jpan" typeface="游ゴシック"/>
+        <a:font script="Hang" typeface="맑은 고딕"/>
+        <a:font script="Hans" typeface="等线"/>
+        <a:font script="Hant" typeface="新細明體"/>
+        <a:font script="Arab" typeface="Arial"/>
+        <a:font script="Hebr" typeface="Arial"/>
+        <a:font script="Thai" typeface="Cordia New"/>
+        <a:font script="Ethi" typeface="Nyala"/>
+        <a:font script="Beng" typeface="Vrinda"/>
+        <a:font script="Gujr" typeface="Shruti"/>
+        <a:font script="Khmr" typeface="DaunPenh"/>
+        <a:font script="Knda" typeface="Tunga"/>
+        <a:font script="Guru" typeface="Raavi"/>
+        <a:font script="Cans" typeface="Euphemia"/>
+        <a:font script="Cher" typeface="Plantagenet Cherokee"/>
+        <a:font script="Yiii" typeface="Microsoft Yi Baiti"/>
+        <a:font script="Tibt" typeface="Microsoft Himalaya"/>
+        <a:font script="Thaa" typeface="MV Boli"/>
+        <a:font script="Deva" typeface="Mangal"/>
+        <a:font script="Telu" typeface="Gautami"/>
+        <a:font script="Taml" typeface="Latha"/>
+        <a:font script="Syrc" typeface="Estrangelo Edessa"/>
+        <a:font script="Orya" typeface="Kalinga"/>
+        <a:font script="Mlym" typeface="Kartika"/>
+        <a:font script="Laoo" typeface="DokChampa"/>
+        <a:font script="Sinh" typeface="Iskoola Pota"/>
+        <a:font script="Mong" typeface="Mongolian Baiti"/>
+        <a:font script="Viet" typeface="Arial"/>
+        <a:font script="Uigh" typeface="Microsoft Uighur"/>
+        <a:font script="Geor" typeface="Sylfaen"/>
+        <a:font script="Armn" typeface="Arial"/>
+        <a:font script="Bugi" typeface="Leelawadee UI"/>
+        <a:font script="Bopo" typeface="Microsoft JhengHei"/>
+        <a:font script="Java" typeface="Javanese Text"/>
+        <a:font script="Lisu" typeface="Segoe UI"/>
+        <a:font script="Mymr" typeface="Myanmar Text"/>
+        <a:font script="Nkoo" typeface="Ebrima"/>
+        <a:font script="Olck" typeface="Nirmala UI"/>
+        <a:font script="Osma" typeface="Ebrima"/>
+        <a:font script="Phag" typeface="Phagspa"/>
+        <a:font script="Syrn" typeface="Estrangelo Edessa"/>
+        <a:font script="Syrj" typeface="Estrangelo Edessa"/>
+        <a:font script="Syre" typeface="Estrangelo Edessa"/>
+        <a:font script="Sora" typeface="Nirmala UI"/>
+        <a:font script="Tale" typeface="Microsoft Tai Le"/>
+        <a:font script="Talu" typeface="Microsoft New Tai Lue"/>
+        <a:font script="Tfng" typeface="Ebrima"/>
+      </a:minorFont>
+    </a:fontScheme>
+    <a:fmtScheme name="Office">
+      <a:fillStyleLst>
+        <a:solidFill>
+          <a:schemeClr val="phClr"/>
+        </a:solidFill>
+        <a:gradFill rotWithShape="1">
+          <a:gsLst>
+            <a:gs pos="0">
+              <a:schemeClr val="phClr">
+                <a:lumMod val="110000"/>
+                <a:satMod val="105000"/>
+                <a:tint val="67000"/>
+              </a:schemeClr>
+            </a:gs>
+            <a:gs pos="50000">
+              <a:schemeClr val="phClr">
+                <a:lumMod val="105000"/>
+                <a:satMod val="103000"/>
+                <a:tint val="73000"/>
+              </a:schemeClr>
+            </a:gs>
+            <a:gs pos="100000">
+              <a:schemeClr val="phClr">
+                <a:lumMod val="105000"/>
+                <a:satMod val="109000"/>
+                <a:tint val="81000"/>
+              </a:schemeClr>
+            </a:gs>
+          </a:gsLst>
+          <a:lin ang="5400000" scaled="0"/>
+        </a:gradFill>
+        <a:gradFill rotWithShape="1">
+          <a:gsLst>
+            <a:gs pos="0">
+              <a:schemeClr val="phClr">
+                <a:satMod val="103000"/>
+                <a:lumMod val="102000"/>
+                <a:tint val="94000"/>
+              </a:schemeClr>
+            </a:gs>
+            <a:gs pos="50000">
+              <a:schemeClr val="phClr">
+                <a:satMod val="110000"/>
+                <a:lumMod val="100000"/>
+                <a:shade val="100000"/>
+              </a:schemeClr>
+            </a:gs>
+            <a:gs pos="100000">
+              <a:schemeClr val="phClr">
+                <a:lumMod val="99000"/>
+                <a:satMod val="120000"/>
+                <a:shade val="78000"/>
+              </a:schemeClr>
+            </a:gs>
+          </a:gsLst>
+          <a:lin ang="5400000" scaled="0"/>
+        </a:gradFill>
+      </a:fillStyleLst>
+      <a:lnStyleLst>
+        <a:ln w="12700" cap="flat" cmpd="sng" algn="ctr">
+          <a:solidFill>
+            <a:schemeClr val="phClr"/>
+          </a:solidFill>
+          <a:prstDash val="solid"/>
+          <a:miter lim="800000"/>
+        </a:ln>
+        <a:ln w="19050" cap="flat" cmpd="sng" algn="ctr">
+          <a:solidFill>
+            <a:schemeClr val="phClr"/>
+          </a:solidFill>
+          <a:prstDash val="solid"/>
+          <a:miter lim="800000"/>
+        </a:ln>
+        <a:ln w="25400" cap="flat" cmpd="sng" algn="ctr">
+          <a:solidFill>
+            <a:schemeClr val="phClr"/>
+          </a:solidFill>
+          <a:prstDash val="solid"/>
+          <a:miter lim="800000"/>
+        </a:ln>
+      </a:lnStyleLst>
+      <a:effectStyleLst>
+        <a:effectStyle>
+          <a:effectLst/>
+        </a:effectStyle>
+        <a:effectStyle>
+          <a:effectLst/>
+        </a:effectStyle>
+        <a:effectStyle>
+          <a:effectLst>
+            <a:outerShdw blurRad="57150" dist="19050" dir="5400000" algn="ctr" rotWithShape="0">
+              <a:srgbClr val="000000">
+                <a:alpha val="63000"/>
+              </a:srgbClr>
+            </a:outerShdw>
+          </a:effectLst>
+        </a:effectStyle>
+      </a:effectStyleLst>
+      <a:bgFillStyleLst>
+        <a:solidFill>
+          <a:schemeClr val="phClr"/>
+        </a:solidFill>
+        <a:solidFill>
+          <a:schemeClr val="phClr">
+            <a:tint val="95000"/>
+            <a:satMod val="170000"/>
+          </a:schemeClr>
+        </a:solidFill>
+        <a:gradFill rotWithShape="1">
+          <a:gsLst>
+            <a:gs pos="0">
+              <a:schemeClr val="phClr">
+                <a:tint val="93000"/>
+                <a:satMod val="150000"/>
+                <a:shade val="98000"/>
+                <a:lumMod val="102000"/>
+              </a:schemeClr>
+            </a:gs>
+            <a:gs pos="50000">
+              <a:schemeClr val="phClr">
+                <a:tint val="98000"/>
+                <a:satMod val="130000"/>
+                <a:shade val="90000"/>
+                <a:lumMod val="103000"/>
+              </a:schemeClr>
+            </a:gs>
+            <a:gs pos="100000">
+              <a:schemeClr val="phClr">
+                <a:shade val="63000"/>
+                <a:satMod val="120000"/>
+              </a:schemeClr>
+            </a:gs>
+          </a:gsLst>
+          <a:lin ang="5400000" scaled="0"/>
+        </a:gradFill>
+      </a:bgFillStyleLst>
+    </a:fmtScheme>
+  </a:themeElements>
+  <a:objectDefaults>
+    <a:lnDef>
+      <a:spPr/>
+      <a:bodyPr/>
+      <a:lstStyle/>
+      <a:style>
+        <a:lnRef idx="2">
+          <a:schemeClr val="accent1"/>
+        </a:lnRef>
+        <a:fillRef idx="0">
+          <a:schemeClr val="accent1"/>
+        </a:fillRef>
+        <a:effectRef idx="1">
+          <a:schemeClr val="accent1"/>
+        </a:effectRef>
+        <a:fontRef idx="minor">
+          <a:schemeClr val="tx1"/>
+        </a:fontRef>
+      </a:style>
+    </a:lnDef>
+  </a:objectDefaults>
+  <a:extraClrSchemeLst/>
+  <a:extLst>
+    <a:ext uri="{05A4C25C-085E-4340-85A3-A5531E510DB2}">
+      <thm15:themeFamily xmlns:thm15="http://schemas.microsoft.com/office/thememl/2012/main" name="Office Theme" id="{2E142A2C-CD16-42D6-873A-C26D2A0506FA}" vid="{1BDDFF52-6CD6-40A5-AB3C-68EB2F1E4D0A}"/>
+    </a:ext>
+  </a:extLst>
+</a:theme>
 </file>